--- a/docs/pitch_deck.pptx
+++ b/docs/pitch_deck.pptx
@@ -3144,8 +3144,8 @@
         </p:nvSpPr>
         <p:spPr>
           <a:xfrm>
-            <a:off x="7772400" y="0"/>
-            <a:ext cx="4389120" cy="6858000"/>
+            <a:off x="8183879" y="0"/>
+            <a:ext cx="4005072" cy="6858000"/>
           </a:xfrm>
           <a:prstGeom prst="rect">
             <a:avLst/>
@@ -3182,284 +3182,203 @@
       </p:sp>
       <p:sp>
         <p:nvSpPr>
-          <p:cNvPr id="4" name="Rectangle 3"/>
+          <p:cNvPr id="4" name="TextBox 3"/>
+          <p:cNvSpPr txBox="1"/>
+          <p:nvPr/>
+        </p:nvSpPr>
+        <p:spPr>
+          <a:xfrm>
+            <a:off x="640080" y="502920"/>
+            <a:ext cx="731520" cy="731520"/>
+          </a:xfrm>
+          <a:prstGeom prst="rect">
+            <a:avLst/>
+          </a:prstGeom>
+          <a:noFill/>
+        </p:spPr>
+        <p:txBody>
+          <a:bodyPr wrap="square" anchor="t" lIns="0" rIns="0" tIns="0" bIns="0">
+            <a:noAutofit/>
+          </a:bodyPr>
+          <a:lstStyle/>
+          <a:p>
+            <a:pPr algn="l">
+              <a:lnSpc>
+                <a:spcPct val="115000"/>
+              </a:lnSpc>
+            </a:pPr>
+            <a:r>
+              <a:rPr sz="4400" b="0" i="0">
+                <a:solidFill>
+                  <a:srgbClr val="F59E0B"/>
+                </a:solidFill>
+                <a:latin typeface="Georgia"/>
+              </a:rPr>
+              <a:t>🌸</a:t>
+            </a:r>
+          </a:p>
+        </p:txBody>
+      </p:sp>
+      <p:sp>
+        <p:nvSpPr>
+          <p:cNvPr id="5" name="TextBox 4"/>
+          <p:cNvSpPr txBox="1"/>
+          <p:nvPr/>
+        </p:nvSpPr>
+        <p:spPr>
+          <a:xfrm>
+            <a:off x="1325880" y="777240"/>
+            <a:ext cx="10972800" cy="274320"/>
+          </a:xfrm>
+          <a:prstGeom prst="rect">
+            <a:avLst/>
+          </a:prstGeom>
+          <a:noFill/>
+        </p:spPr>
+        <p:txBody>
+          <a:bodyPr wrap="square" anchor="t" lIns="0" rIns="0" tIns="0" bIns="0">
+            <a:noAutofit/>
+          </a:bodyPr>
+          <a:lstStyle/>
+          <a:p>
+            <a:pPr algn="l">
+              <a:lnSpc>
+                <a:spcPct val="115000"/>
+              </a:lnSpc>
+            </a:pPr>
+            <a:r>
+              <a:rPr sz="1000" b="1" i="0" spc="200">
+                <a:solidFill>
+                  <a:srgbClr val="B45309"/>
+                </a:solidFill>
+                <a:latin typeface="Helvetica Neue"/>
+              </a:rPr>
+              <a:t>AGENT FORGE AI HACKATHON  ·  SAN FRANCISCO  ·  MAY 16 2026</a:t>
+            </a:r>
+          </a:p>
+        </p:txBody>
+      </p:sp>
+      <p:sp>
+        <p:nvSpPr>
+          <p:cNvPr id="6" name="TextBox 5"/>
+          <p:cNvSpPr txBox="1"/>
+          <p:nvPr/>
+        </p:nvSpPr>
+        <p:spPr>
+          <a:xfrm>
+            <a:off x="640080" y="1691640"/>
+            <a:ext cx="7498079" cy="2834640"/>
+          </a:xfrm>
+          <a:prstGeom prst="rect">
+            <a:avLst/>
+          </a:prstGeom>
+          <a:noFill/>
+        </p:spPr>
+        <p:txBody>
+          <a:bodyPr wrap="square" anchor="t" lIns="0" rIns="0" tIns="0" bIns="0">
+            <a:noAutofit/>
+          </a:bodyPr>
+          <a:lstStyle/>
+          <a:p>
+            <a:pPr algn="l">
+              <a:lnSpc>
+                <a:spcPct val="115000"/>
+              </a:lnSpc>
+            </a:pPr>
+            <a:r>
+              <a:rPr sz="4000" b="1" i="0">
+                <a:solidFill>
+                  <a:srgbClr val="09090B"/>
+                </a:solidFill>
+                <a:latin typeface="Georgia"/>
+              </a:rPr>
+              <a:t>The friend every working</a:t>
+            </a:r>
+          </a:p>
+          <a:p>
+            <a:pPr algn="l">
+              <a:lnSpc>
+                <a:spcPct val="115000"/>
+              </a:lnSpc>
+            </a:pPr>
+            <a:r>
+              <a:rPr sz="4000" b="1" i="0">
+                <a:solidFill>
+                  <a:srgbClr val="09090B"/>
+                </a:solidFill>
+                <a:latin typeface="Georgia"/>
+              </a:rPr>
+              <a:t>mom can </a:t>
+            </a:r>
+            <a:r>
+              <a:rPr sz="4000" b="1" i="1">
+                <a:solidFill>
+                  <a:srgbClr val="B45309"/>
+                </a:solidFill>
+                <a:latin typeface="Georgia"/>
+              </a:rPr>
+              <a:t>finally afford</a:t>
+            </a:r>
+            <a:r>
+              <a:rPr sz="4000" b="1" i="0">
+                <a:solidFill>
+                  <a:srgbClr val="09090B"/>
+                </a:solidFill>
+                <a:latin typeface="Georgia"/>
+              </a:rPr>
+              <a:t>.</a:t>
+            </a:r>
+          </a:p>
+        </p:txBody>
+      </p:sp>
+      <p:sp>
+        <p:nvSpPr>
+          <p:cNvPr id="7" name="TextBox 6"/>
+          <p:cNvSpPr txBox="1"/>
+          <p:nvPr/>
+        </p:nvSpPr>
+        <p:spPr>
+          <a:xfrm>
+            <a:off x="640080" y="4526280"/>
+            <a:ext cx="7498079" cy="1188720"/>
+          </a:xfrm>
+          <a:prstGeom prst="rect">
+            <a:avLst/>
+          </a:prstGeom>
+          <a:noFill/>
+        </p:spPr>
+        <p:txBody>
+          <a:bodyPr wrap="square" anchor="t" lIns="0" rIns="0" tIns="0" bIns="0">
+            <a:noAutofit/>
+          </a:bodyPr>
+          <a:lstStyle/>
+          <a:p>
+            <a:pPr algn="l">
+              <a:lnSpc>
+                <a:spcPct val="140000"/>
+              </a:lnSpc>
+            </a:pPr>
+            <a:r>
+              <a:rPr sz="1600" b="0" i="0">
+                <a:solidFill>
+                  <a:srgbClr val="3F3F46"/>
+                </a:solidFill>
+                <a:latin typeface="Helvetica Neue"/>
+              </a:rPr>
+              <a:t>A 5-agent AI swarm that delivers $2,000 of consultant work — market research, compliance review, copywriting, launch — free, for America's 7 million working single moms.</a:t>
+            </a:r>
+          </a:p>
+        </p:txBody>
+      </p:sp>
+      <p:sp>
+        <p:nvSpPr>
+          <p:cNvPr id="8" name="Rounded Rectangle 7"/>
           <p:cNvSpPr/>
           <p:nvPr/>
         </p:nvSpPr>
         <p:spPr>
           <a:xfrm>
-            <a:off x="8686800" y="0"/>
-            <a:ext cx="3474720" cy="6858000"/>
-          </a:xfrm>
-          <a:prstGeom prst="rect">
-            <a:avLst/>
-          </a:prstGeom>
-          <a:solidFill>
-            <a:srgbClr val="FEF3C7"/>
-          </a:solidFill>
-          <a:ln>
-            <a:noFill/>
-          </a:ln>
-          <a:effectLst/>
-        </p:spPr>
-        <p:style>
-          <a:lnRef idx="1">
-            <a:schemeClr val="accent1"/>
-          </a:lnRef>
-          <a:fillRef idx="3">
-            <a:schemeClr val="accent1"/>
-          </a:fillRef>
-          <a:effectRef idx="2">
-            <a:schemeClr val="accent1"/>
-          </a:effectRef>
-          <a:fontRef idx="minor">
-            <a:schemeClr val="lt1"/>
-          </a:fontRef>
-        </p:style>
-        <p:txBody>
-          <a:bodyPr rtlCol="0" anchor="ctr"/>
-          <a:lstStyle/>
-          <a:p>
-            <a:pPr algn="ctr"/>
-          </a:p>
-        </p:txBody>
-      </p:sp>
-      <p:sp>
-        <p:nvSpPr>
-          <p:cNvPr id="5" name="TextBox 4"/>
-          <p:cNvSpPr txBox="1"/>
-          <p:nvPr/>
-        </p:nvSpPr>
-        <p:spPr>
-          <a:xfrm>
-            <a:off x="640080" y="502920"/>
-            <a:ext cx="914400" cy="914400"/>
-          </a:xfrm>
-          <a:prstGeom prst="rect">
-            <a:avLst/>
-          </a:prstGeom>
-          <a:noFill/>
-        </p:spPr>
-        <p:txBody>
-          <a:bodyPr wrap="square" anchor="t" lIns="0" rIns="0" tIns="0" bIns="0">
-            <a:spAutoFit/>
-          </a:bodyPr>
-          <a:lstStyle/>
-          <a:p>
-            <a:pPr algn="l">
-              <a:lnSpc>
-                <a:spcPct val="115000"/>
-              </a:lnSpc>
-            </a:pPr>
-            <a:r>
-              <a:rPr sz="6000" b="0" i="0">
-                <a:solidFill>
-                  <a:srgbClr val="F59E0B"/>
-                </a:solidFill>
-                <a:latin typeface="Georgia"/>
-              </a:rPr>
-              <a:t>🌸</a:t>
-            </a:r>
-          </a:p>
-        </p:txBody>
-      </p:sp>
-      <p:sp>
-        <p:nvSpPr>
-          <p:cNvPr id="6" name="TextBox 5"/>
-          <p:cNvSpPr txBox="1"/>
-          <p:nvPr/>
-        </p:nvSpPr>
-        <p:spPr>
-          <a:xfrm>
-            <a:off x="1600200" y="777240"/>
-            <a:ext cx="9144000" cy="274320"/>
-          </a:xfrm>
-          <a:prstGeom prst="rect">
-            <a:avLst/>
-          </a:prstGeom>
-          <a:noFill/>
-        </p:spPr>
-        <p:txBody>
-          <a:bodyPr wrap="square" anchor="t" lIns="0" rIns="0" tIns="0" bIns="0">
-            <a:spAutoFit/>
-          </a:bodyPr>
-          <a:lstStyle/>
-          <a:p>
-            <a:pPr algn="l">
-              <a:lnSpc>
-                <a:spcPct val="115000"/>
-              </a:lnSpc>
-            </a:pPr>
-            <a:r>
-              <a:rPr sz="1000" b="1" i="0" spc="200">
-                <a:solidFill>
-                  <a:srgbClr val="B45309"/>
-                </a:solidFill>
-                <a:latin typeface="Helvetica Neue"/>
-              </a:rPr>
-              <a:t>AGENT FORGE AI HACKATHON  ·  SAN FRANCISCO  ·  MAY 16 2026</a:t>
-            </a:r>
-          </a:p>
-        </p:txBody>
-      </p:sp>
-      <p:sp>
-        <p:nvSpPr>
-          <p:cNvPr id="7" name="TextBox 6"/>
-          <p:cNvSpPr txBox="1"/>
-          <p:nvPr/>
-        </p:nvSpPr>
-        <p:spPr>
-          <a:xfrm>
-            <a:off x="640080" y="1645920"/>
-            <a:ext cx="8046720" cy="2194560"/>
-          </a:xfrm>
-          <a:prstGeom prst="rect">
-            <a:avLst/>
-          </a:prstGeom>
-          <a:noFill/>
-        </p:spPr>
-        <p:txBody>
-          <a:bodyPr wrap="square" anchor="t" lIns="0" rIns="0" tIns="0" bIns="0">
-            <a:spAutoFit/>
-          </a:bodyPr>
-          <a:lstStyle/>
-          <a:p>
-            <a:pPr algn="l">
-              <a:lnSpc>
-                <a:spcPct val="100000"/>
-              </a:lnSpc>
-            </a:pPr>
-            <a:r>
-              <a:rPr sz="5400" b="1" i="0">
-                <a:solidFill>
-                  <a:srgbClr val="09090B"/>
-                </a:solidFill>
-                <a:latin typeface="Georgia"/>
-              </a:rPr>
-              <a:t>The friend every working mom</a:t>
-            </a:r>
-          </a:p>
-          <a:p>
-            <a:pPr algn="l">
-              <a:lnSpc>
-                <a:spcPct val="100000"/>
-              </a:lnSpc>
-            </a:pPr>
-            <a:r>
-              <a:rPr sz="5400" b="1" i="0">
-                <a:solidFill>
-                  <a:srgbClr val="09090B"/>
-                </a:solidFill>
-                <a:latin typeface="Georgia"/>
-              </a:rPr>
-              <a:t>can </a:t>
-            </a:r>
-          </a:p>
-        </p:txBody>
-      </p:sp>
-      <p:sp>
-        <p:nvSpPr>
-          <p:cNvPr id="8" name="TextBox 7"/>
-          <p:cNvSpPr txBox="1"/>
-          <p:nvPr/>
-        </p:nvSpPr>
-        <p:spPr>
-          <a:xfrm>
-            <a:off x="1463040" y="2743200"/>
-            <a:ext cx="6400800" cy="914400"/>
-          </a:xfrm>
-          <a:prstGeom prst="rect">
-            <a:avLst/>
-          </a:prstGeom>
-          <a:noFill/>
-        </p:spPr>
-        <p:txBody>
-          <a:bodyPr wrap="square" anchor="t" lIns="0" rIns="0" tIns="0" bIns="0">
-            <a:spAutoFit/>
-          </a:bodyPr>
-          <a:lstStyle/>
-          <a:p>
-            <a:pPr algn="l">
-              <a:lnSpc>
-                <a:spcPct val="100000"/>
-              </a:lnSpc>
-            </a:pPr>
-            <a:r>
-              <a:rPr sz="5400" b="1" i="1">
-                <a:solidFill>
-                  <a:srgbClr val="B45309"/>
-                </a:solidFill>
-                <a:latin typeface="Georgia"/>
-              </a:rPr>
-              <a:t>finally afford.</a:t>
-            </a:r>
-          </a:p>
-        </p:txBody>
-      </p:sp>
-      <p:sp>
-        <p:nvSpPr>
-          <p:cNvPr id="9" name="TextBox 8"/>
-          <p:cNvSpPr txBox="1"/>
-          <p:nvPr/>
-        </p:nvSpPr>
-        <p:spPr>
-          <a:xfrm>
-            <a:off x="640080" y="4206240"/>
-            <a:ext cx="7772400" cy="1371600"/>
-          </a:xfrm>
-          <a:prstGeom prst="rect">
-            <a:avLst/>
-          </a:prstGeom>
-          <a:noFill/>
-        </p:spPr>
-        <p:txBody>
-          <a:bodyPr wrap="square" anchor="t" lIns="0" rIns="0" tIns="0" bIns="0">
-            <a:spAutoFit/>
-          </a:bodyPr>
-          <a:lstStyle/>
-          <a:p>
-            <a:pPr algn="l">
-              <a:lnSpc>
-                <a:spcPct val="130000"/>
-              </a:lnSpc>
-            </a:pPr>
-            <a:r>
-              <a:rPr sz="2000" b="0" i="0">
-                <a:solidFill>
-                  <a:srgbClr val="3F3F46"/>
-                </a:solidFill>
-                <a:latin typeface="Helvetica Neue"/>
-              </a:rPr>
-              <a:t>A 5-agent AI swarm that delivers $2,000 of consultant value</a:t>
-            </a:r>
-          </a:p>
-          <a:p>
-            <a:pPr algn="l">
-              <a:lnSpc>
-                <a:spcPct val="130000"/>
-              </a:lnSpc>
-            </a:pPr>
-            <a:r>
-              <a:rPr sz="2000" b="0" i="0">
-                <a:solidFill>
-                  <a:srgbClr val="3F3F46"/>
-                </a:solidFill>
-                <a:latin typeface="Helvetica Neue"/>
-              </a:rPr>
-              <a:t>for free — for America's 7 million single moms.</a:t>
-            </a:r>
-          </a:p>
-        </p:txBody>
-      </p:sp>
-      <p:sp>
-        <p:nvSpPr>
-          <p:cNvPr id="10" name="Rounded Rectangle 9"/>
-          <p:cNvSpPr/>
-          <p:nvPr/>
-        </p:nvSpPr>
-        <p:spPr>
-          <a:xfrm>
-            <a:off x="640080" y="5532120"/>
+            <a:off x="640080" y="5852160"/>
             <a:ext cx="164592" cy="164592"/>
           </a:xfrm>
           <a:prstGeom prst="roundRect">
@@ -3499,23 +3418,386 @@
       </p:sp>
       <p:sp>
         <p:nvSpPr>
+          <p:cNvPr id="9" name="TextBox 8"/>
+          <p:cNvSpPr txBox="1"/>
+          <p:nvPr/>
+        </p:nvSpPr>
+        <p:spPr>
+          <a:xfrm>
+            <a:off x="868680" y="5788152"/>
+            <a:ext cx="6400800" cy="274320"/>
+          </a:xfrm>
+          <a:prstGeom prst="rect">
+            <a:avLst/>
+          </a:prstGeom>
+          <a:noFill/>
+        </p:spPr>
+        <p:txBody>
+          <a:bodyPr wrap="square" anchor="t" lIns="0" rIns="0" tIns="0" bIns="0">
+            <a:noAutofit/>
+          </a:bodyPr>
+          <a:lstStyle/>
+          <a:p>
+            <a:pPr algn="l">
+              <a:lnSpc>
+                <a:spcPct val="115000"/>
+              </a:lnSpc>
+            </a:pPr>
+            <a:r>
+              <a:rPr sz="900" b="1" i="0" spc="150">
+                <a:solidFill>
+                  <a:srgbClr val="3F3F46"/>
+                </a:solidFill>
+                <a:latin typeface="Helvetica Neue"/>
+              </a:rPr>
+              <a:t>LIVE DEMO  ·  REAL GEMINI  ·  REAL CITED .GOV LAW  ·  REAL LAUNCH PAGES</a:t>
+            </a:r>
+          </a:p>
+        </p:txBody>
+      </p:sp>
+      <p:sp>
+        <p:nvSpPr>
+          <p:cNvPr id="10" name="TextBox 9"/>
+          <p:cNvSpPr txBox="1"/>
+          <p:nvPr/>
+        </p:nvSpPr>
+        <p:spPr>
+          <a:xfrm>
+            <a:off x="8412480" y="777240"/>
+            <a:ext cx="10972800" cy="274320"/>
+          </a:xfrm>
+          <a:prstGeom prst="rect">
+            <a:avLst/>
+          </a:prstGeom>
+          <a:noFill/>
+        </p:spPr>
+        <p:txBody>
+          <a:bodyPr wrap="square" anchor="t" lIns="0" rIns="0" tIns="0" bIns="0">
+            <a:noAutofit/>
+          </a:bodyPr>
+          <a:lstStyle/>
+          <a:p>
+            <a:pPr algn="l">
+              <a:lnSpc>
+                <a:spcPct val="115000"/>
+              </a:lnSpc>
+            </a:pPr>
+            <a:r>
+              <a:rPr sz="1000" b="1" i="0" spc="200">
+                <a:solidFill>
+                  <a:srgbClr val="B45309"/>
+                </a:solidFill>
+                <a:latin typeface="Helvetica Neue"/>
+              </a:rPr>
+              <a:t>WHAT IT DOES</a:t>
+            </a:r>
+          </a:p>
+        </p:txBody>
+      </p:sp>
+      <p:sp>
+        <p:nvSpPr>
           <p:cNvPr id="11" name="TextBox 10"/>
           <p:cNvSpPr txBox="1"/>
           <p:nvPr/>
         </p:nvSpPr>
         <p:spPr>
           <a:xfrm>
-            <a:off x="868680" y="5458968"/>
-            <a:ext cx="6400800" cy="274320"/>
-          </a:xfrm>
-          <a:prstGeom prst="rect">
-            <a:avLst/>
-          </a:prstGeom>
-          <a:noFill/>
-        </p:spPr>
-        <p:txBody>
-          <a:bodyPr wrap="square" anchor="t" lIns="0" rIns="0" tIns="0" bIns="0">
-            <a:spAutoFit/>
+            <a:off x="8412480" y="1234440"/>
+            <a:ext cx="3566160" cy="502920"/>
+          </a:xfrm>
+          <a:prstGeom prst="rect">
+            <a:avLst/>
+          </a:prstGeom>
+          <a:noFill/>
+        </p:spPr>
+        <p:txBody>
+          <a:bodyPr wrap="square" anchor="t" lIns="0" rIns="0" tIns="0" bIns="0">
+            <a:noAutofit/>
+          </a:bodyPr>
+          <a:lstStyle/>
+          <a:p>
+            <a:pPr algn="l">
+              <a:lnSpc>
+                <a:spcPct val="130000"/>
+              </a:lnSpc>
+            </a:pPr>
+            <a:r>
+              <a:rPr sz="1300" b="1" i="0">
+                <a:solidFill>
+                  <a:srgbClr val="15803D"/>
+                </a:solidFill>
+                <a:latin typeface="Helvetica Neue"/>
+              </a:rPr>
+              <a:t>✓  </a:t>
+            </a:r>
+            <a:r>
+              <a:rPr sz="1300" b="1" i="0">
+                <a:solidFill>
+                  <a:srgbClr val="18181B"/>
+                </a:solidFill>
+                <a:latin typeface="Helvetica Neue"/>
+              </a:rPr>
+              <a:t>Profiles </a:t>
+            </a:r>
+            <a:r>
+              <a:rPr sz="1300" b="0" i="0">
+                <a:solidFill>
+                  <a:srgbClr val="3F3F46"/>
+                </a:solidFill>
+                <a:latin typeface="Helvetica Neue"/>
+              </a:rPr>
+              <a:t>her skills, hours, gap, and constraints</a:t>
+            </a:r>
+          </a:p>
+        </p:txBody>
+      </p:sp>
+      <p:sp>
+        <p:nvSpPr>
+          <p:cNvPr id="12" name="TextBox 11"/>
+          <p:cNvSpPr txBox="1"/>
+          <p:nvPr/>
+        </p:nvSpPr>
+        <p:spPr>
+          <a:xfrm>
+            <a:off x="8412480" y="1874519"/>
+            <a:ext cx="3566160" cy="502920"/>
+          </a:xfrm>
+          <a:prstGeom prst="rect">
+            <a:avLst/>
+          </a:prstGeom>
+          <a:noFill/>
+        </p:spPr>
+        <p:txBody>
+          <a:bodyPr wrap="square" anchor="t" lIns="0" rIns="0" tIns="0" bIns="0">
+            <a:noAutofit/>
+          </a:bodyPr>
+          <a:lstStyle/>
+          <a:p>
+            <a:pPr algn="l">
+              <a:lnSpc>
+                <a:spcPct val="130000"/>
+              </a:lnSpc>
+            </a:pPr>
+            <a:r>
+              <a:rPr sz="1300" b="1" i="0">
+                <a:solidFill>
+                  <a:srgbClr val="15803D"/>
+                </a:solidFill>
+                <a:latin typeface="Helvetica Neue"/>
+              </a:rPr>
+              <a:t>✓  </a:t>
+            </a:r>
+            <a:r>
+              <a:rPr sz="1300" b="1" i="0">
+                <a:solidFill>
+                  <a:srgbClr val="18181B"/>
+                </a:solidFill>
+                <a:latin typeface="Helvetica Neue"/>
+              </a:rPr>
+              <a:t>Finds </a:t>
+            </a:r>
+            <a:r>
+              <a:rPr sz="1300" b="0" i="0">
+                <a:solidFill>
+                  <a:srgbClr val="3F3F46"/>
+                </a:solidFill>
+                <a:latin typeface="Helvetica Neue"/>
+              </a:rPr>
+              <a:t>6–10 realistic income paths from real listings</a:t>
+            </a:r>
+          </a:p>
+        </p:txBody>
+      </p:sp>
+      <p:sp>
+        <p:nvSpPr>
+          <p:cNvPr id="13" name="TextBox 12"/>
+          <p:cNvSpPr txBox="1"/>
+          <p:nvPr/>
+        </p:nvSpPr>
+        <p:spPr>
+          <a:xfrm>
+            <a:off x="8412480" y="2514600"/>
+            <a:ext cx="3566160" cy="502920"/>
+          </a:xfrm>
+          <a:prstGeom prst="rect">
+            <a:avLst/>
+          </a:prstGeom>
+          <a:noFill/>
+        </p:spPr>
+        <p:txBody>
+          <a:bodyPr wrap="square" anchor="t" lIns="0" rIns="0" tIns="0" bIns="0">
+            <a:noAutofit/>
+          </a:bodyPr>
+          <a:lstStyle/>
+          <a:p>
+            <a:pPr algn="l">
+              <a:lnSpc>
+                <a:spcPct val="130000"/>
+              </a:lnSpc>
+            </a:pPr>
+            <a:r>
+              <a:rPr sz="1300" b="1" i="0">
+                <a:solidFill>
+                  <a:srgbClr val="15803D"/>
+                </a:solidFill>
+                <a:latin typeface="Helvetica Neue"/>
+              </a:rPr>
+              <a:t>✓  </a:t>
+            </a:r>
+            <a:r>
+              <a:rPr sz="1300" b="1" i="0">
+                <a:solidFill>
+                  <a:srgbClr val="18181B"/>
+                </a:solidFill>
+                <a:latin typeface="Helvetica Neue"/>
+              </a:rPr>
+              <a:t>Blocks </a:t>
+            </a:r>
+            <a:r>
+              <a:rPr sz="1300" b="0" i="0">
+                <a:solidFill>
+                  <a:srgbClr val="3F3F46"/>
+                </a:solidFill>
+                <a:latin typeface="Helvetica Neue"/>
+              </a:rPr>
+              <a:t>anything illegal — cites the actual .gov law on screen</a:t>
+            </a:r>
+          </a:p>
+        </p:txBody>
+      </p:sp>
+      <p:sp>
+        <p:nvSpPr>
+          <p:cNvPr id="14" name="TextBox 13"/>
+          <p:cNvSpPr txBox="1"/>
+          <p:nvPr/>
+        </p:nvSpPr>
+        <p:spPr>
+          <a:xfrm>
+            <a:off x="8412480" y="3154680"/>
+            <a:ext cx="3566160" cy="502920"/>
+          </a:xfrm>
+          <a:prstGeom prst="rect">
+            <a:avLst/>
+          </a:prstGeom>
+          <a:noFill/>
+        </p:spPr>
+        <p:txBody>
+          <a:bodyPr wrap="square" anchor="t" lIns="0" rIns="0" tIns="0" bIns="0">
+            <a:noAutofit/>
+          </a:bodyPr>
+          <a:lstStyle/>
+          <a:p>
+            <a:pPr algn="l">
+              <a:lnSpc>
+                <a:spcPct val="130000"/>
+              </a:lnSpc>
+            </a:pPr>
+            <a:r>
+              <a:rPr sz="1300" b="1" i="0">
+                <a:solidFill>
+                  <a:srgbClr val="15803D"/>
+                </a:solidFill>
+                <a:latin typeface="Helvetica Neue"/>
+              </a:rPr>
+              <a:t>✓  </a:t>
+            </a:r>
+            <a:r>
+              <a:rPr sz="1300" b="1" i="0">
+                <a:solidFill>
+                  <a:srgbClr val="18181B"/>
+                </a:solidFill>
+                <a:latin typeface="Helvetica Neue"/>
+              </a:rPr>
+              <a:t>Writes </a:t>
+            </a:r>
+            <a:r>
+              <a:rPr sz="1300" b="0" i="0">
+                <a:solidFill>
+                  <a:srgbClr val="3F3F46"/>
+                </a:solidFill>
+                <a:latin typeface="Helvetica Neue"/>
+              </a:rPr>
+              <a:t>her offer, copy, price, and 7-day launch plan</a:t>
+            </a:r>
+          </a:p>
+        </p:txBody>
+      </p:sp>
+      <p:sp>
+        <p:nvSpPr>
+          <p:cNvPr id="15" name="TextBox 14"/>
+          <p:cNvSpPr txBox="1"/>
+          <p:nvPr/>
+        </p:nvSpPr>
+        <p:spPr>
+          <a:xfrm>
+            <a:off x="8412480" y="3794760"/>
+            <a:ext cx="3566160" cy="502920"/>
+          </a:xfrm>
+          <a:prstGeom prst="rect">
+            <a:avLst/>
+          </a:prstGeom>
+          <a:noFill/>
+        </p:spPr>
+        <p:txBody>
+          <a:bodyPr wrap="square" anchor="t" lIns="0" rIns="0" tIns="0" bIns="0">
+            <a:noAutofit/>
+          </a:bodyPr>
+          <a:lstStyle/>
+          <a:p>
+            <a:pPr algn="l">
+              <a:lnSpc>
+                <a:spcPct val="130000"/>
+              </a:lnSpc>
+            </a:pPr>
+            <a:r>
+              <a:rPr sz="1300" b="1" i="0">
+                <a:solidFill>
+                  <a:srgbClr val="15803D"/>
+                </a:solidFill>
+                <a:latin typeface="Helvetica Neue"/>
+              </a:rPr>
+              <a:t>✓  </a:t>
+            </a:r>
+            <a:r>
+              <a:rPr sz="1300" b="1" i="0">
+                <a:solidFill>
+                  <a:srgbClr val="18181B"/>
+                </a:solidFill>
+                <a:latin typeface="Helvetica Neue"/>
+              </a:rPr>
+              <a:t>Publishes </a:t>
+            </a:r>
+            <a:r>
+              <a:rPr sz="1300" b="0" i="0">
+                <a:solidFill>
+                  <a:srgbClr val="3F3F46"/>
+                </a:solidFill>
+                <a:latin typeface="Helvetica Neue"/>
+              </a:rPr>
+              <a:t>a real shareable landing page in 38 seconds</a:t>
+            </a:r>
+          </a:p>
+        </p:txBody>
+      </p:sp>
+      <p:sp>
+        <p:nvSpPr>
+          <p:cNvPr id="16" name="TextBox 15"/>
+          <p:cNvSpPr txBox="1"/>
+          <p:nvPr/>
+        </p:nvSpPr>
+        <p:spPr>
+          <a:xfrm>
+            <a:off x="8412480" y="5257800"/>
+            <a:ext cx="3566160" cy="274320"/>
+          </a:xfrm>
+          <a:prstGeom prst="rect">
+            <a:avLst/>
+          </a:prstGeom>
+          <a:noFill/>
+        </p:spPr>
+        <p:txBody>
+          <a:bodyPr wrap="square" anchor="t" lIns="0" rIns="0" tIns="0" bIns="0">
+            <a:noAutofit/>
           </a:bodyPr>
           <a:lstStyle/>
           <a:p>
@@ -3525,36 +3807,36 @@
               </a:lnSpc>
             </a:pPr>
             <a:r>
-              <a:rPr sz="1000" b="1" i="0" spc="150">
-                <a:solidFill>
-                  <a:srgbClr val="3F3F46"/>
-                </a:solidFill>
-                <a:latin typeface="Helvetica Neue"/>
-              </a:rPr>
-              <a:t>LIVE DEMO  ·  REAL GEMINI  ·  REAL CITED .GOV LAW  ·  REAL LAUNCH PAGES</a:t>
-            </a:r>
-          </a:p>
-        </p:txBody>
-      </p:sp>
-      <p:sp>
-        <p:nvSpPr>
-          <p:cNvPr id="12" name="TextBox 11"/>
-          <p:cNvSpPr txBox="1"/>
-          <p:nvPr/>
-        </p:nvSpPr>
-        <p:spPr>
-          <a:xfrm>
-            <a:off x="8229600" y="4937760"/>
-            <a:ext cx="3657600" cy="320040"/>
-          </a:xfrm>
-          <a:prstGeom prst="rect">
-            <a:avLst/>
-          </a:prstGeom>
-          <a:noFill/>
-        </p:spPr>
-        <p:txBody>
-          <a:bodyPr wrap="square" anchor="t" lIns="0" rIns="0" tIns="0" bIns="0">
-            <a:spAutoFit/>
+              <a:rPr sz="900" b="1" i="0" spc="200">
+                <a:solidFill>
+                  <a:srgbClr val="B45309"/>
+                </a:solidFill>
+                <a:latin typeface="Helvetica Neue"/>
+              </a:rPr>
+              <a:t>BUILT IN 24 HOURS  ·  SOLO</a:t>
+            </a:r>
+          </a:p>
+        </p:txBody>
+      </p:sp>
+      <p:sp>
+        <p:nvSpPr>
+          <p:cNvPr id="17" name="TextBox 16"/>
+          <p:cNvSpPr txBox="1"/>
+          <p:nvPr/>
+        </p:nvSpPr>
+        <p:spPr>
+          <a:xfrm>
+            <a:off x="8412480" y="5577840"/>
+            <a:ext cx="3566160" cy="457200"/>
+          </a:xfrm>
+          <a:prstGeom prst="rect">
+            <a:avLst/>
+          </a:prstGeom>
+          <a:noFill/>
+        </p:spPr>
+        <p:txBody>
+          <a:bodyPr wrap="square" anchor="t" lIns="0" rIns="0" tIns="0" bIns="0">
+            <a:noAutofit/>
           </a:bodyPr>
           <a:lstStyle/>
           <a:p>
@@ -3564,36 +3846,36 @@
               </a:lnSpc>
             </a:pPr>
             <a:r>
-              <a:rPr sz="1000" b="1" i="0" spc="200">
-                <a:solidFill>
-                  <a:srgbClr val="B45309"/>
-                </a:solidFill>
-                <a:latin typeface="Helvetica Neue"/>
-              </a:rPr>
-              <a:t>BUILT IN 24 HOURS  ·  SOLO</a:t>
-            </a:r>
-          </a:p>
-        </p:txBody>
-      </p:sp>
-      <p:sp>
-        <p:nvSpPr>
-          <p:cNvPr id="13" name="TextBox 12"/>
-          <p:cNvSpPr txBox="1"/>
-          <p:nvPr/>
-        </p:nvSpPr>
-        <p:spPr>
-          <a:xfrm>
-            <a:off x="8229600" y="5349240"/>
-            <a:ext cx="3657600" cy="457200"/>
-          </a:xfrm>
-          <a:prstGeom prst="rect">
-            <a:avLst/>
-          </a:prstGeom>
-          <a:noFill/>
-        </p:spPr>
-        <p:txBody>
-          <a:bodyPr wrap="square" anchor="t" lIns="0" rIns="0" tIns="0" bIns="0">
-            <a:spAutoFit/>
+              <a:rPr sz="2000" b="1" i="0">
+                <a:solidFill>
+                  <a:srgbClr val="18181B"/>
+                </a:solidFill>
+                <a:latin typeface="Georgia"/>
+              </a:rPr>
+              <a:t>Avinash Ahuja</a:t>
+            </a:r>
+          </a:p>
+        </p:txBody>
+      </p:sp>
+      <p:sp>
+        <p:nvSpPr>
+          <p:cNvPr id="18" name="TextBox 17"/>
+          <p:cNvSpPr txBox="1"/>
+          <p:nvPr/>
+        </p:nvSpPr>
+        <p:spPr>
+          <a:xfrm>
+            <a:off x="8412480" y="5989320"/>
+            <a:ext cx="3566160" cy="320040"/>
+          </a:xfrm>
+          <a:prstGeom prst="rect">
+            <a:avLst/>
+          </a:prstGeom>
+          <a:noFill/>
+        </p:spPr>
+        <p:txBody>
+          <a:bodyPr wrap="square" anchor="t" lIns="0" rIns="0" tIns="0" bIns="0">
+            <a:noAutofit/>
           </a:bodyPr>
           <a:lstStyle/>
           <a:p>
@@ -3603,36 +3885,36 @@
               </a:lnSpc>
             </a:pPr>
             <a:r>
-              <a:rPr sz="2200" b="1" i="0">
-                <a:solidFill>
-                  <a:srgbClr val="18181B"/>
-                </a:solidFill>
-                <a:latin typeface="Georgia"/>
-              </a:rPr>
-              <a:t>Avinash Ahuja</a:t>
-            </a:r>
-          </a:p>
-        </p:txBody>
-      </p:sp>
-      <p:sp>
-        <p:nvSpPr>
-          <p:cNvPr id="14" name="TextBox 13"/>
-          <p:cNvSpPr txBox="1"/>
-          <p:nvPr/>
-        </p:nvSpPr>
-        <p:spPr>
-          <a:xfrm>
-            <a:off x="8229600" y="5852160"/>
-            <a:ext cx="3657600" cy="365760"/>
-          </a:xfrm>
-          <a:prstGeom prst="rect">
-            <a:avLst/>
-          </a:prstGeom>
-          <a:noFill/>
-        </p:spPr>
-        <p:txBody>
-          <a:bodyPr wrap="square" anchor="t" lIns="0" rIns="0" tIns="0" bIns="0">
-            <a:spAutoFit/>
+              <a:rPr sz="1000" b="0" i="0">
+                <a:solidFill>
+                  <a:srgbClr val="71717A"/>
+                </a:solidFill>
+                <a:latin typeface="Courier New"/>
+              </a:rPr>
+              <a:t>github.com/Avinash07-git/momsaheli</a:t>
+            </a:r>
+          </a:p>
+        </p:txBody>
+      </p:sp>
+      <p:sp>
+        <p:nvSpPr>
+          <p:cNvPr id="19" name="TextBox 18"/>
+          <p:cNvSpPr txBox="1"/>
+          <p:nvPr/>
+        </p:nvSpPr>
+        <p:spPr>
+          <a:xfrm>
+            <a:off x="548640" y="6537960"/>
+            <a:ext cx="7315200" cy="274320"/>
+          </a:xfrm>
+          <a:prstGeom prst="rect">
+            <a:avLst/>
+          </a:prstGeom>
+          <a:noFill/>
+        </p:spPr>
+        <p:txBody>
+          <a:bodyPr wrap="square" anchor="t" lIns="0" rIns="0" tIns="0" bIns="0">
+            <a:noAutofit/>
           </a:bodyPr>
           <a:lstStyle/>
           <a:p>
@@ -3642,65 +3924,26 @@
               </a:lnSpc>
             </a:pPr>
             <a:r>
-              <a:rPr sz="1000" b="0" i="0">
+              <a:rPr sz="900" b="0" i="0">
                 <a:solidFill>
                   <a:srgbClr val="71717A"/>
                 </a:solidFill>
-                <a:latin typeface="Courier New"/>
-              </a:rPr>
-              <a:t>github.com/Avinash07-git/momsaheli</a:t>
-            </a:r>
-          </a:p>
-        </p:txBody>
-      </p:sp>
-      <p:sp>
-        <p:nvSpPr>
-          <p:cNvPr id="15" name="TextBox 14"/>
-          <p:cNvSpPr txBox="1"/>
-          <p:nvPr/>
-        </p:nvSpPr>
-        <p:spPr>
-          <a:xfrm>
-            <a:off x="548640" y="6492240"/>
-            <a:ext cx="5486400" cy="274320"/>
-          </a:xfrm>
-          <a:prstGeom prst="rect">
-            <a:avLst/>
-          </a:prstGeom>
-          <a:noFill/>
-        </p:spPr>
-        <p:txBody>
-          <a:bodyPr wrap="square" anchor="t" lIns="0" rIns="0" tIns="0" bIns="0">
-            <a:spAutoFit/>
-          </a:bodyPr>
-          <a:lstStyle/>
-          <a:p>
-            <a:pPr algn="l">
-              <a:lnSpc>
-                <a:spcPct val="115000"/>
-              </a:lnSpc>
-            </a:pPr>
-            <a:r>
-              <a:rPr sz="900" b="0" i="0">
-                <a:solidFill>
-                  <a:srgbClr val="71717A"/>
-                </a:solidFill>
-                <a:latin typeface="Helvetica Neue"/>
-              </a:rPr>
-              <a:t>🌸  Mom's Saheli  ·  Agent Forge AI Hackathon  ·  May 16 2026</a:t>
-            </a:r>
-          </a:p>
-        </p:txBody>
-      </p:sp>
-      <p:sp>
-        <p:nvSpPr>
-          <p:cNvPr id="16" name="TextBox 15"/>
-          <p:cNvSpPr txBox="1"/>
-          <p:nvPr/>
-        </p:nvSpPr>
-        <p:spPr>
-          <a:xfrm>
-            <a:off x="10972800" y="6492240"/>
+                <a:latin typeface="Helvetica Neue"/>
+              </a:rPr>
+              <a:t>Mom's Saheli  ·  Agent Forge AI Hackathon  ·  San Francisco  ·  May 16 2026</a:t>
+            </a:r>
+          </a:p>
+        </p:txBody>
+      </p:sp>
+      <p:sp>
+        <p:nvSpPr>
+          <p:cNvPr id="20" name="TextBox 19"/>
+          <p:cNvSpPr txBox="1"/>
+          <p:nvPr/>
+        </p:nvSpPr>
+        <p:spPr>
+          <a:xfrm>
+            <a:off x="10972800" y="6537960"/>
             <a:ext cx="914400" cy="274320"/>
           </a:xfrm>
           <a:prstGeom prst="rect">
@@ -3710,7 +3953,7 @@
         </p:spPr>
         <p:txBody>
           <a:bodyPr wrap="square" anchor="t" lIns="0" rIns="0" tIns="0" bIns="0">
-            <a:spAutoFit/>
+            <a:noAutofit/>
           </a:bodyPr>
           <a:lstStyle/>
           <a:p>
@@ -3802,16 +4045,16 @@
         <p:spPr>
           <a:xfrm>
             <a:off x="640080" y="548640"/>
-            <a:ext cx="9144000" cy="274320"/>
-          </a:xfrm>
-          <a:prstGeom prst="rect">
-            <a:avLst/>
-          </a:prstGeom>
-          <a:noFill/>
-        </p:spPr>
-        <p:txBody>
-          <a:bodyPr wrap="square" anchor="t" lIns="0" rIns="0" tIns="0" bIns="0">
-            <a:spAutoFit/>
+            <a:ext cx="10972800" cy="274320"/>
+          </a:xfrm>
+          <a:prstGeom prst="rect">
+            <a:avLst/>
+          </a:prstGeom>
+          <a:noFill/>
+        </p:spPr>
+        <p:txBody>
+          <a:bodyPr wrap="square" anchor="t" lIns="0" rIns="0" tIns="0" bIns="0">
+            <a:noAutofit/>
           </a:bodyPr>
           <a:lstStyle/>
           <a:p>
@@ -3841,26 +4084,26 @@
         <p:spPr>
           <a:xfrm>
             <a:off x="640080" y="960120"/>
-            <a:ext cx="10515600" cy="1463040"/>
-          </a:xfrm>
-          <a:prstGeom prst="rect">
-            <a:avLst/>
-          </a:prstGeom>
-          <a:noFill/>
-        </p:spPr>
-        <p:txBody>
-          <a:bodyPr wrap="square" anchor="t" lIns="0" rIns="0" tIns="0" bIns="0">
-            <a:spAutoFit/>
-          </a:bodyPr>
-          <a:lstStyle/>
-          <a:p>
-            <a:pPr algn="l">
-              <a:lnSpc>
-                <a:spcPct val="100000"/>
-              </a:lnSpc>
-            </a:pPr>
-            <a:r>
-              <a:rPr sz="4600" b="1" i="0">
+            <a:ext cx="10972800" cy="2194560"/>
+          </a:xfrm>
+          <a:prstGeom prst="rect">
+            <a:avLst/>
+          </a:prstGeom>
+          <a:noFill/>
+        </p:spPr>
+        <p:txBody>
+          <a:bodyPr wrap="square" anchor="t" lIns="0" rIns="0" tIns="0" bIns="0">
+            <a:noAutofit/>
+          </a:bodyPr>
+          <a:lstStyle/>
+          <a:p>
+            <a:pPr algn="l">
+              <a:lnSpc>
+                <a:spcPct val="105000"/>
+              </a:lnSpc>
+            </a:pPr>
+            <a:r>
+              <a:rPr sz="4400" b="1" i="0">
                 <a:solidFill>
                   <a:srgbClr val="09090B"/>
                 </a:solidFill>
@@ -3869,6 +4112,31 @@
               <a:t>She's not short on effort.</a:t>
             </a:r>
           </a:p>
+          <a:p>
+            <a:pPr algn="l">
+              <a:lnSpc>
+                <a:spcPct val="105000"/>
+              </a:lnSpc>
+            </a:pPr>
+            <a:r>
+              <a:rPr sz="4400" b="1" i="0">
+                <a:solidFill>
+                  <a:srgbClr val="09090B"/>
+                </a:solidFill>
+                <a:latin typeface="Georgia"/>
+              </a:rPr>
+              <a:t/>
+            </a:r>
+            <a:r>
+              <a:rPr sz="4400" b="1" i="1">
+                <a:solidFill>
+                  <a:srgbClr val="B45309"/>
+                </a:solidFill>
+                <a:latin typeface="Georgia"/>
+              </a:rPr>
+              <a:t>She's short on margin.</a:t>
+            </a:r>
+          </a:p>
         </p:txBody>
       </p:sp>
       <p:sp>
@@ -3879,33 +4147,33 @@
         </p:nvSpPr>
         <p:spPr>
           <a:xfrm>
-            <a:off x="640080" y="1783080"/>
-            <a:ext cx="10515600" cy="1463040"/>
-          </a:xfrm>
-          <a:prstGeom prst="rect">
-            <a:avLst/>
-          </a:prstGeom>
-          <a:noFill/>
-        </p:spPr>
-        <p:txBody>
-          <a:bodyPr wrap="square" anchor="t" lIns="0" rIns="0" tIns="0" bIns="0">
-            <a:spAutoFit/>
-          </a:bodyPr>
-          <a:lstStyle/>
-          <a:p>
-            <a:pPr algn="l">
-              <a:lnSpc>
-                <a:spcPct val="100000"/>
-              </a:lnSpc>
-            </a:pPr>
-            <a:r>
-              <a:rPr sz="4600" b="1" i="1">
-                <a:solidFill>
-                  <a:srgbClr val="B45309"/>
-                </a:solidFill>
-                <a:latin typeface="Georgia"/>
-              </a:rPr>
-              <a:t>She's short on margin.</a:t>
+            <a:off x="640080" y="3017520"/>
+            <a:ext cx="10972800" cy="457200"/>
+          </a:xfrm>
+          <a:prstGeom prst="rect">
+            <a:avLst/>
+          </a:prstGeom>
+          <a:noFill/>
+        </p:spPr>
+        <p:txBody>
+          <a:bodyPr wrap="square" anchor="t" lIns="0" rIns="0" tIns="0" bIns="0">
+            <a:noAutofit/>
+          </a:bodyPr>
+          <a:lstStyle/>
+          <a:p>
+            <a:pPr algn="l">
+              <a:lnSpc>
+                <a:spcPct val="140000"/>
+              </a:lnSpc>
+            </a:pPr>
+            <a:r>
+              <a:rPr sz="1300" b="0" i="1">
+                <a:solidFill>
+                  <a:srgbClr val="71717A"/>
+                </a:solidFill>
+                <a:latin typeface="Helvetica Neue"/>
+              </a:rPr>
+              <a:t>America's working single moms aren't undermotivated. They're under-margined. Every dollar of help they need is gated by an expert who charges more than they earn.</a:t>
             </a:r>
           </a:p>
         </p:txBody>
@@ -3918,7 +4186,7 @@
         </p:nvSpPr>
         <p:spPr>
           <a:xfrm>
-            <a:off x="640080" y="3611880"/>
+            <a:off x="640080" y="3703320"/>
             <a:ext cx="2606040" cy="2011680"/>
           </a:xfrm>
           <a:prstGeom prst="roundRect">
@@ -3966,7 +4234,7 @@
         </p:nvSpPr>
         <p:spPr>
           <a:xfrm>
-            <a:off x="868680" y="3840480"/>
+            <a:off x="868680" y="3886200"/>
             <a:ext cx="2148840" cy="914400"/>
           </a:xfrm>
           <a:prstGeom prst="rect">
@@ -3976,7 +4244,7 @@
         </p:spPr>
         <p:txBody>
           <a:bodyPr wrap="square" anchor="t" lIns="0" rIns="0" tIns="0" bIns="0">
-            <a:spAutoFit/>
+            <a:noAutofit/>
           </a:bodyPr>
           <a:lstStyle/>
           <a:p>
@@ -4005,7 +4273,7 @@
         </p:nvSpPr>
         <p:spPr>
           <a:xfrm>
-            <a:off x="868680" y="4663440"/>
+            <a:off x="868680" y="4709160"/>
             <a:ext cx="2148840" cy="640080"/>
           </a:xfrm>
           <a:prstGeom prst="rect">
@@ -4015,13 +4283,13 @@
         </p:spPr>
         <p:txBody>
           <a:bodyPr wrap="square" anchor="t" lIns="0" rIns="0" tIns="0" bIns="0">
-            <a:spAutoFit/>
-          </a:bodyPr>
-          <a:lstStyle/>
-          <a:p>
-            <a:pPr algn="l">
-              <a:lnSpc>
-                <a:spcPct val="120000"/>
+            <a:noAutofit/>
+          </a:bodyPr>
+          <a:lstStyle/>
+          <a:p>
+            <a:pPr algn="l">
+              <a:lnSpc>
+                <a:spcPct val="125000"/>
               </a:lnSpc>
             </a:pPr>
             <a:r>
@@ -4037,7 +4305,7 @@
           <a:p>
             <a:pPr algn="l">
               <a:lnSpc>
-                <a:spcPct val="120000"/>
+                <a:spcPct val="125000"/>
               </a:lnSpc>
             </a:pPr>
             <a:r>
@@ -4047,7 +4315,7 @@
                 </a:solidFill>
                 <a:latin typeface="Helvetica Neue"/>
               </a:rPr>
-              <a:t>America</a:t>
+              <a:t>America today</a:t>
             </a:r>
           </a:p>
         </p:txBody>
@@ -4060,7 +4328,7 @@
         </p:nvSpPr>
         <p:spPr>
           <a:xfrm>
-            <a:off x="868680" y="5257800"/>
+            <a:off x="868680" y="5349240"/>
             <a:ext cx="2148840" cy="228600"/>
           </a:xfrm>
           <a:prstGeom prst="rect">
@@ -4070,7 +4338,7 @@
         </p:spPr>
         <p:txBody>
           <a:bodyPr wrap="square" anchor="t" lIns="0" rIns="0" tIns="0" bIns="0">
-            <a:spAutoFit/>
+            <a:noAutofit/>
           </a:bodyPr>
           <a:lstStyle/>
           <a:p>
@@ -4080,7 +4348,7 @@
               </a:lnSpc>
             </a:pPr>
             <a:r>
-              <a:rPr sz="800" b="1" i="0" spc="150">
+              <a:rPr sz="750" b="1" i="0" spc="150">
                 <a:solidFill>
                   <a:srgbClr val="71717A"/>
                 </a:solidFill>
@@ -4099,7 +4367,7 @@
         </p:nvSpPr>
         <p:spPr>
           <a:xfrm>
-            <a:off x="3383280" y="3611880"/>
+            <a:off x="3383280" y="3703320"/>
             <a:ext cx="2606040" cy="2011680"/>
           </a:xfrm>
           <a:prstGeom prst="roundRect">
@@ -4147,7 +4415,7 @@
         </p:nvSpPr>
         <p:spPr>
           <a:xfrm>
-            <a:off x="3611880" y="3840480"/>
+            <a:off x="3611880" y="3886200"/>
             <a:ext cx="2148840" cy="914400"/>
           </a:xfrm>
           <a:prstGeom prst="rect">
@@ -4157,7 +4425,7 @@
         </p:spPr>
         <p:txBody>
           <a:bodyPr wrap="square" anchor="t" lIns="0" rIns="0" tIns="0" bIns="0">
-            <a:spAutoFit/>
+            <a:noAutofit/>
           </a:bodyPr>
           <a:lstStyle/>
           <a:p>
@@ -4186,7 +4454,7 @@
         </p:nvSpPr>
         <p:spPr>
           <a:xfrm>
-            <a:off x="3611880" y="4663440"/>
+            <a:off x="3611880" y="4709160"/>
             <a:ext cx="2148840" cy="640080"/>
           </a:xfrm>
           <a:prstGeom prst="rect">
@@ -4196,13 +4464,13 @@
         </p:spPr>
         <p:txBody>
           <a:bodyPr wrap="square" anchor="t" lIns="0" rIns="0" tIns="0" bIns="0">
-            <a:spAutoFit/>
-          </a:bodyPr>
-          <a:lstStyle/>
-          <a:p>
-            <a:pPr algn="l">
-              <a:lnSpc>
-                <a:spcPct val="120000"/>
+            <a:noAutofit/>
+          </a:bodyPr>
+          <a:lstStyle/>
+          <a:p>
+            <a:pPr algn="l">
+              <a:lnSpc>
+                <a:spcPct val="125000"/>
               </a:lnSpc>
             </a:pPr>
             <a:r>
@@ -4218,7 +4486,7 @@
           <a:p>
             <a:pPr algn="l">
               <a:lnSpc>
-                <a:spcPct val="120000"/>
+                <a:spcPct val="125000"/>
               </a:lnSpc>
             </a:pPr>
             <a:r>
@@ -4241,7 +4509,7 @@
         </p:nvSpPr>
         <p:spPr>
           <a:xfrm>
-            <a:off x="3611880" y="5257800"/>
+            <a:off x="3611880" y="5349240"/>
             <a:ext cx="2148840" cy="228600"/>
           </a:xfrm>
           <a:prstGeom prst="rect">
@@ -4251,7 +4519,7 @@
         </p:spPr>
         <p:txBody>
           <a:bodyPr wrap="square" anchor="t" lIns="0" rIns="0" tIns="0" bIns="0">
-            <a:spAutoFit/>
+            <a:noAutofit/>
           </a:bodyPr>
           <a:lstStyle/>
           <a:p>
@@ -4261,7 +4529,7 @@
               </a:lnSpc>
             </a:pPr>
             <a:r>
-              <a:rPr sz="800" b="1" i="0" spc="150">
+              <a:rPr sz="750" b="1" i="0" spc="150">
                 <a:solidFill>
                   <a:srgbClr val="71717A"/>
                 </a:solidFill>
@@ -4280,7 +4548,7 @@
         </p:nvSpPr>
         <p:spPr>
           <a:xfrm>
-            <a:off x="6126480" y="3611880"/>
+            <a:off x="6126480" y="3703320"/>
             <a:ext cx="2606040" cy="2011680"/>
           </a:xfrm>
           <a:prstGeom prst="roundRect">
@@ -4328,7 +4596,7 @@
         </p:nvSpPr>
         <p:spPr>
           <a:xfrm>
-            <a:off x="6355080" y="3840480"/>
+            <a:off x="6355080" y="3886200"/>
             <a:ext cx="2148840" cy="914400"/>
           </a:xfrm>
           <a:prstGeom prst="rect">
@@ -4338,7 +4606,7 @@
         </p:spPr>
         <p:txBody>
           <a:bodyPr wrap="square" anchor="t" lIns="0" rIns="0" tIns="0" bIns="0">
-            <a:spAutoFit/>
+            <a:noAutofit/>
           </a:bodyPr>
           <a:lstStyle/>
           <a:p>
@@ -4367,7 +4635,7 @@
         </p:nvSpPr>
         <p:spPr>
           <a:xfrm>
-            <a:off x="6355080" y="4663440"/>
+            <a:off x="6355080" y="4709160"/>
             <a:ext cx="2148840" cy="640080"/>
           </a:xfrm>
           <a:prstGeom prst="rect">
@@ -4377,13 +4645,13 @@
         </p:spPr>
         <p:txBody>
           <a:bodyPr wrap="square" anchor="t" lIns="0" rIns="0" tIns="0" bIns="0">
-            <a:spAutoFit/>
-          </a:bodyPr>
-          <a:lstStyle/>
-          <a:p>
-            <a:pPr algn="l">
-              <a:lnSpc>
-                <a:spcPct val="120000"/>
+            <a:noAutofit/>
+          </a:bodyPr>
+          <a:lstStyle/>
+          <a:p>
+            <a:pPr algn="l">
+              <a:lnSpc>
+                <a:spcPct val="125000"/>
               </a:lnSpc>
             </a:pPr>
             <a:r>
@@ -4393,13 +4661,13 @@
                 </a:solidFill>
                 <a:latin typeface="Helvetica Neue"/>
               </a:rPr>
-              <a:t>median income,</a:t>
-            </a:r>
-          </a:p>
-          <a:p>
-            <a:pPr algn="l">
-              <a:lnSpc>
-                <a:spcPct val="120000"/>
+              <a:t>median income for a</a:t>
+            </a:r>
+          </a:p>
+          <a:p>
+            <a:pPr algn="l">
+              <a:lnSpc>
+                <a:spcPct val="125000"/>
               </a:lnSpc>
             </a:pPr>
             <a:r>
@@ -4422,7 +4690,7 @@
         </p:nvSpPr>
         <p:spPr>
           <a:xfrm>
-            <a:off x="6355080" y="5257800"/>
+            <a:off x="6355080" y="5349240"/>
             <a:ext cx="2148840" cy="228600"/>
           </a:xfrm>
           <a:prstGeom prst="rect">
@@ -4432,7 +4700,7 @@
         </p:spPr>
         <p:txBody>
           <a:bodyPr wrap="square" anchor="t" lIns="0" rIns="0" tIns="0" bIns="0">
-            <a:spAutoFit/>
+            <a:noAutofit/>
           </a:bodyPr>
           <a:lstStyle/>
           <a:p>
@@ -4442,7 +4710,7 @@
               </a:lnSpc>
             </a:pPr>
             <a:r>
-              <a:rPr sz="800" b="1" i="0" spc="150">
+              <a:rPr sz="750" b="1" i="0" spc="150">
                 <a:solidFill>
                   <a:srgbClr val="71717A"/>
                 </a:solidFill>
@@ -4461,7 +4729,7 @@
         </p:nvSpPr>
         <p:spPr>
           <a:xfrm>
-            <a:off x="8869680" y="3611880"/>
+            <a:off x="8869680" y="3703320"/>
             <a:ext cx="2606040" cy="2011680"/>
           </a:xfrm>
           <a:prstGeom prst="roundRect">
@@ -4509,7 +4777,7 @@
         </p:nvSpPr>
         <p:spPr>
           <a:xfrm>
-            <a:off x="9098280" y="3840480"/>
+            <a:off x="9098280" y="3886200"/>
             <a:ext cx="2148840" cy="914400"/>
           </a:xfrm>
           <a:prstGeom prst="rect">
@@ -4519,7 +4787,7 @@
         </p:spPr>
         <p:txBody>
           <a:bodyPr wrap="square" anchor="t" lIns="0" rIns="0" tIns="0" bIns="0">
-            <a:spAutoFit/>
+            <a:noAutofit/>
           </a:bodyPr>
           <a:lstStyle/>
           <a:p>
@@ -4548,7 +4816,7 @@
         </p:nvSpPr>
         <p:spPr>
           <a:xfrm>
-            <a:off x="9098280" y="4663440"/>
+            <a:off x="9098280" y="4709160"/>
             <a:ext cx="2148840" cy="640080"/>
           </a:xfrm>
           <a:prstGeom prst="rect">
@@ -4558,13 +4826,13 @@
         </p:spPr>
         <p:txBody>
           <a:bodyPr wrap="square" anchor="t" lIns="0" rIns="0" tIns="0" bIns="0">
-            <a:spAutoFit/>
-          </a:bodyPr>
-          <a:lstStyle/>
-          <a:p>
-            <a:pPr algn="l">
-              <a:lnSpc>
-                <a:spcPct val="120000"/>
+            <a:noAutofit/>
+          </a:bodyPr>
+          <a:lstStyle/>
+          <a:p>
+            <a:pPr algn="l">
+              <a:lnSpc>
+                <a:spcPct val="125000"/>
               </a:lnSpc>
             </a:pPr>
             <a:r>
@@ -4580,7 +4848,7 @@
           <a:p>
             <a:pPr algn="l">
               <a:lnSpc>
-                <a:spcPct val="120000"/>
+                <a:spcPct val="125000"/>
               </a:lnSpc>
             </a:pPr>
             <a:r>
@@ -4590,7 +4858,7 @@
                 </a:solidFill>
                 <a:latin typeface="Helvetica Neue"/>
               </a:rPr>
-              <a:t>by childcare</a:t>
+              <a:t>by childcare alone</a:t>
             </a:r>
           </a:p>
         </p:txBody>
@@ -4603,7 +4871,7 @@
         </p:nvSpPr>
         <p:spPr>
           <a:xfrm>
-            <a:off x="9098280" y="5257800"/>
+            <a:off x="9098280" y="5349240"/>
             <a:ext cx="2148840" cy="228600"/>
           </a:xfrm>
           <a:prstGeom prst="rect">
@@ -4613,7 +4881,7 @@
         </p:spPr>
         <p:txBody>
           <a:bodyPr wrap="square" anchor="t" lIns="0" rIns="0" tIns="0" bIns="0">
-            <a:spAutoFit/>
+            <a:noAutofit/>
           </a:bodyPr>
           <a:lstStyle/>
           <a:p>
@@ -4623,13 +4891,13 @@
               </a:lnSpc>
             </a:pPr>
             <a:r>
-              <a:rPr sz="800" b="1" i="0" spc="150">
+              <a:rPr sz="750" b="1" i="0" spc="150">
                 <a:solidFill>
                   <a:srgbClr val="71717A"/>
                 </a:solidFill>
                 <a:latin typeface="Helvetica Neue"/>
               </a:rPr>
-              <a:t>SOURCE: CHILD CARE AWARE</a:t>
+              <a:t>SOURCE: CHILD CARE AWARE OF AMERICA</a:t>
             </a:r>
           </a:p>
         </p:txBody>
@@ -4642,7 +4910,7 @@
         </p:nvSpPr>
         <p:spPr>
           <a:xfrm>
-            <a:off x="640080" y="5897880"/>
+            <a:off x="640080" y="5943600"/>
             <a:ext cx="10927080" cy="457200"/>
           </a:xfrm>
           <a:prstGeom prst="roundRect">
@@ -4688,7 +4956,7 @@
         </p:nvSpPr>
         <p:spPr>
           <a:xfrm>
-            <a:off x="822960" y="5934456"/>
+            <a:off x="822960" y="5980176"/>
             <a:ext cx="10607040" cy="411480"/>
           </a:xfrm>
           <a:prstGeom prst="rect">
@@ -4698,7 +4966,7 @@
         </p:spPr>
         <p:txBody>
           <a:bodyPr wrap="square" anchor="ctr" lIns="0" rIns="0" tIns="0" bIns="0">
-            <a:spAutoFit/>
+            <a:noAutofit/>
           </a:bodyPr>
           <a:lstStyle/>
           <a:p>
@@ -4708,13 +4976,40 @@
               </a:lnSpc>
             </a:pPr>
             <a:r>
+              <a:rPr sz="1100" b="0" i="0">
+                <a:solidFill>
+                  <a:srgbClr val="D4D4D1"/>
+                </a:solidFill>
+                <a:latin typeface="Helvetica Neue"/>
+              </a:rPr>
+              <a:t>Help she needs:  </a:t>
+            </a:r>
+            <a:r>
               <a:rPr sz="1100" b="1" i="0">
                 <a:solidFill>
                   <a:srgbClr val="FDF8F0"/>
                 </a:solidFill>
                 <a:latin typeface="Helvetica Neue"/>
               </a:rPr>
-              <a:t>What she needs:  consultant $2,000  ·  lawyer $200/hr  ·  marketer $200/hr  ·  bookkeeper $200/hr        What she can afford:  $0</a:t>
+              <a:t>consultant $2,000  ·  lawyer $200/hr  ·  marketer $200/hr  ·  bookkeeper $200/hr</a:t>
+            </a:r>
+            <a:r>
+              <a:rPr sz="1100" b="0" i="0">
+                <a:solidFill>
+                  <a:srgbClr val="D4D4D1"/>
+                </a:solidFill>
+                <a:latin typeface="Helvetica Neue"/>
+              </a:rPr>
+              <a:t>        Help she can afford:  </a:t>
+            </a:r>
+            <a:r>
+              <a:rPr sz="1400" b="1" i="0">
+                <a:solidFill>
+                  <a:srgbClr val="F59E0B"/>
+                </a:solidFill>
+                <a:latin typeface="Helvetica Neue"/>
+              </a:rPr>
+              <a:t>$0</a:t>
             </a:r>
           </a:p>
         </p:txBody>
@@ -4727,17 +5022,17 @@
         </p:nvSpPr>
         <p:spPr>
           <a:xfrm>
-            <a:off x="548640" y="6492240"/>
-            <a:ext cx="5486400" cy="274320"/>
-          </a:xfrm>
-          <a:prstGeom prst="rect">
-            <a:avLst/>
-          </a:prstGeom>
-          <a:noFill/>
-        </p:spPr>
-        <p:txBody>
-          <a:bodyPr wrap="square" anchor="t" lIns="0" rIns="0" tIns="0" bIns="0">
-            <a:spAutoFit/>
+            <a:off x="548640" y="6537960"/>
+            <a:ext cx="7315200" cy="274320"/>
+          </a:xfrm>
+          <a:prstGeom prst="rect">
+            <a:avLst/>
+          </a:prstGeom>
+          <a:noFill/>
+        </p:spPr>
+        <p:txBody>
+          <a:bodyPr wrap="square" anchor="t" lIns="0" rIns="0" tIns="0" bIns="0">
+            <a:noAutofit/>
           </a:bodyPr>
           <a:lstStyle/>
           <a:p>
@@ -4753,7 +5048,7 @@
                 </a:solidFill>
                 <a:latin typeface="Helvetica Neue"/>
               </a:rPr>
-              <a:t>🌸  Mom's Saheli  ·  Agent Forge AI Hackathon  ·  May 16 2026</a:t>
+              <a:t>Mom's Saheli  ·  Agent Forge AI Hackathon  ·  San Francisco  ·  May 16 2026</a:t>
             </a:r>
           </a:p>
         </p:txBody>
@@ -4766,7 +5061,7 @@
         </p:nvSpPr>
         <p:spPr>
           <a:xfrm>
-            <a:off x="10972800" y="6492240"/>
+            <a:off x="10972800" y="6537960"/>
             <a:ext cx="914400" cy="274320"/>
           </a:xfrm>
           <a:prstGeom prst="rect">
@@ -4776,7 +5071,7 @@
         </p:spPr>
         <p:txBody>
           <a:bodyPr wrap="square" anchor="t" lIns="0" rIns="0" tIns="0" bIns="0">
-            <a:spAutoFit/>
+            <a:noAutofit/>
           </a:bodyPr>
           <a:lstStyle/>
           <a:p>
@@ -4867,17 +5162,17 @@
         </p:nvSpPr>
         <p:spPr>
           <a:xfrm>
-            <a:off x="640080" y="548640"/>
-            <a:ext cx="9144000" cy="274320"/>
-          </a:xfrm>
-          <a:prstGeom prst="rect">
-            <a:avLst/>
-          </a:prstGeom>
-          <a:noFill/>
-        </p:spPr>
-        <p:txBody>
-          <a:bodyPr wrap="square" anchor="t" lIns="0" rIns="0" tIns="0" bIns="0">
-            <a:spAutoFit/>
+            <a:off x="640080" y="411480"/>
+            <a:ext cx="10972800" cy="274320"/>
+          </a:xfrm>
+          <a:prstGeom prst="rect">
+            <a:avLst/>
+          </a:prstGeom>
+          <a:noFill/>
+        </p:spPr>
+        <p:txBody>
+          <a:bodyPr wrap="square" anchor="t" lIns="0" rIns="0" tIns="0" bIns="0">
+            <a:noAutofit/>
           </a:bodyPr>
           <a:lstStyle/>
           <a:p>
@@ -4906,17 +5201,17 @@
         </p:nvSpPr>
         <p:spPr>
           <a:xfrm>
-            <a:off x="640080" y="960120"/>
-            <a:ext cx="10515600" cy="1280160"/>
-          </a:xfrm>
-          <a:prstGeom prst="rect">
-            <a:avLst/>
-          </a:prstGeom>
-          <a:noFill/>
-        </p:spPr>
-        <p:txBody>
-          <a:bodyPr wrap="square" anchor="t" lIns="0" rIns="0" tIns="0" bIns="0">
-            <a:spAutoFit/>
+            <a:off x="640080" y="777240"/>
+            <a:ext cx="10972800" cy="1280160"/>
+          </a:xfrm>
+          <a:prstGeom prst="rect">
+            <a:avLst/>
+          </a:prstGeom>
+          <a:noFill/>
+        </p:spPr>
+        <p:txBody>
+          <a:bodyPr wrap="square" anchor="t" lIns="0" rIns="0" tIns="0" bIns="0">
+            <a:noAutofit/>
           </a:bodyPr>
           <a:lstStyle/>
           <a:p>
@@ -4926,7 +5221,7 @@
               </a:lnSpc>
             </a:pPr>
             <a:r>
-              <a:rPr sz="3600" b="1" i="0">
+              <a:rPr sz="3200" b="1" i="0">
                 <a:solidFill>
                   <a:srgbClr val="09090B"/>
                 </a:solidFill>
@@ -4942,33 +5237,140 @@
               </a:lnSpc>
             </a:pPr>
             <a:r>
-              <a:rPr sz="3600" b="1" i="0">
+              <a:rPr sz="3200" b="1" i="0">
                 <a:solidFill>
                   <a:srgbClr val="09090B"/>
                 </a:solidFill>
                 <a:latin typeface="Georgia"/>
               </a:rPr>
-              <a:t>$2,000-of-consultant work — free.</a:t>
-            </a:r>
-          </a:p>
-        </p:txBody>
-      </p:sp>
-      <p:sp>
-        <p:nvSpPr>
-          <p:cNvPr id="5" name="Rectangle 4"/>
+              <a:t>$2,000 of consultant work — </a:t>
+            </a:r>
+            <a:r>
+              <a:rPr sz="3200" b="1" i="1">
+                <a:solidFill>
+                  <a:srgbClr val="B45309"/>
+                </a:solidFill>
+                <a:latin typeface="Georgia"/>
+              </a:rPr>
+              <a:t>free</a:t>
+            </a:r>
+            <a:r>
+              <a:rPr sz="3200" b="1" i="0">
+                <a:solidFill>
+                  <a:srgbClr val="09090B"/>
+                </a:solidFill>
+                <a:latin typeface="Georgia"/>
+              </a:rPr>
+              <a:t>.</a:t>
+            </a:r>
+          </a:p>
+        </p:txBody>
+      </p:sp>
+      <p:sp>
+        <p:nvSpPr>
+          <p:cNvPr id="5" name="TextBox 4"/>
+          <p:cNvSpPr txBox="1"/>
+          <p:nvPr/>
+        </p:nvSpPr>
+        <p:spPr>
+          <a:xfrm>
+            <a:off x="640080" y="2148840"/>
+            <a:ext cx="10972800" cy="457200"/>
+          </a:xfrm>
+          <a:prstGeom prst="rect">
+            <a:avLst/>
+          </a:prstGeom>
+          <a:noFill/>
+        </p:spPr>
+        <p:txBody>
+          <a:bodyPr wrap="square" anchor="t" lIns="0" rIns="0" tIns="0" bIns="0">
+            <a:noAutofit/>
+          </a:bodyPr>
+          <a:lstStyle/>
+          <a:p>
+            <a:pPr algn="l">
+              <a:lnSpc>
+                <a:spcPct val="140000"/>
+              </a:lnSpc>
+            </a:pPr>
+            <a:r>
+              <a:rPr sz="1300" b="0" i="1">
+                <a:solidFill>
+                  <a:srgbClr val="71717A"/>
+                </a:solidFill>
+                <a:latin typeface="Helvetica Neue"/>
+              </a:rPr>
+              <a:t>Not a chatbot. A swarm of specialists. Each agent has one narrow job, uses real production tools (not mocks), and hands its output to the next. End-to-end in 38 seconds, in your browser.</a:t>
+            </a:r>
+          </a:p>
+        </p:txBody>
+      </p:sp>
+      <p:sp>
+        <p:nvSpPr>
+          <p:cNvPr id="6" name="Rounded Rectangle 5"/>
           <p:cNvSpPr/>
           <p:nvPr/>
         </p:nvSpPr>
         <p:spPr>
           <a:xfrm>
-            <a:off x="1005840" y="3566160"/>
-            <a:ext cx="6675120" cy="27432"/>
-          </a:xfrm>
-          <a:prstGeom prst="rect">
-            <a:avLst/>
+            <a:off x="640080" y="2788920"/>
+            <a:ext cx="2157984" cy="3246120"/>
+          </a:xfrm>
+          <a:prstGeom prst="roundRect">
+            <a:avLst>
+              <a:gd name="adj" fmla="val 4000"/>
+            </a:avLst>
           </a:prstGeom>
           <a:solidFill>
-            <a:srgbClr val="F59E0B"/>
+            <a:srgbClr val="FFFFFF"/>
+          </a:solidFill>
+          <a:ln w="9525">
+            <a:solidFill>
+              <a:srgbClr val="F4F4F3"/>
+            </a:solidFill>
+          </a:ln>
+          <a:effectLst/>
+        </p:spPr>
+        <p:style>
+          <a:lnRef idx="1">
+            <a:schemeClr val="accent1"/>
+          </a:lnRef>
+          <a:fillRef idx="3">
+            <a:schemeClr val="accent1"/>
+          </a:fillRef>
+          <a:effectRef idx="2">
+            <a:schemeClr val="accent1"/>
+          </a:effectRef>
+          <a:fontRef idx="minor">
+            <a:schemeClr val="lt1"/>
+          </a:fontRef>
+        </p:style>
+        <p:txBody>
+          <a:bodyPr rtlCol="0" anchor="ctr"/>
+          <a:lstStyle/>
+          <a:p>
+            <a:pPr algn="ctr"/>
+          </a:p>
+        </p:txBody>
+      </p:sp>
+      <p:sp>
+        <p:nvSpPr>
+          <p:cNvPr id="7" name="Rounded Rectangle 6"/>
+          <p:cNvSpPr/>
+          <p:nvPr/>
+        </p:nvSpPr>
+        <p:spPr>
+          <a:xfrm>
+            <a:off x="640080" y="2788920"/>
+            <a:ext cx="2157984" cy="640080"/>
+          </a:xfrm>
+          <a:prstGeom prst="roundRect">
+            <a:avLst>
+              <a:gd name="adj" fmla="val 4000"/>
+            </a:avLst>
+          </a:prstGeom>
+          <a:solidFill>
+            <a:srgbClr val="B45309"/>
           </a:solidFill>
           <a:ln>
             <a:noFill/>
@@ -4999,27 +5401,140 @@
       </p:sp>
       <p:sp>
         <p:nvSpPr>
-          <p:cNvPr id="6" name="Rounded Rectangle 5"/>
+          <p:cNvPr id="8" name="TextBox 7"/>
+          <p:cNvSpPr txBox="1"/>
+          <p:nvPr/>
+        </p:nvSpPr>
+        <p:spPr>
+          <a:xfrm>
+            <a:off x="804671" y="2862072"/>
+            <a:ext cx="502920" cy="502920"/>
+          </a:xfrm>
+          <a:prstGeom prst="rect">
+            <a:avLst/>
+          </a:prstGeom>
+          <a:noFill/>
+        </p:spPr>
+        <p:txBody>
+          <a:bodyPr wrap="square" anchor="ctr" lIns="0" rIns="0" tIns="0" bIns="0">
+            <a:noAutofit/>
+          </a:bodyPr>
+          <a:lstStyle/>
+          <a:p>
+            <a:pPr algn="l">
+              <a:lnSpc>
+                <a:spcPct val="115000"/>
+              </a:lnSpc>
+            </a:pPr>
+            <a:r>
+              <a:rPr sz="2600" b="1" i="0">
+                <a:solidFill>
+                  <a:srgbClr val="FDF8F0"/>
+                </a:solidFill>
+                <a:latin typeface="Georgia"/>
+              </a:rPr>
+              <a:t>1</a:t>
+            </a:r>
+          </a:p>
+        </p:txBody>
+      </p:sp>
+      <p:sp>
+        <p:nvSpPr>
+          <p:cNvPr id="9" name="TextBox 8"/>
+          <p:cNvSpPr txBox="1"/>
+          <p:nvPr/>
+        </p:nvSpPr>
+        <p:spPr>
+          <a:xfrm>
+            <a:off x="1353312" y="2862072"/>
+            <a:ext cx="1353312" cy="502920"/>
+          </a:xfrm>
+          <a:prstGeom prst="rect">
+            <a:avLst/>
+          </a:prstGeom>
+          <a:noFill/>
+        </p:spPr>
+        <p:txBody>
+          <a:bodyPr wrap="square" anchor="ctr" lIns="0" rIns="0" tIns="0" bIns="0">
+            <a:noAutofit/>
+          </a:bodyPr>
+          <a:lstStyle/>
+          <a:p>
+            <a:pPr algn="l">
+              <a:lnSpc>
+                <a:spcPct val="105000"/>
+              </a:lnSpc>
+            </a:pPr>
+            <a:r>
+              <a:rPr sz="1150" b="1" i="0">
+                <a:solidFill>
+                  <a:srgbClr val="FDF8F0"/>
+                </a:solidFill>
+                <a:latin typeface="Helvetica Neue"/>
+              </a:rPr>
+              <a:t>Profile</a:t>
+            </a:r>
+          </a:p>
+        </p:txBody>
+      </p:sp>
+      <p:sp>
+        <p:nvSpPr>
+          <p:cNvPr id="10" name="TextBox 9"/>
+          <p:cNvSpPr txBox="1"/>
+          <p:nvPr/>
+        </p:nvSpPr>
+        <p:spPr>
+          <a:xfrm>
+            <a:off x="822959" y="3566160"/>
+            <a:ext cx="1792224" cy="1417320"/>
+          </a:xfrm>
+          <a:prstGeom prst="rect">
+            <a:avLst/>
+          </a:prstGeom>
+          <a:noFill/>
+        </p:spPr>
+        <p:txBody>
+          <a:bodyPr wrap="square" anchor="t" lIns="0" rIns="0" tIns="0" bIns="0">
+            <a:noAutofit/>
+          </a:bodyPr>
+          <a:lstStyle/>
+          <a:p>
+            <a:pPr algn="l">
+              <a:lnSpc>
+                <a:spcPct val="135000"/>
+              </a:lnSpc>
+            </a:pPr>
+            <a:r>
+              <a:rPr sz="950" b="0" i="0">
+                <a:solidFill>
+                  <a:srgbClr val="3F3F46"/>
+                </a:solidFill>
+                <a:latin typeface="Helvetica Neue"/>
+              </a:rPr>
+              <a:t>Reads her persona — skills, hours, $/mo gap, hard constraints — into a typed schema.</a:t>
+            </a:r>
+          </a:p>
+        </p:txBody>
+      </p:sp>
+      <p:sp>
+        <p:nvSpPr>
+          <p:cNvPr id="11" name="Rectangle 10"/>
           <p:cNvSpPr/>
           <p:nvPr/>
         </p:nvSpPr>
         <p:spPr>
           <a:xfrm>
-            <a:off x="914400" y="3108960"/>
-            <a:ext cx="731520" cy="731520"/>
-          </a:xfrm>
-          <a:prstGeom prst="roundRect">
-            <a:avLst>
-              <a:gd name="adj" fmla="val 50000"/>
-            </a:avLst>
+            <a:off x="822959" y="5074920"/>
+            <a:ext cx="1792224" cy="13716"/>
+          </a:xfrm>
+          <a:prstGeom prst="rect">
+            <a:avLst/>
           </a:prstGeom>
           <a:solidFill>
-            <a:srgbClr val="FFFFFF"/>
+            <a:srgbClr val="E5E5E3"/>
           </a:solidFill>
-          <a:ln w="19050">
-            <a:solidFill>
-              <a:srgbClr val="F59E0B"/>
-            </a:solidFill>
+          <a:ln>
+            <a:noFill/>
           </a:ln>
           <a:effectLst/>
         </p:spPr>
@@ -5047,159 +5562,182 @@
       </p:sp>
       <p:sp>
         <p:nvSpPr>
-          <p:cNvPr id="7" name="TextBox 6"/>
-          <p:cNvSpPr txBox="1"/>
-          <p:nvPr/>
-        </p:nvSpPr>
-        <p:spPr>
-          <a:xfrm>
-            <a:off x="914400" y="3154679"/>
-            <a:ext cx="731520" cy="640080"/>
-          </a:xfrm>
-          <a:prstGeom prst="rect">
-            <a:avLst/>
-          </a:prstGeom>
-          <a:noFill/>
-        </p:spPr>
-        <p:txBody>
-          <a:bodyPr wrap="square" anchor="ctr" lIns="0" rIns="0" tIns="0" bIns="0">
-            <a:spAutoFit/>
-          </a:bodyPr>
-          <a:lstStyle/>
-          <a:p>
-            <a:pPr algn="ctr">
+          <p:cNvPr id="12" name="TextBox 11"/>
+          <p:cNvSpPr txBox="1"/>
+          <p:nvPr/>
+        </p:nvSpPr>
+        <p:spPr>
+          <a:xfrm>
+            <a:off x="822959" y="5166360"/>
+            <a:ext cx="1792224" cy="182880"/>
+          </a:xfrm>
+          <a:prstGeom prst="rect">
+            <a:avLst/>
+          </a:prstGeom>
+          <a:noFill/>
+        </p:spPr>
+        <p:txBody>
+          <a:bodyPr wrap="square" anchor="t" lIns="0" rIns="0" tIns="0" bIns="0">
+            <a:noAutofit/>
+          </a:bodyPr>
+          <a:lstStyle/>
+          <a:p>
+            <a:pPr algn="l">
               <a:lnSpc>
                 <a:spcPct val="115000"/>
               </a:lnSpc>
             </a:pPr>
             <a:r>
-              <a:rPr sz="2800" b="1" i="0">
+              <a:rPr sz="750" b="1" i="0" spc="150">
+                <a:solidFill>
+                  <a:srgbClr val="71717A"/>
+                </a:solidFill>
+                <a:latin typeface="Helvetica Neue"/>
+              </a:rPr>
+              <a:t>USES</a:t>
+            </a:r>
+          </a:p>
+        </p:txBody>
+      </p:sp>
+      <p:sp>
+        <p:nvSpPr>
+          <p:cNvPr id="13" name="TextBox 12"/>
+          <p:cNvSpPr txBox="1"/>
+          <p:nvPr/>
+        </p:nvSpPr>
+        <p:spPr>
+          <a:xfrm>
+            <a:off x="822959" y="5330952"/>
+            <a:ext cx="1792224" cy="274320"/>
+          </a:xfrm>
+          <a:prstGeom prst="rect">
+            <a:avLst/>
+          </a:prstGeom>
+          <a:noFill/>
+        </p:spPr>
+        <p:txBody>
+          <a:bodyPr wrap="square" anchor="t" lIns="0" rIns="0" tIns="0" bIns="0">
+            <a:noAutofit/>
+          </a:bodyPr>
+          <a:lstStyle/>
+          <a:p>
+            <a:pPr algn="l">
+              <a:lnSpc>
+                <a:spcPct val="115000"/>
+              </a:lnSpc>
+            </a:pPr>
+            <a:r>
+              <a:rPr sz="800" b="0" i="0">
+                <a:solidFill>
+                  <a:srgbClr val="18181B"/>
+                </a:solidFill>
+                <a:latin typeface="Courier New"/>
+              </a:rPr>
+              <a:t>Pydantic schemas</a:t>
+            </a:r>
+          </a:p>
+        </p:txBody>
+      </p:sp>
+      <p:sp>
+        <p:nvSpPr>
+          <p:cNvPr id="14" name="TextBox 13"/>
+          <p:cNvSpPr txBox="1"/>
+          <p:nvPr/>
+        </p:nvSpPr>
+        <p:spPr>
+          <a:xfrm>
+            <a:off x="822959" y="5596127"/>
+            <a:ext cx="1792224" cy="182880"/>
+          </a:xfrm>
+          <a:prstGeom prst="rect">
+            <a:avLst/>
+          </a:prstGeom>
+          <a:noFill/>
+        </p:spPr>
+        <p:txBody>
+          <a:bodyPr wrap="square" anchor="t" lIns="0" rIns="0" tIns="0" bIns="0">
+            <a:noAutofit/>
+          </a:bodyPr>
+          <a:lstStyle/>
+          <a:p>
+            <a:pPr algn="l">
+              <a:lnSpc>
+                <a:spcPct val="115000"/>
+              </a:lnSpc>
+            </a:pPr>
+            <a:r>
+              <a:rPr sz="750" b="1" i="0" spc="150">
+                <a:solidFill>
+                  <a:srgbClr val="71717A"/>
+                </a:solidFill>
+                <a:latin typeface="Helvetica Neue"/>
+              </a:rPr>
+              <a:t>OUTPUTS</a:t>
+            </a:r>
+          </a:p>
+        </p:txBody>
+      </p:sp>
+      <p:sp>
+        <p:nvSpPr>
+          <p:cNvPr id="15" name="TextBox 14"/>
+          <p:cNvSpPr txBox="1"/>
+          <p:nvPr/>
+        </p:nvSpPr>
+        <p:spPr>
+          <a:xfrm>
+            <a:off x="822959" y="5760720"/>
+            <a:ext cx="1792224" cy="201168"/>
+          </a:xfrm>
+          <a:prstGeom prst="rect">
+            <a:avLst/>
+          </a:prstGeom>
+          <a:noFill/>
+        </p:spPr>
+        <p:txBody>
+          <a:bodyPr wrap="square" anchor="t" lIns="0" rIns="0" tIns="0" bIns="0">
+            <a:noAutofit/>
+          </a:bodyPr>
+          <a:lstStyle/>
+          <a:p>
+            <a:pPr algn="l">
+              <a:lnSpc>
+                <a:spcPct val="115000"/>
+              </a:lnSpc>
+            </a:pPr>
+            <a:r>
+              <a:rPr sz="850" b="1" i="0">
                 <a:solidFill>
                   <a:srgbClr val="B45309"/>
                 </a:solidFill>
-                <a:latin typeface="Georgia"/>
-              </a:rPr>
-              <a:t>1</a:t>
-            </a:r>
-          </a:p>
-        </p:txBody>
-      </p:sp>
-      <p:sp>
-        <p:nvSpPr>
-          <p:cNvPr id="8" name="TextBox 7"/>
-          <p:cNvSpPr txBox="1"/>
-          <p:nvPr/>
-        </p:nvSpPr>
-        <p:spPr>
-          <a:xfrm>
-            <a:off x="640080" y="3977639"/>
-            <a:ext cx="1600200" cy="365760"/>
-          </a:xfrm>
-          <a:prstGeom prst="rect">
-            <a:avLst/>
-          </a:prstGeom>
-          <a:noFill/>
-        </p:spPr>
-        <p:txBody>
-          <a:bodyPr wrap="square" anchor="t" lIns="0" rIns="0" tIns="0" bIns="0">
-            <a:spAutoFit/>
-          </a:bodyPr>
-          <a:lstStyle/>
-          <a:p>
-            <a:pPr algn="ctr">
-              <a:lnSpc>
-                <a:spcPct val="115000"/>
-              </a:lnSpc>
-            </a:pPr>
-            <a:r>
-              <a:rPr sz="1100" b="1" i="0">
-                <a:solidFill>
-                  <a:srgbClr val="18181B"/>
-                </a:solidFill>
-                <a:latin typeface="Helvetica Neue"/>
-              </a:rPr>
-              <a:t>Profile</a:t>
-            </a:r>
-          </a:p>
-        </p:txBody>
-      </p:sp>
-      <p:sp>
-        <p:nvSpPr>
-          <p:cNvPr id="9" name="TextBox 8"/>
-          <p:cNvSpPr txBox="1"/>
-          <p:nvPr/>
-        </p:nvSpPr>
-        <p:spPr>
-          <a:xfrm>
-            <a:off x="640080" y="4343400"/>
-            <a:ext cx="1600200" cy="731520"/>
-          </a:xfrm>
-          <a:prstGeom prst="rect">
-            <a:avLst/>
-          </a:prstGeom>
-          <a:noFill/>
-        </p:spPr>
-        <p:txBody>
-          <a:bodyPr wrap="square" anchor="t" lIns="0" rIns="0" tIns="0" bIns="0">
-            <a:spAutoFit/>
-          </a:bodyPr>
-          <a:lstStyle/>
-          <a:p>
-            <a:pPr algn="ctr">
-              <a:lnSpc>
-                <a:spcPct val="120000"/>
-              </a:lnSpc>
-            </a:pPr>
-            <a:r>
-              <a:rPr sz="900" b="0" i="0">
-                <a:solidFill>
-                  <a:srgbClr val="71717A"/>
-                </a:solidFill>
-                <a:latin typeface="Helvetica Neue"/>
-              </a:rPr>
-              <a:t>Normalize skills,</a:t>
-            </a:r>
-          </a:p>
-          <a:p>
-            <a:pPr algn="ctr">
-              <a:lnSpc>
-                <a:spcPct val="120000"/>
-              </a:lnSpc>
-            </a:pPr>
-            <a:r>
-              <a:rPr sz="900" b="0" i="0">
-                <a:solidFill>
-                  <a:srgbClr val="71717A"/>
-                </a:solidFill>
-                <a:latin typeface="Helvetica Neue"/>
-              </a:rPr>
-              <a:t>hours, constraints</a:t>
-            </a:r>
-          </a:p>
-        </p:txBody>
-      </p:sp>
-      <p:sp>
-        <p:nvSpPr>
-          <p:cNvPr id="10" name="Rounded Rectangle 9"/>
+                <a:latin typeface="Helvetica Neue"/>
+              </a:rPr>
+              <a:t>→ Profile object</a:t>
+            </a:r>
+          </a:p>
+        </p:txBody>
+      </p:sp>
+      <p:sp>
+        <p:nvSpPr>
+          <p:cNvPr id="16" name="Rounded Rectangle 15"/>
           <p:cNvSpPr/>
           <p:nvPr/>
         </p:nvSpPr>
         <p:spPr>
           <a:xfrm>
-            <a:off x="2377439" y="3108960"/>
-            <a:ext cx="731520" cy="731520"/>
+            <a:off x="2889504" y="2788920"/>
+            <a:ext cx="2157984" cy="3246120"/>
           </a:xfrm>
           <a:prstGeom prst="roundRect">
             <a:avLst>
-              <a:gd name="adj" fmla="val 50000"/>
+              <a:gd name="adj" fmla="val 4000"/>
             </a:avLst>
           </a:prstGeom>
           <a:solidFill>
             <a:srgbClr val="FFFFFF"/>
           </a:solidFill>
-          <a:ln w="19050">
+          <a:ln w="9525">
             <a:solidFill>
-              <a:srgbClr val="F59E0B"/>
+              <a:srgbClr val="F4F4F3"/>
             </a:solidFill>
           </a:ln>
           <a:effectLst/>
@@ -5228,160 +5766,25 @@
       </p:sp>
       <p:sp>
         <p:nvSpPr>
-          <p:cNvPr id="11" name="TextBox 10"/>
-          <p:cNvSpPr txBox="1"/>
-          <p:nvPr/>
-        </p:nvSpPr>
-        <p:spPr>
-          <a:xfrm>
-            <a:off x="2377439" y="3154679"/>
-            <a:ext cx="731520" cy="640080"/>
-          </a:xfrm>
-          <a:prstGeom prst="rect">
-            <a:avLst/>
-          </a:prstGeom>
-          <a:noFill/>
-        </p:spPr>
-        <p:txBody>
-          <a:bodyPr wrap="square" anchor="ctr" lIns="0" rIns="0" tIns="0" bIns="0">
-            <a:spAutoFit/>
-          </a:bodyPr>
-          <a:lstStyle/>
-          <a:p>
-            <a:pPr algn="ctr">
-              <a:lnSpc>
-                <a:spcPct val="115000"/>
-              </a:lnSpc>
-            </a:pPr>
-            <a:r>
-              <a:rPr sz="2800" b="1" i="0">
-                <a:solidFill>
-                  <a:srgbClr val="B45309"/>
-                </a:solidFill>
-                <a:latin typeface="Georgia"/>
-              </a:rPr>
-              <a:t>2</a:t>
-            </a:r>
-          </a:p>
-        </p:txBody>
-      </p:sp>
-      <p:sp>
-        <p:nvSpPr>
-          <p:cNvPr id="12" name="TextBox 11"/>
-          <p:cNvSpPr txBox="1"/>
-          <p:nvPr/>
-        </p:nvSpPr>
-        <p:spPr>
-          <a:xfrm>
-            <a:off x="2103120" y="3977639"/>
-            <a:ext cx="1600200" cy="365760"/>
-          </a:xfrm>
-          <a:prstGeom prst="rect">
-            <a:avLst/>
-          </a:prstGeom>
-          <a:noFill/>
-        </p:spPr>
-        <p:txBody>
-          <a:bodyPr wrap="square" anchor="t" lIns="0" rIns="0" tIns="0" bIns="0">
-            <a:spAutoFit/>
-          </a:bodyPr>
-          <a:lstStyle/>
-          <a:p>
-            <a:pPr algn="ctr">
-              <a:lnSpc>
-                <a:spcPct val="115000"/>
-              </a:lnSpc>
-            </a:pPr>
-            <a:r>
-              <a:rPr sz="1100" b="1" i="0">
-                <a:solidFill>
-                  <a:srgbClr val="18181B"/>
-                </a:solidFill>
-                <a:latin typeface="Helvetica Neue"/>
-              </a:rPr>
-              <a:t>Market Scout</a:t>
-            </a:r>
-          </a:p>
-        </p:txBody>
-      </p:sp>
-      <p:sp>
-        <p:nvSpPr>
-          <p:cNvPr id="13" name="TextBox 12"/>
-          <p:cNvSpPr txBox="1"/>
-          <p:nvPr/>
-        </p:nvSpPr>
-        <p:spPr>
-          <a:xfrm>
-            <a:off x="2103120" y="4343400"/>
-            <a:ext cx="1600200" cy="731520"/>
-          </a:xfrm>
-          <a:prstGeom prst="rect">
-            <a:avLst/>
-          </a:prstGeom>
-          <a:noFill/>
-        </p:spPr>
-        <p:txBody>
-          <a:bodyPr wrap="square" anchor="t" lIns="0" rIns="0" tIns="0" bIns="0">
-            <a:spAutoFit/>
-          </a:bodyPr>
-          <a:lstStyle/>
-          <a:p>
-            <a:pPr algn="ctr">
-              <a:lnSpc>
-                <a:spcPct val="120000"/>
-              </a:lnSpc>
-            </a:pPr>
-            <a:r>
-              <a:rPr sz="900" b="0" i="0">
-                <a:solidFill>
-                  <a:srgbClr val="71717A"/>
-                </a:solidFill>
-                <a:latin typeface="Helvetica Neue"/>
-              </a:rPr>
-              <a:t>Rank 6–10 paths by</a:t>
-            </a:r>
-          </a:p>
-          <a:p>
-            <a:pPr algn="ctr">
-              <a:lnSpc>
-                <a:spcPct val="120000"/>
-              </a:lnSpc>
-            </a:pPr>
-            <a:r>
-              <a:rPr sz="900" b="0" i="0">
-                <a:solidFill>
-                  <a:srgbClr val="71717A"/>
-                </a:solidFill>
-                <a:latin typeface="Helvetica Neue"/>
-              </a:rPr>
-              <a:t>realistic net $/mo</a:t>
-            </a:r>
-          </a:p>
-        </p:txBody>
-      </p:sp>
-      <p:sp>
-        <p:nvSpPr>
-          <p:cNvPr id="14" name="Rounded Rectangle 13"/>
+          <p:cNvPr id="17" name="Rounded Rectangle 16"/>
           <p:cNvSpPr/>
           <p:nvPr/>
         </p:nvSpPr>
         <p:spPr>
           <a:xfrm>
-            <a:off x="3840480" y="3108960"/>
-            <a:ext cx="731520" cy="731520"/>
+            <a:off x="2889504" y="2788920"/>
+            <a:ext cx="2157984" cy="640080"/>
           </a:xfrm>
           <a:prstGeom prst="roundRect">
             <a:avLst>
-              <a:gd name="adj" fmla="val 50000"/>
+              <a:gd name="adj" fmla="val 4000"/>
             </a:avLst>
           </a:prstGeom>
           <a:solidFill>
-            <a:srgbClr val="FFFFFF"/>
+            <a:srgbClr val="B45309"/>
           </a:solidFill>
-          <a:ln w="19050">
-            <a:solidFill>
-              <a:srgbClr val="F59E0B"/>
-            </a:solidFill>
+          <a:ln>
+            <a:noFill/>
           </a:ln>
           <a:effectLst/>
         </p:spPr>
@@ -5409,14 +5812,14 @@
       </p:sp>
       <p:sp>
         <p:nvSpPr>
-          <p:cNvPr id="15" name="TextBox 14"/>
-          <p:cNvSpPr txBox="1"/>
-          <p:nvPr/>
-        </p:nvSpPr>
-        <p:spPr>
-          <a:xfrm>
-            <a:off x="3840480" y="3154679"/>
-            <a:ext cx="731520" cy="640080"/>
+          <p:cNvPr id="18" name="TextBox 17"/>
+          <p:cNvSpPr txBox="1"/>
+          <p:nvPr/>
+        </p:nvSpPr>
+        <p:spPr>
+          <a:xfrm>
+            <a:off x="3054096" y="2862072"/>
+            <a:ext cx="502920" cy="502920"/>
           </a:xfrm>
           <a:prstGeom prst="rect">
             <a:avLst/>
@@ -5425,144 +5828,124 @@
         </p:spPr>
         <p:txBody>
           <a:bodyPr wrap="square" anchor="ctr" lIns="0" rIns="0" tIns="0" bIns="0">
-            <a:spAutoFit/>
-          </a:bodyPr>
-          <a:lstStyle/>
-          <a:p>
-            <a:pPr algn="ctr">
+            <a:noAutofit/>
+          </a:bodyPr>
+          <a:lstStyle/>
+          <a:p>
+            <a:pPr algn="l">
               <a:lnSpc>
                 <a:spcPct val="115000"/>
               </a:lnSpc>
             </a:pPr>
             <a:r>
-              <a:rPr sz="2800" b="1" i="0">
-                <a:solidFill>
-                  <a:srgbClr val="B45309"/>
+              <a:rPr sz="2600" b="1" i="0">
+                <a:solidFill>
+                  <a:srgbClr val="FDF8F0"/>
                 </a:solidFill>
                 <a:latin typeface="Georgia"/>
               </a:rPr>
-              <a:t>3</a:t>
-            </a:r>
-          </a:p>
-        </p:txBody>
-      </p:sp>
-      <p:sp>
-        <p:nvSpPr>
-          <p:cNvPr id="16" name="TextBox 15"/>
-          <p:cNvSpPr txBox="1"/>
-          <p:nvPr/>
-        </p:nvSpPr>
-        <p:spPr>
-          <a:xfrm>
-            <a:off x="3566160" y="3977639"/>
-            <a:ext cx="1600200" cy="365760"/>
-          </a:xfrm>
-          <a:prstGeom prst="rect">
-            <a:avLst/>
-          </a:prstGeom>
-          <a:noFill/>
-        </p:spPr>
-        <p:txBody>
-          <a:bodyPr wrap="square" anchor="t" lIns="0" rIns="0" tIns="0" bIns="0">
-            <a:spAutoFit/>
-          </a:bodyPr>
-          <a:lstStyle/>
-          <a:p>
-            <a:pPr algn="ctr">
-              <a:lnSpc>
-                <a:spcPct val="115000"/>
-              </a:lnSpc>
-            </a:pPr>
-            <a:r>
-              <a:rPr sz="1100" b="1" i="0">
-                <a:solidFill>
-                  <a:srgbClr val="18181B"/>
-                </a:solidFill>
-                <a:latin typeface="Helvetica Neue"/>
-              </a:rPr>
-              <a:t>Reality &amp; Compliance</a:t>
-            </a:r>
-          </a:p>
-        </p:txBody>
-      </p:sp>
-      <p:sp>
-        <p:nvSpPr>
-          <p:cNvPr id="17" name="TextBox 16"/>
-          <p:cNvSpPr txBox="1"/>
-          <p:nvPr/>
-        </p:nvSpPr>
-        <p:spPr>
-          <a:xfrm>
-            <a:off x="3566160" y="4343400"/>
-            <a:ext cx="1600200" cy="731520"/>
-          </a:xfrm>
-          <a:prstGeom prst="rect">
-            <a:avLst/>
-          </a:prstGeom>
-          <a:noFill/>
-        </p:spPr>
-        <p:txBody>
-          <a:bodyPr wrap="square" anchor="t" lIns="0" rIns="0" tIns="0" bIns="0">
-            <a:spAutoFit/>
-          </a:bodyPr>
-          <a:lstStyle/>
-          <a:p>
-            <a:pPr algn="ctr">
-              <a:lnSpc>
-                <a:spcPct val="120000"/>
-              </a:lnSpc>
-            </a:pPr>
-            <a:r>
-              <a:rPr sz="900" b="0" i="0">
-                <a:solidFill>
-                  <a:srgbClr val="71717A"/>
-                </a:solidFill>
-                <a:latin typeface="Helvetica Neue"/>
-              </a:rPr>
-              <a:t>Block illegal options</a:t>
-            </a:r>
-          </a:p>
-          <a:p>
-            <a:pPr algn="ctr">
-              <a:lnSpc>
-                <a:spcPct val="120000"/>
-              </a:lnSpc>
-            </a:pPr>
-            <a:r>
-              <a:rPr sz="900" b="0" i="0">
-                <a:solidFill>
-                  <a:srgbClr val="71717A"/>
-                </a:solidFill>
-                <a:latin typeface="Helvetica Neue"/>
-              </a:rPr>
-              <a:t>with cited state law</a:t>
-            </a:r>
-          </a:p>
-        </p:txBody>
-      </p:sp>
-      <p:sp>
-        <p:nvSpPr>
-          <p:cNvPr id="18" name="Rounded Rectangle 17"/>
+              <a:t>2</a:t>
+            </a:r>
+          </a:p>
+        </p:txBody>
+      </p:sp>
+      <p:sp>
+        <p:nvSpPr>
+          <p:cNvPr id="19" name="TextBox 18"/>
+          <p:cNvSpPr txBox="1"/>
+          <p:nvPr/>
+        </p:nvSpPr>
+        <p:spPr>
+          <a:xfrm>
+            <a:off x="3602736" y="2862072"/>
+            <a:ext cx="1353312" cy="502920"/>
+          </a:xfrm>
+          <a:prstGeom prst="rect">
+            <a:avLst/>
+          </a:prstGeom>
+          <a:noFill/>
+        </p:spPr>
+        <p:txBody>
+          <a:bodyPr wrap="square" anchor="ctr" lIns="0" rIns="0" tIns="0" bIns="0">
+            <a:noAutofit/>
+          </a:bodyPr>
+          <a:lstStyle/>
+          <a:p>
+            <a:pPr algn="l">
+              <a:lnSpc>
+                <a:spcPct val="105000"/>
+              </a:lnSpc>
+            </a:pPr>
+            <a:r>
+              <a:rPr sz="1150" b="1" i="0">
+                <a:solidFill>
+                  <a:srgbClr val="FDF8F0"/>
+                </a:solidFill>
+                <a:latin typeface="Helvetica Neue"/>
+              </a:rPr>
+              <a:t>Market Scout</a:t>
+            </a:r>
+          </a:p>
+        </p:txBody>
+      </p:sp>
+      <p:sp>
+        <p:nvSpPr>
+          <p:cNvPr id="20" name="TextBox 19"/>
+          <p:cNvSpPr txBox="1"/>
+          <p:nvPr/>
+        </p:nvSpPr>
+        <p:spPr>
+          <a:xfrm>
+            <a:off x="3072384" y="3566160"/>
+            <a:ext cx="1792224" cy="1417320"/>
+          </a:xfrm>
+          <a:prstGeom prst="rect">
+            <a:avLst/>
+          </a:prstGeom>
+          <a:noFill/>
+        </p:spPr>
+        <p:txBody>
+          <a:bodyPr wrap="square" anchor="t" lIns="0" rIns="0" tIns="0" bIns="0">
+            <a:noAutofit/>
+          </a:bodyPr>
+          <a:lstStyle/>
+          <a:p>
+            <a:pPr algn="l">
+              <a:lnSpc>
+                <a:spcPct val="135000"/>
+              </a:lnSpc>
+            </a:pPr>
+            <a:r>
+              <a:rPr sz="950" b="0" i="0">
+                <a:solidFill>
+                  <a:srgbClr val="3F3F46"/>
+                </a:solidFill>
+                <a:latin typeface="Helvetica Neue"/>
+              </a:rPr>
+              <a:t>Pulls 6–10 real evidence cards (Etsy, Castiron, FB groups) and asks Gemini to rank by net $/month.</a:t>
+            </a:r>
+          </a:p>
+        </p:txBody>
+      </p:sp>
+      <p:sp>
+        <p:nvSpPr>
+          <p:cNvPr id="21" name="Rectangle 20"/>
           <p:cNvSpPr/>
           <p:nvPr/>
         </p:nvSpPr>
         <p:spPr>
           <a:xfrm>
-            <a:off x="5303520" y="3108960"/>
-            <a:ext cx="731520" cy="731520"/>
-          </a:xfrm>
-          <a:prstGeom prst="roundRect">
-            <a:avLst>
-              <a:gd name="adj" fmla="val 50000"/>
-            </a:avLst>
+            <a:off x="3072384" y="5074920"/>
+            <a:ext cx="1792224" cy="13716"/>
+          </a:xfrm>
+          <a:prstGeom prst="rect">
+            <a:avLst/>
           </a:prstGeom>
           <a:solidFill>
-            <a:srgbClr val="FFFFFF"/>
+            <a:srgbClr val="E5E5E3"/>
           </a:solidFill>
-          <a:ln w="19050">
-            <a:solidFill>
-              <a:srgbClr val="F59E0B"/>
-            </a:solidFill>
+          <a:ln>
+            <a:noFill/>
           </a:ln>
           <a:effectLst/>
         </p:spPr>
@@ -5590,159 +5973,182 @@
       </p:sp>
       <p:sp>
         <p:nvSpPr>
-          <p:cNvPr id="19" name="TextBox 18"/>
-          <p:cNvSpPr txBox="1"/>
-          <p:nvPr/>
-        </p:nvSpPr>
-        <p:spPr>
-          <a:xfrm>
-            <a:off x="5303520" y="3154679"/>
-            <a:ext cx="731520" cy="640080"/>
-          </a:xfrm>
-          <a:prstGeom prst="rect">
-            <a:avLst/>
-          </a:prstGeom>
-          <a:noFill/>
-        </p:spPr>
-        <p:txBody>
-          <a:bodyPr wrap="square" anchor="ctr" lIns="0" rIns="0" tIns="0" bIns="0">
-            <a:spAutoFit/>
-          </a:bodyPr>
-          <a:lstStyle/>
-          <a:p>
-            <a:pPr algn="ctr">
+          <p:cNvPr id="22" name="TextBox 21"/>
+          <p:cNvSpPr txBox="1"/>
+          <p:nvPr/>
+        </p:nvSpPr>
+        <p:spPr>
+          <a:xfrm>
+            <a:off x="3072384" y="5166360"/>
+            <a:ext cx="1792224" cy="182880"/>
+          </a:xfrm>
+          <a:prstGeom prst="rect">
+            <a:avLst/>
+          </a:prstGeom>
+          <a:noFill/>
+        </p:spPr>
+        <p:txBody>
+          <a:bodyPr wrap="square" anchor="t" lIns="0" rIns="0" tIns="0" bIns="0">
+            <a:noAutofit/>
+          </a:bodyPr>
+          <a:lstStyle/>
+          <a:p>
+            <a:pPr algn="l">
               <a:lnSpc>
                 <a:spcPct val="115000"/>
               </a:lnSpc>
             </a:pPr>
             <a:r>
-              <a:rPr sz="2800" b="1" i="0">
+              <a:rPr sz="750" b="1" i="0" spc="150">
+                <a:solidFill>
+                  <a:srgbClr val="71717A"/>
+                </a:solidFill>
+                <a:latin typeface="Helvetica Neue"/>
+              </a:rPr>
+              <a:t>USES</a:t>
+            </a:r>
+          </a:p>
+        </p:txBody>
+      </p:sp>
+      <p:sp>
+        <p:nvSpPr>
+          <p:cNvPr id="23" name="TextBox 22"/>
+          <p:cNvSpPr txBox="1"/>
+          <p:nvPr/>
+        </p:nvSpPr>
+        <p:spPr>
+          <a:xfrm>
+            <a:off x="3072384" y="5330952"/>
+            <a:ext cx="1792224" cy="274320"/>
+          </a:xfrm>
+          <a:prstGeom prst="rect">
+            <a:avLst/>
+          </a:prstGeom>
+          <a:noFill/>
+        </p:spPr>
+        <p:txBody>
+          <a:bodyPr wrap="square" anchor="t" lIns="0" rIns="0" tIns="0" bIns="0">
+            <a:noAutofit/>
+          </a:bodyPr>
+          <a:lstStyle/>
+          <a:p>
+            <a:pPr algn="l">
+              <a:lnSpc>
+                <a:spcPct val="115000"/>
+              </a:lnSpc>
+            </a:pPr>
+            <a:r>
+              <a:rPr sz="800" b="0" i="0">
+                <a:solidFill>
+                  <a:srgbClr val="18181B"/>
+                </a:solidFill>
+                <a:latin typeface="Courier New"/>
+              </a:rPr>
+              <a:t>Bright Data + Actionbook + Gemini</a:t>
+            </a:r>
+          </a:p>
+        </p:txBody>
+      </p:sp>
+      <p:sp>
+        <p:nvSpPr>
+          <p:cNvPr id="24" name="TextBox 23"/>
+          <p:cNvSpPr txBox="1"/>
+          <p:nvPr/>
+        </p:nvSpPr>
+        <p:spPr>
+          <a:xfrm>
+            <a:off x="3072384" y="5596127"/>
+            <a:ext cx="1792224" cy="182880"/>
+          </a:xfrm>
+          <a:prstGeom prst="rect">
+            <a:avLst/>
+          </a:prstGeom>
+          <a:noFill/>
+        </p:spPr>
+        <p:txBody>
+          <a:bodyPr wrap="square" anchor="t" lIns="0" rIns="0" tIns="0" bIns="0">
+            <a:noAutofit/>
+          </a:bodyPr>
+          <a:lstStyle/>
+          <a:p>
+            <a:pPr algn="l">
+              <a:lnSpc>
+                <a:spcPct val="115000"/>
+              </a:lnSpc>
+            </a:pPr>
+            <a:r>
+              <a:rPr sz="750" b="1" i="0" spc="150">
+                <a:solidFill>
+                  <a:srgbClr val="71717A"/>
+                </a:solidFill>
+                <a:latin typeface="Helvetica Neue"/>
+              </a:rPr>
+              <a:t>OUTPUTS</a:t>
+            </a:r>
+          </a:p>
+        </p:txBody>
+      </p:sp>
+      <p:sp>
+        <p:nvSpPr>
+          <p:cNvPr id="25" name="TextBox 24"/>
+          <p:cNvSpPr txBox="1"/>
+          <p:nvPr/>
+        </p:nvSpPr>
+        <p:spPr>
+          <a:xfrm>
+            <a:off x="3072384" y="5760720"/>
+            <a:ext cx="1792224" cy="201168"/>
+          </a:xfrm>
+          <a:prstGeom prst="rect">
+            <a:avLst/>
+          </a:prstGeom>
+          <a:noFill/>
+        </p:spPr>
+        <p:txBody>
+          <a:bodyPr wrap="square" anchor="t" lIns="0" rIns="0" tIns="0" bIns="0">
+            <a:noAutofit/>
+          </a:bodyPr>
+          <a:lstStyle/>
+          <a:p>
+            <a:pPr algn="l">
+              <a:lnSpc>
+                <a:spcPct val="115000"/>
+              </a:lnSpc>
+            </a:pPr>
+            <a:r>
+              <a:rPr sz="850" b="1" i="0">
                 <a:solidFill>
                   <a:srgbClr val="B45309"/>
                 </a:solidFill>
-                <a:latin typeface="Georgia"/>
-              </a:rPr>
-              <a:t>4</a:t>
-            </a:r>
-          </a:p>
-        </p:txBody>
-      </p:sp>
-      <p:sp>
-        <p:nvSpPr>
-          <p:cNvPr id="20" name="TextBox 19"/>
-          <p:cNvSpPr txBox="1"/>
-          <p:nvPr/>
-        </p:nvSpPr>
-        <p:spPr>
-          <a:xfrm>
-            <a:off x="5029200" y="3977639"/>
-            <a:ext cx="1600200" cy="365760"/>
-          </a:xfrm>
-          <a:prstGeom prst="rect">
-            <a:avLst/>
-          </a:prstGeom>
-          <a:noFill/>
-        </p:spPr>
-        <p:txBody>
-          <a:bodyPr wrap="square" anchor="t" lIns="0" rIns="0" tIns="0" bIns="0">
-            <a:spAutoFit/>
-          </a:bodyPr>
-          <a:lstStyle/>
-          <a:p>
-            <a:pPr algn="ctr">
-              <a:lnSpc>
-                <a:spcPct val="115000"/>
-              </a:lnSpc>
-            </a:pPr>
-            <a:r>
-              <a:rPr sz="1100" b="1" i="0">
-                <a:solidFill>
-                  <a:srgbClr val="18181B"/>
-                </a:solidFill>
-                <a:latin typeface="Helvetica Neue"/>
-              </a:rPr>
-              <a:t>Launch</a:t>
-            </a:r>
-          </a:p>
-        </p:txBody>
-      </p:sp>
-      <p:sp>
-        <p:nvSpPr>
-          <p:cNvPr id="21" name="TextBox 20"/>
-          <p:cNvSpPr txBox="1"/>
-          <p:nvPr/>
-        </p:nvSpPr>
-        <p:spPr>
-          <a:xfrm>
-            <a:off x="5029200" y="4343400"/>
-            <a:ext cx="1600200" cy="731520"/>
-          </a:xfrm>
-          <a:prstGeom prst="rect">
-            <a:avLst/>
-          </a:prstGeom>
-          <a:noFill/>
-        </p:spPr>
-        <p:txBody>
-          <a:bodyPr wrap="square" anchor="t" lIns="0" rIns="0" tIns="0" bIns="0">
-            <a:spAutoFit/>
-          </a:bodyPr>
-          <a:lstStyle/>
-          <a:p>
-            <a:pPr algn="ctr">
-              <a:lnSpc>
-                <a:spcPct val="120000"/>
-              </a:lnSpc>
-            </a:pPr>
-            <a:r>
-              <a:rPr sz="900" b="0" i="0">
-                <a:solidFill>
-                  <a:srgbClr val="71717A"/>
-                </a:solidFill>
-                <a:latin typeface="Helvetica Neue"/>
-              </a:rPr>
-              <a:t>Offer + 7-day plan +</a:t>
-            </a:r>
-          </a:p>
-          <a:p>
-            <a:pPr algn="ctr">
-              <a:lnSpc>
-                <a:spcPct val="120000"/>
-              </a:lnSpc>
-            </a:pPr>
-            <a:r>
-              <a:rPr sz="900" b="0" i="0">
-                <a:solidFill>
-                  <a:srgbClr val="71717A"/>
-                </a:solidFill>
-                <a:latin typeface="Helvetica Neue"/>
-              </a:rPr>
-              <a:t>real published page</a:t>
-            </a:r>
-          </a:p>
-        </p:txBody>
-      </p:sp>
-      <p:sp>
-        <p:nvSpPr>
-          <p:cNvPr id="22" name="Rounded Rectangle 21"/>
+                <a:latin typeface="Helvetica Neue"/>
+              </a:rPr>
+              <a:t>→ Ranked opportunities</a:t>
+            </a:r>
+          </a:p>
+        </p:txBody>
+      </p:sp>
+      <p:sp>
+        <p:nvSpPr>
+          <p:cNvPr id="26" name="Rounded Rectangle 25"/>
           <p:cNvSpPr/>
           <p:nvPr/>
         </p:nvSpPr>
         <p:spPr>
           <a:xfrm>
-            <a:off x="6766560" y="3108960"/>
-            <a:ext cx="731520" cy="731520"/>
+            <a:off x="5138928" y="2788920"/>
+            <a:ext cx="2157984" cy="3246120"/>
           </a:xfrm>
           <a:prstGeom prst="roundRect">
             <a:avLst>
-              <a:gd name="adj" fmla="val 50000"/>
+              <a:gd name="adj" fmla="val 4000"/>
             </a:avLst>
           </a:prstGeom>
           <a:solidFill>
             <a:srgbClr val="FFFFFF"/>
           </a:solidFill>
-          <a:ln w="19050">
+          <a:ln w="9525">
             <a:solidFill>
-              <a:srgbClr val="F59E0B"/>
+              <a:srgbClr val="F4F4F3"/>
             </a:solidFill>
           </a:ln>
           <a:effectLst/>
@@ -5771,199 +6177,25 @@
       </p:sp>
       <p:sp>
         <p:nvSpPr>
-          <p:cNvPr id="23" name="TextBox 22"/>
-          <p:cNvSpPr txBox="1"/>
-          <p:nvPr/>
-        </p:nvSpPr>
-        <p:spPr>
-          <a:xfrm>
-            <a:off x="6766560" y="3154679"/>
-            <a:ext cx="731520" cy="640080"/>
-          </a:xfrm>
-          <a:prstGeom prst="rect">
-            <a:avLst/>
-          </a:prstGeom>
-          <a:noFill/>
-        </p:spPr>
-        <p:txBody>
-          <a:bodyPr wrap="square" anchor="ctr" lIns="0" rIns="0" tIns="0" bIns="0">
-            <a:spAutoFit/>
-          </a:bodyPr>
-          <a:lstStyle/>
-          <a:p>
-            <a:pPr algn="ctr">
-              <a:lnSpc>
-                <a:spcPct val="115000"/>
-              </a:lnSpc>
-            </a:pPr>
-            <a:r>
-              <a:rPr sz="2800" b="1" i="0">
-                <a:solidFill>
-                  <a:srgbClr val="B45309"/>
-                </a:solidFill>
-                <a:latin typeface="Georgia"/>
-              </a:rPr>
-              <a:t>5</a:t>
-            </a:r>
-          </a:p>
-        </p:txBody>
-      </p:sp>
-      <p:sp>
-        <p:nvSpPr>
-          <p:cNvPr id="24" name="TextBox 23"/>
-          <p:cNvSpPr txBox="1"/>
-          <p:nvPr/>
-        </p:nvSpPr>
-        <p:spPr>
-          <a:xfrm>
-            <a:off x="6492240" y="3977639"/>
-            <a:ext cx="1600200" cy="365760"/>
-          </a:xfrm>
-          <a:prstGeom prst="rect">
-            <a:avLst/>
-          </a:prstGeom>
-          <a:noFill/>
-        </p:spPr>
-        <p:txBody>
-          <a:bodyPr wrap="square" anchor="t" lIns="0" rIns="0" tIns="0" bIns="0">
-            <a:spAutoFit/>
-          </a:bodyPr>
-          <a:lstStyle/>
-          <a:p>
-            <a:pPr algn="ctr">
-              <a:lnSpc>
-                <a:spcPct val="115000"/>
-              </a:lnSpc>
-            </a:pPr>
-            <a:r>
-              <a:rPr sz="1100" b="1" i="0">
-                <a:solidFill>
-                  <a:srgbClr val="18181B"/>
-                </a:solidFill>
-                <a:latin typeface="Helvetica Neue"/>
-              </a:rPr>
-              <a:t>Memory</a:t>
-            </a:r>
-          </a:p>
-        </p:txBody>
-      </p:sp>
-      <p:sp>
-        <p:nvSpPr>
-          <p:cNvPr id="25" name="TextBox 24"/>
-          <p:cNvSpPr txBox="1"/>
-          <p:nvPr/>
-        </p:nvSpPr>
-        <p:spPr>
-          <a:xfrm>
-            <a:off x="6492240" y="4343400"/>
-            <a:ext cx="1600200" cy="731520"/>
-          </a:xfrm>
-          <a:prstGeom prst="rect">
-            <a:avLst/>
-          </a:prstGeom>
-          <a:noFill/>
-        </p:spPr>
-        <p:txBody>
-          <a:bodyPr wrap="square" anchor="t" lIns="0" rIns="0" tIns="0" bIns="0">
-            <a:spAutoFit/>
-          </a:bodyPr>
-          <a:lstStyle/>
-          <a:p>
-            <a:pPr algn="ctr">
-              <a:lnSpc>
-                <a:spcPct val="120000"/>
-              </a:lnSpc>
-            </a:pPr>
-            <a:r>
-              <a:rPr sz="900" b="0" i="0">
-                <a:solidFill>
-                  <a:srgbClr val="71717A"/>
-                </a:solidFill>
-                <a:latin typeface="Helvetica Neue"/>
-              </a:rPr>
-              <a:t>Persist + surface</a:t>
-            </a:r>
-          </a:p>
-          <a:p>
-            <a:pPr algn="ctr">
-              <a:lnSpc>
-                <a:spcPct val="120000"/>
-              </a:lnSpc>
-            </a:pPr>
-            <a:r>
-              <a:rPr sz="900" b="0" i="0">
-                <a:solidFill>
-                  <a:srgbClr val="71717A"/>
-                </a:solidFill>
-                <a:latin typeface="Helvetica Neue"/>
-              </a:rPr>
-              <a:t>cross-user pattern</a:t>
-            </a:r>
-          </a:p>
-        </p:txBody>
-      </p:sp>
-      <p:sp>
-        <p:nvSpPr>
-          <p:cNvPr id="26" name="TextBox 25"/>
-          <p:cNvSpPr txBox="1"/>
-          <p:nvPr/>
-        </p:nvSpPr>
-        <p:spPr>
-          <a:xfrm>
-            <a:off x="640080" y="5120640"/>
-            <a:ext cx="10972800" cy="365760"/>
-          </a:xfrm>
-          <a:prstGeom prst="rect">
-            <a:avLst/>
-          </a:prstGeom>
-          <a:noFill/>
-        </p:spPr>
-        <p:txBody>
-          <a:bodyPr wrap="square" anchor="t" lIns="0" rIns="0" tIns="0" bIns="0">
-            <a:spAutoFit/>
-          </a:bodyPr>
-          <a:lstStyle/>
-          <a:p>
-            <a:pPr algn="ctr">
-              <a:lnSpc>
-                <a:spcPct val="115000"/>
-              </a:lnSpc>
-            </a:pPr>
-            <a:r>
-              <a:rPr sz="1100" b="0" i="1">
-                <a:solidFill>
-                  <a:srgbClr val="71717A"/>
-                </a:solidFill>
-                <a:latin typeface="Helvetica Neue"/>
-              </a:rPr>
-              <a:t>Real Gemini 2.5 Flash  ·  Real Tavily SERP  ·  Real Bright Data  ·  Real Actionbook browser  ·  Real published .com page</a:t>
-            </a:r>
-          </a:p>
-        </p:txBody>
-      </p:sp>
-      <p:sp>
-        <p:nvSpPr>
           <p:cNvPr id="27" name="Rounded Rectangle 26"/>
           <p:cNvSpPr/>
           <p:nvPr/>
         </p:nvSpPr>
         <p:spPr>
           <a:xfrm>
-            <a:off x="640080" y="5623560"/>
-            <a:ext cx="10927080" cy="777240"/>
+            <a:off x="5138928" y="2788920"/>
+            <a:ext cx="2157984" cy="640080"/>
           </a:xfrm>
           <a:prstGeom prst="roundRect">
             <a:avLst>
-              <a:gd name="adj" fmla="val 10000"/>
+              <a:gd name="adj" fmla="val 4000"/>
             </a:avLst>
           </a:prstGeom>
           <a:solidFill>
-            <a:srgbClr val="FEE2E2"/>
+            <a:srgbClr val="B45309"/>
           </a:solidFill>
-          <a:ln w="12700">
-            <a:solidFill>
-              <a:srgbClr val="B91C1C"/>
-            </a:solidFill>
+          <a:ln>
+            <a:noFill/>
           </a:ln>
           <a:effectLst/>
         </p:spPr>
@@ -5991,20 +6223,153 @@
       </p:sp>
       <p:sp>
         <p:nvSpPr>
-          <p:cNvPr id="28" name="Rectangle 27"/>
+          <p:cNvPr id="28" name="TextBox 27"/>
+          <p:cNvSpPr txBox="1"/>
+          <p:nvPr/>
+        </p:nvSpPr>
+        <p:spPr>
+          <a:xfrm>
+            <a:off x="5303520" y="2862072"/>
+            <a:ext cx="502920" cy="502920"/>
+          </a:xfrm>
+          <a:prstGeom prst="rect">
+            <a:avLst/>
+          </a:prstGeom>
+          <a:noFill/>
+        </p:spPr>
+        <p:txBody>
+          <a:bodyPr wrap="square" anchor="ctr" lIns="0" rIns="0" tIns="0" bIns="0">
+            <a:noAutofit/>
+          </a:bodyPr>
+          <a:lstStyle/>
+          <a:p>
+            <a:pPr algn="l">
+              <a:lnSpc>
+                <a:spcPct val="115000"/>
+              </a:lnSpc>
+            </a:pPr>
+            <a:r>
+              <a:rPr sz="2600" b="1" i="0">
+                <a:solidFill>
+                  <a:srgbClr val="FDF8F0"/>
+                </a:solidFill>
+                <a:latin typeface="Georgia"/>
+              </a:rPr>
+              <a:t>3</a:t>
+            </a:r>
+          </a:p>
+        </p:txBody>
+      </p:sp>
+      <p:sp>
+        <p:nvSpPr>
+          <p:cNvPr id="29" name="TextBox 28"/>
+          <p:cNvSpPr txBox="1"/>
+          <p:nvPr/>
+        </p:nvSpPr>
+        <p:spPr>
+          <a:xfrm>
+            <a:off x="5852160" y="2862072"/>
+            <a:ext cx="1353312" cy="502920"/>
+          </a:xfrm>
+          <a:prstGeom prst="rect">
+            <a:avLst/>
+          </a:prstGeom>
+          <a:noFill/>
+        </p:spPr>
+        <p:txBody>
+          <a:bodyPr wrap="square" anchor="ctr" lIns="0" rIns="0" tIns="0" bIns="0">
+            <a:noAutofit/>
+          </a:bodyPr>
+          <a:lstStyle/>
+          <a:p>
+            <a:pPr algn="l">
+              <a:lnSpc>
+                <a:spcPct val="105000"/>
+              </a:lnSpc>
+            </a:pPr>
+            <a:r>
+              <a:rPr sz="1150" b="1" i="0">
+                <a:solidFill>
+                  <a:srgbClr val="FDF8F0"/>
+                </a:solidFill>
+                <a:latin typeface="Helvetica Neue"/>
+              </a:rPr>
+              <a:t>Reality &amp;</a:t>
+            </a:r>
+          </a:p>
+          <a:p>
+            <a:pPr algn="l">
+              <a:lnSpc>
+                <a:spcPct val="105000"/>
+              </a:lnSpc>
+            </a:pPr>
+            <a:r>
+              <a:rPr sz="1150" b="1" i="0">
+                <a:solidFill>
+                  <a:srgbClr val="FDF8F0"/>
+                </a:solidFill>
+                <a:latin typeface="Helvetica Neue"/>
+              </a:rPr>
+              <a:t>Compliance</a:t>
+            </a:r>
+          </a:p>
+        </p:txBody>
+      </p:sp>
+      <p:sp>
+        <p:nvSpPr>
+          <p:cNvPr id="30" name="TextBox 29"/>
+          <p:cNvSpPr txBox="1"/>
+          <p:nvPr/>
+        </p:nvSpPr>
+        <p:spPr>
+          <a:xfrm>
+            <a:off x="5321808" y="3566160"/>
+            <a:ext cx="1792224" cy="1417320"/>
+          </a:xfrm>
+          <a:prstGeom prst="rect">
+            <a:avLst/>
+          </a:prstGeom>
+          <a:noFill/>
+        </p:spPr>
+        <p:txBody>
+          <a:bodyPr wrap="square" anchor="t" lIns="0" rIns="0" tIns="0" bIns="0">
+            <a:noAutofit/>
+          </a:bodyPr>
+          <a:lstStyle/>
+          <a:p>
+            <a:pPr algn="l">
+              <a:lnSpc>
+                <a:spcPct val="135000"/>
+              </a:lnSpc>
+            </a:pPr>
+            <a:r>
+              <a:rPr sz="950" b="0" i="0">
+                <a:solidFill>
+                  <a:srgbClr val="3F3F46"/>
+                </a:solidFill>
+                <a:latin typeface="Helvetica Neue"/>
+              </a:rPr>
+              <a:t>Web-searches the state's actual cottage-food law and BLOCKS illegal options with the live .gov citation.</a:t>
+            </a:r>
+          </a:p>
+        </p:txBody>
+      </p:sp>
+      <p:sp>
+        <p:nvSpPr>
+          <p:cNvPr id="31" name="Rectangle 30"/>
           <p:cNvSpPr/>
           <p:nvPr/>
         </p:nvSpPr>
         <p:spPr>
           <a:xfrm>
-            <a:off x="640080" y="5623560"/>
-            <a:ext cx="73152" cy="777240"/>
+            <a:off x="5321808" y="5074920"/>
+            <a:ext cx="1792224" cy="13716"/>
           </a:xfrm>
           <a:prstGeom prst="rect">
             <a:avLst/>
           </a:prstGeom>
           <a:solidFill>
-            <a:srgbClr val="B91C1C"/>
+            <a:srgbClr val="E5E5E3"/>
           </a:solidFill>
           <a:ln>
             <a:noFill/>
@@ -6035,23 +6400,23 @@
       </p:sp>
       <p:sp>
         <p:nvSpPr>
-          <p:cNvPr id="29" name="TextBox 28"/>
-          <p:cNvSpPr txBox="1"/>
-          <p:nvPr/>
-        </p:nvSpPr>
-        <p:spPr>
-          <a:xfrm>
-            <a:off x="868680" y="5715000"/>
-            <a:ext cx="5029200" cy="274320"/>
-          </a:xfrm>
-          <a:prstGeom prst="rect">
-            <a:avLst/>
-          </a:prstGeom>
-          <a:noFill/>
-        </p:spPr>
-        <p:txBody>
-          <a:bodyPr wrap="square" anchor="t" lIns="0" rIns="0" tIns="0" bIns="0">
-            <a:spAutoFit/>
+          <p:cNvPr id="32" name="TextBox 31"/>
+          <p:cNvSpPr txBox="1"/>
+          <p:nvPr/>
+        </p:nvSpPr>
+        <p:spPr>
+          <a:xfrm>
+            <a:off x="5321808" y="5166360"/>
+            <a:ext cx="1792224" cy="182880"/>
+          </a:xfrm>
+          <a:prstGeom prst="rect">
+            <a:avLst/>
+          </a:prstGeom>
+          <a:noFill/>
+        </p:spPr>
+        <p:txBody>
+          <a:bodyPr wrap="square" anchor="t" lIns="0" rIns="0" tIns="0" bIns="0">
+            <a:noAutofit/>
           </a:bodyPr>
           <a:lstStyle/>
           <a:p>
@@ -6061,75 +6426,408 @@
               </a:lnSpc>
             </a:pPr>
             <a:r>
-              <a:rPr sz="1000" b="1" i="0" spc="150">
-                <a:solidFill>
-                  <a:srgbClr val="B91C1C"/>
-                </a:solidFill>
-                <a:latin typeface="Helvetica Neue"/>
-              </a:rPr>
-              <a:t>🛑  THE DEMO MOMENT  ·  COMPLIANCE BLOCK</a:t>
-            </a:r>
-          </a:p>
-        </p:txBody>
-      </p:sp>
-      <p:sp>
-        <p:nvSpPr>
-          <p:cNvPr id="30" name="TextBox 29"/>
-          <p:cNvSpPr txBox="1"/>
-          <p:nvPr/>
-        </p:nvSpPr>
-        <p:spPr>
-          <a:xfrm>
-            <a:off x="868680" y="5989320"/>
-            <a:ext cx="10561319" cy="411480"/>
-          </a:xfrm>
-          <a:prstGeom prst="rect">
-            <a:avLst/>
-          </a:prstGeom>
-          <a:noFill/>
-        </p:spPr>
-        <p:txBody>
-          <a:bodyPr wrap="square" anchor="t" lIns="0" rIns="0" tIns="0" bIns="0">
-            <a:spAutoFit/>
-          </a:bodyPr>
-          <a:lstStyle/>
-          <a:p>
-            <a:pPr algn="l">
-              <a:lnSpc>
-                <a:spcPct val="125000"/>
-              </a:lnSpc>
-            </a:pPr>
-            <a:r>
-              <a:rPr sz="1100" b="0" i="1">
+              <a:rPr sz="750" b="1" i="0" spc="150">
+                <a:solidFill>
+                  <a:srgbClr val="71717A"/>
+                </a:solidFill>
+                <a:latin typeface="Helvetica Neue"/>
+              </a:rPr>
+              <a:t>USES</a:t>
+            </a:r>
+          </a:p>
+        </p:txBody>
+      </p:sp>
+      <p:sp>
+        <p:nvSpPr>
+          <p:cNvPr id="33" name="TextBox 32"/>
+          <p:cNvSpPr txBox="1"/>
+          <p:nvPr/>
+        </p:nvSpPr>
+        <p:spPr>
+          <a:xfrm>
+            <a:off x="5321808" y="5330952"/>
+            <a:ext cx="1792224" cy="274320"/>
+          </a:xfrm>
+          <a:prstGeom prst="rect">
+            <a:avLst/>
+          </a:prstGeom>
+          <a:noFill/>
+        </p:spPr>
+        <p:txBody>
+          <a:bodyPr wrap="square" anchor="t" lIns="0" rIns="0" tIns="0" bIns="0">
+            <a:noAutofit/>
+          </a:bodyPr>
+          <a:lstStyle/>
+          <a:p>
+            <a:pPr algn="l">
+              <a:lnSpc>
+                <a:spcPct val="115000"/>
+              </a:lnSpc>
+            </a:pPr>
+            <a:r>
+              <a:rPr sz="800" b="0" i="0">
                 <a:solidFill>
                   <a:srgbClr val="18181B"/>
                 </a:solidFill>
+                <a:latin typeface="Courier New"/>
+              </a:rPr>
+              <a:t>Tavily / Bright Data + Gemini</a:t>
+            </a:r>
+          </a:p>
+        </p:txBody>
+      </p:sp>
+      <p:sp>
+        <p:nvSpPr>
+          <p:cNvPr id="34" name="TextBox 33"/>
+          <p:cNvSpPr txBox="1"/>
+          <p:nvPr/>
+        </p:nvSpPr>
+        <p:spPr>
+          <a:xfrm>
+            <a:off x="5321808" y="5596127"/>
+            <a:ext cx="1792224" cy="182880"/>
+          </a:xfrm>
+          <a:prstGeom prst="rect">
+            <a:avLst/>
+          </a:prstGeom>
+          <a:noFill/>
+        </p:spPr>
+        <p:txBody>
+          <a:bodyPr wrap="square" anchor="t" lIns="0" rIns="0" tIns="0" bIns="0">
+            <a:noAutofit/>
+          </a:bodyPr>
+          <a:lstStyle/>
+          <a:p>
+            <a:pPr algn="l">
+              <a:lnSpc>
+                <a:spcPct val="115000"/>
+              </a:lnSpc>
+            </a:pPr>
+            <a:r>
+              <a:rPr sz="750" b="1" i="0" spc="150">
+                <a:solidFill>
+                  <a:srgbClr val="71717A"/>
+                </a:solidFill>
+                <a:latin typeface="Helvetica Neue"/>
+              </a:rPr>
+              <a:t>OUTPUTS</a:t>
+            </a:r>
+          </a:p>
+        </p:txBody>
+      </p:sp>
+      <p:sp>
+        <p:nvSpPr>
+          <p:cNvPr id="35" name="TextBox 34"/>
+          <p:cNvSpPr txBox="1"/>
+          <p:nvPr/>
+        </p:nvSpPr>
+        <p:spPr>
+          <a:xfrm>
+            <a:off x="5321808" y="5760720"/>
+            <a:ext cx="1792224" cy="201168"/>
+          </a:xfrm>
+          <a:prstGeom prst="rect">
+            <a:avLst/>
+          </a:prstGeom>
+          <a:noFill/>
+        </p:spPr>
+        <p:txBody>
+          <a:bodyPr wrap="square" anchor="t" lIns="0" rIns="0" tIns="0" bIns="0">
+            <a:noAutofit/>
+          </a:bodyPr>
+          <a:lstStyle/>
+          <a:p>
+            <a:pPr algn="l">
+              <a:lnSpc>
+                <a:spcPct val="115000"/>
+              </a:lnSpc>
+            </a:pPr>
+            <a:r>
+              <a:rPr sz="850" b="1" i="0">
+                <a:solidFill>
+                  <a:srgbClr val="B45309"/>
+                </a:solidFill>
+                <a:latin typeface="Helvetica Neue"/>
+              </a:rPr>
+              <a:t>→ PASS / BLOCK + cited law</a:t>
+            </a:r>
+          </a:p>
+        </p:txBody>
+      </p:sp>
+      <p:sp>
+        <p:nvSpPr>
+          <p:cNvPr id="36" name="Rounded Rectangle 35"/>
+          <p:cNvSpPr/>
+          <p:nvPr/>
+        </p:nvSpPr>
+        <p:spPr>
+          <a:xfrm>
+            <a:off x="7388352" y="2788920"/>
+            <a:ext cx="2157984" cy="3246120"/>
+          </a:xfrm>
+          <a:prstGeom prst="roundRect">
+            <a:avLst>
+              <a:gd name="adj" fmla="val 4000"/>
+            </a:avLst>
+          </a:prstGeom>
+          <a:solidFill>
+            <a:srgbClr val="FFFFFF"/>
+          </a:solidFill>
+          <a:ln w="9525">
+            <a:solidFill>
+              <a:srgbClr val="F4F4F3"/>
+            </a:solidFill>
+          </a:ln>
+          <a:effectLst/>
+        </p:spPr>
+        <p:style>
+          <a:lnRef idx="1">
+            <a:schemeClr val="accent1"/>
+          </a:lnRef>
+          <a:fillRef idx="3">
+            <a:schemeClr val="accent1"/>
+          </a:fillRef>
+          <a:effectRef idx="2">
+            <a:schemeClr val="accent1"/>
+          </a:effectRef>
+          <a:fontRef idx="minor">
+            <a:schemeClr val="lt1"/>
+          </a:fontRef>
+        </p:style>
+        <p:txBody>
+          <a:bodyPr rtlCol="0" anchor="ctr"/>
+          <a:lstStyle/>
+          <a:p>
+            <a:pPr algn="ctr"/>
+          </a:p>
+        </p:txBody>
+      </p:sp>
+      <p:sp>
+        <p:nvSpPr>
+          <p:cNvPr id="37" name="Rounded Rectangle 36"/>
+          <p:cNvSpPr/>
+          <p:nvPr/>
+        </p:nvSpPr>
+        <p:spPr>
+          <a:xfrm>
+            <a:off x="7388352" y="2788920"/>
+            <a:ext cx="2157984" cy="640080"/>
+          </a:xfrm>
+          <a:prstGeom prst="roundRect">
+            <a:avLst>
+              <a:gd name="adj" fmla="val 4000"/>
+            </a:avLst>
+          </a:prstGeom>
+          <a:solidFill>
+            <a:srgbClr val="B45309"/>
+          </a:solidFill>
+          <a:ln>
+            <a:noFill/>
+          </a:ln>
+          <a:effectLst/>
+        </p:spPr>
+        <p:style>
+          <a:lnRef idx="1">
+            <a:schemeClr val="accent1"/>
+          </a:lnRef>
+          <a:fillRef idx="3">
+            <a:schemeClr val="accent1"/>
+          </a:fillRef>
+          <a:effectRef idx="2">
+            <a:schemeClr val="accent1"/>
+          </a:effectRef>
+          <a:fontRef idx="minor">
+            <a:schemeClr val="lt1"/>
+          </a:fontRef>
+        </p:style>
+        <p:txBody>
+          <a:bodyPr rtlCol="0" anchor="ctr"/>
+          <a:lstStyle/>
+          <a:p>
+            <a:pPr algn="ctr"/>
+          </a:p>
+        </p:txBody>
+      </p:sp>
+      <p:sp>
+        <p:nvSpPr>
+          <p:cNvPr id="38" name="TextBox 37"/>
+          <p:cNvSpPr txBox="1"/>
+          <p:nvPr/>
+        </p:nvSpPr>
+        <p:spPr>
+          <a:xfrm>
+            <a:off x="7552944" y="2862072"/>
+            <a:ext cx="502920" cy="502920"/>
+          </a:xfrm>
+          <a:prstGeom prst="rect">
+            <a:avLst/>
+          </a:prstGeom>
+          <a:noFill/>
+        </p:spPr>
+        <p:txBody>
+          <a:bodyPr wrap="square" anchor="ctr" lIns="0" rIns="0" tIns="0" bIns="0">
+            <a:noAutofit/>
+          </a:bodyPr>
+          <a:lstStyle/>
+          <a:p>
+            <a:pPr algn="l">
+              <a:lnSpc>
+                <a:spcPct val="115000"/>
+              </a:lnSpc>
+            </a:pPr>
+            <a:r>
+              <a:rPr sz="2600" b="1" i="0">
+                <a:solidFill>
+                  <a:srgbClr val="FDF8F0"/>
+                </a:solidFill>
                 <a:latin typeface="Georgia"/>
               </a:rPr>
-              <a:t>Jenny's #1 ranked offer gets BLOCKED. Cited live: California Health &amp; Safety Code §114365 — “Direct sale of home-prepared meals requires a Cottage Food Operator permit.” Source: cdph.ca.gov</a:t>
-            </a:r>
-          </a:p>
-        </p:txBody>
-      </p:sp>
-      <p:sp>
-        <p:nvSpPr>
-          <p:cNvPr id="31" name="TextBox 30"/>
-          <p:cNvSpPr txBox="1"/>
-          <p:nvPr/>
-        </p:nvSpPr>
-        <p:spPr>
-          <a:xfrm>
-            <a:off x="548640" y="6492240"/>
-            <a:ext cx="5486400" cy="274320"/>
-          </a:xfrm>
-          <a:prstGeom prst="rect">
-            <a:avLst/>
-          </a:prstGeom>
-          <a:noFill/>
-        </p:spPr>
-        <p:txBody>
-          <a:bodyPr wrap="square" anchor="t" lIns="0" rIns="0" tIns="0" bIns="0">
-            <a:spAutoFit/>
+              <a:t>4</a:t>
+            </a:r>
+          </a:p>
+        </p:txBody>
+      </p:sp>
+      <p:sp>
+        <p:nvSpPr>
+          <p:cNvPr id="39" name="TextBox 38"/>
+          <p:cNvSpPr txBox="1"/>
+          <p:nvPr/>
+        </p:nvSpPr>
+        <p:spPr>
+          <a:xfrm>
+            <a:off x="8101583" y="2862072"/>
+            <a:ext cx="1353312" cy="502920"/>
+          </a:xfrm>
+          <a:prstGeom prst="rect">
+            <a:avLst/>
+          </a:prstGeom>
+          <a:noFill/>
+        </p:spPr>
+        <p:txBody>
+          <a:bodyPr wrap="square" anchor="ctr" lIns="0" rIns="0" tIns="0" bIns="0">
+            <a:noAutofit/>
+          </a:bodyPr>
+          <a:lstStyle/>
+          <a:p>
+            <a:pPr algn="l">
+              <a:lnSpc>
+                <a:spcPct val="105000"/>
+              </a:lnSpc>
+            </a:pPr>
+            <a:r>
+              <a:rPr sz="1150" b="1" i="0">
+                <a:solidFill>
+                  <a:srgbClr val="FDF8F0"/>
+                </a:solidFill>
+                <a:latin typeface="Helvetica Neue"/>
+              </a:rPr>
+              <a:t>Launch</a:t>
+            </a:r>
+          </a:p>
+        </p:txBody>
+      </p:sp>
+      <p:sp>
+        <p:nvSpPr>
+          <p:cNvPr id="40" name="TextBox 39"/>
+          <p:cNvSpPr txBox="1"/>
+          <p:nvPr/>
+        </p:nvSpPr>
+        <p:spPr>
+          <a:xfrm>
+            <a:off x="7571231" y="3566160"/>
+            <a:ext cx="1792224" cy="1417320"/>
+          </a:xfrm>
+          <a:prstGeom prst="rect">
+            <a:avLst/>
+          </a:prstGeom>
+          <a:noFill/>
+        </p:spPr>
+        <p:txBody>
+          <a:bodyPr wrap="square" anchor="t" lIns="0" rIns="0" tIns="0" bIns="0">
+            <a:noAutofit/>
+          </a:bodyPr>
+          <a:lstStyle/>
+          <a:p>
+            <a:pPr algn="l">
+              <a:lnSpc>
+                <a:spcPct val="135000"/>
+              </a:lnSpc>
+            </a:pPr>
+            <a:r>
+              <a:rPr sz="950" b="0" i="0">
+                <a:solidFill>
+                  <a:srgbClr val="3F3F46"/>
+                </a:solidFill>
+                <a:latin typeface="Helvetica Neue"/>
+              </a:rPr>
+              <a:t>Gemini writes her offer, copy, price, target customer, and 7-day plan; publishes a real landing page.</a:t>
+            </a:r>
+          </a:p>
+        </p:txBody>
+      </p:sp>
+      <p:sp>
+        <p:nvSpPr>
+          <p:cNvPr id="41" name="Rectangle 40"/>
+          <p:cNvSpPr/>
+          <p:nvPr/>
+        </p:nvSpPr>
+        <p:spPr>
+          <a:xfrm>
+            <a:off x="7571231" y="5074920"/>
+            <a:ext cx="1792224" cy="13716"/>
+          </a:xfrm>
+          <a:prstGeom prst="rect">
+            <a:avLst/>
+          </a:prstGeom>
+          <a:solidFill>
+            <a:srgbClr val="E5E5E3"/>
+          </a:solidFill>
+          <a:ln>
+            <a:noFill/>
+          </a:ln>
+          <a:effectLst/>
+        </p:spPr>
+        <p:style>
+          <a:lnRef idx="1">
+            <a:schemeClr val="accent1"/>
+          </a:lnRef>
+          <a:fillRef idx="3">
+            <a:schemeClr val="accent1"/>
+          </a:fillRef>
+          <a:effectRef idx="2">
+            <a:schemeClr val="accent1"/>
+          </a:effectRef>
+          <a:fontRef idx="minor">
+            <a:schemeClr val="lt1"/>
+          </a:fontRef>
+        </p:style>
+        <p:txBody>
+          <a:bodyPr rtlCol="0" anchor="ctr"/>
+          <a:lstStyle/>
+          <a:p>
+            <a:pPr algn="ctr"/>
+          </a:p>
+        </p:txBody>
+      </p:sp>
+      <p:sp>
+        <p:nvSpPr>
+          <p:cNvPr id="42" name="TextBox 41"/>
+          <p:cNvSpPr txBox="1"/>
+          <p:nvPr/>
+        </p:nvSpPr>
+        <p:spPr>
+          <a:xfrm>
+            <a:off x="7571231" y="5166360"/>
+            <a:ext cx="1792224" cy="182880"/>
+          </a:xfrm>
+          <a:prstGeom prst="rect">
+            <a:avLst/>
+          </a:prstGeom>
+          <a:noFill/>
+        </p:spPr>
+        <p:txBody>
+          <a:bodyPr wrap="square" anchor="t" lIns="0" rIns="0" tIns="0" bIns="0">
+            <a:noAutofit/>
           </a:bodyPr>
           <a:lstStyle/>
           <a:p>
@@ -6139,26 +6837,678 @@
               </a:lnSpc>
             </a:pPr>
             <a:r>
+              <a:rPr sz="750" b="1" i="0" spc="150">
+                <a:solidFill>
+                  <a:srgbClr val="71717A"/>
+                </a:solidFill>
+                <a:latin typeface="Helvetica Neue"/>
+              </a:rPr>
+              <a:t>USES</a:t>
+            </a:r>
+          </a:p>
+        </p:txBody>
+      </p:sp>
+      <p:sp>
+        <p:nvSpPr>
+          <p:cNvPr id="43" name="TextBox 42"/>
+          <p:cNvSpPr txBox="1"/>
+          <p:nvPr/>
+        </p:nvSpPr>
+        <p:spPr>
+          <a:xfrm>
+            <a:off x="7571231" y="5330952"/>
+            <a:ext cx="1792224" cy="274320"/>
+          </a:xfrm>
+          <a:prstGeom prst="rect">
+            <a:avLst/>
+          </a:prstGeom>
+          <a:noFill/>
+        </p:spPr>
+        <p:txBody>
+          <a:bodyPr wrap="square" anchor="t" lIns="0" rIns="0" tIns="0" bIns="0">
+            <a:noAutofit/>
+          </a:bodyPr>
+          <a:lstStyle/>
+          <a:p>
+            <a:pPr algn="l">
+              <a:lnSpc>
+                <a:spcPct val="115000"/>
+              </a:lnSpc>
+            </a:pPr>
+            <a:r>
+              <a:rPr sz="800" b="0" i="0">
+                <a:solidFill>
+                  <a:srgbClr val="18181B"/>
+                </a:solidFill>
+                <a:latin typeface="Courier New"/>
+              </a:rPr>
+              <a:t>Gemini + Actionbook + Butterbase</a:t>
+            </a:r>
+          </a:p>
+        </p:txBody>
+      </p:sp>
+      <p:sp>
+        <p:nvSpPr>
+          <p:cNvPr id="44" name="TextBox 43"/>
+          <p:cNvSpPr txBox="1"/>
+          <p:nvPr/>
+        </p:nvSpPr>
+        <p:spPr>
+          <a:xfrm>
+            <a:off x="7571231" y="5596127"/>
+            <a:ext cx="1792224" cy="182880"/>
+          </a:xfrm>
+          <a:prstGeom prst="rect">
+            <a:avLst/>
+          </a:prstGeom>
+          <a:noFill/>
+        </p:spPr>
+        <p:txBody>
+          <a:bodyPr wrap="square" anchor="t" lIns="0" rIns="0" tIns="0" bIns="0">
+            <a:noAutofit/>
+          </a:bodyPr>
+          <a:lstStyle/>
+          <a:p>
+            <a:pPr algn="l">
+              <a:lnSpc>
+                <a:spcPct val="115000"/>
+              </a:lnSpc>
+            </a:pPr>
+            <a:r>
+              <a:rPr sz="750" b="1" i="0" spc="150">
+                <a:solidFill>
+                  <a:srgbClr val="71717A"/>
+                </a:solidFill>
+                <a:latin typeface="Helvetica Neue"/>
+              </a:rPr>
+              <a:t>OUTPUTS</a:t>
+            </a:r>
+          </a:p>
+        </p:txBody>
+      </p:sp>
+      <p:sp>
+        <p:nvSpPr>
+          <p:cNvPr id="45" name="TextBox 44"/>
+          <p:cNvSpPr txBox="1"/>
+          <p:nvPr/>
+        </p:nvSpPr>
+        <p:spPr>
+          <a:xfrm>
+            <a:off x="7571231" y="5760720"/>
+            <a:ext cx="1792224" cy="201168"/>
+          </a:xfrm>
+          <a:prstGeom prst="rect">
+            <a:avLst/>
+          </a:prstGeom>
+          <a:noFill/>
+        </p:spPr>
+        <p:txBody>
+          <a:bodyPr wrap="square" anchor="t" lIns="0" rIns="0" tIns="0" bIns="0">
+            <a:noAutofit/>
+          </a:bodyPr>
+          <a:lstStyle/>
+          <a:p>
+            <a:pPr algn="l">
+              <a:lnSpc>
+                <a:spcPct val="115000"/>
+              </a:lnSpc>
+            </a:pPr>
+            <a:r>
+              <a:rPr sz="850" b="1" i="0">
+                <a:solidFill>
+                  <a:srgbClr val="B45309"/>
+                </a:solidFill>
+                <a:latin typeface="Helvetica Neue"/>
+              </a:rPr>
+              <a:t>→ Real /launch/{slug} URL</a:t>
+            </a:r>
+          </a:p>
+        </p:txBody>
+      </p:sp>
+      <p:sp>
+        <p:nvSpPr>
+          <p:cNvPr id="46" name="Rounded Rectangle 45"/>
+          <p:cNvSpPr/>
+          <p:nvPr/>
+        </p:nvSpPr>
+        <p:spPr>
+          <a:xfrm>
+            <a:off x="9637776" y="2788920"/>
+            <a:ext cx="2157984" cy="3246120"/>
+          </a:xfrm>
+          <a:prstGeom prst="roundRect">
+            <a:avLst>
+              <a:gd name="adj" fmla="val 4000"/>
+            </a:avLst>
+          </a:prstGeom>
+          <a:solidFill>
+            <a:srgbClr val="FFFFFF"/>
+          </a:solidFill>
+          <a:ln w="9525">
+            <a:solidFill>
+              <a:srgbClr val="F4F4F3"/>
+            </a:solidFill>
+          </a:ln>
+          <a:effectLst/>
+        </p:spPr>
+        <p:style>
+          <a:lnRef idx="1">
+            <a:schemeClr val="accent1"/>
+          </a:lnRef>
+          <a:fillRef idx="3">
+            <a:schemeClr val="accent1"/>
+          </a:fillRef>
+          <a:effectRef idx="2">
+            <a:schemeClr val="accent1"/>
+          </a:effectRef>
+          <a:fontRef idx="minor">
+            <a:schemeClr val="lt1"/>
+          </a:fontRef>
+        </p:style>
+        <p:txBody>
+          <a:bodyPr rtlCol="0" anchor="ctr"/>
+          <a:lstStyle/>
+          <a:p>
+            <a:pPr algn="ctr"/>
+          </a:p>
+        </p:txBody>
+      </p:sp>
+      <p:sp>
+        <p:nvSpPr>
+          <p:cNvPr id="47" name="Rounded Rectangle 46"/>
+          <p:cNvSpPr/>
+          <p:nvPr/>
+        </p:nvSpPr>
+        <p:spPr>
+          <a:xfrm>
+            <a:off x="9637776" y="2788920"/>
+            <a:ext cx="2157984" cy="640080"/>
+          </a:xfrm>
+          <a:prstGeom prst="roundRect">
+            <a:avLst>
+              <a:gd name="adj" fmla="val 4000"/>
+            </a:avLst>
+          </a:prstGeom>
+          <a:solidFill>
+            <a:srgbClr val="B45309"/>
+          </a:solidFill>
+          <a:ln>
+            <a:noFill/>
+          </a:ln>
+          <a:effectLst/>
+        </p:spPr>
+        <p:style>
+          <a:lnRef idx="1">
+            <a:schemeClr val="accent1"/>
+          </a:lnRef>
+          <a:fillRef idx="3">
+            <a:schemeClr val="accent1"/>
+          </a:fillRef>
+          <a:effectRef idx="2">
+            <a:schemeClr val="accent1"/>
+          </a:effectRef>
+          <a:fontRef idx="minor">
+            <a:schemeClr val="lt1"/>
+          </a:fontRef>
+        </p:style>
+        <p:txBody>
+          <a:bodyPr rtlCol="0" anchor="ctr"/>
+          <a:lstStyle/>
+          <a:p>
+            <a:pPr algn="ctr"/>
+          </a:p>
+        </p:txBody>
+      </p:sp>
+      <p:sp>
+        <p:nvSpPr>
+          <p:cNvPr id="48" name="TextBox 47"/>
+          <p:cNvSpPr txBox="1"/>
+          <p:nvPr/>
+        </p:nvSpPr>
+        <p:spPr>
+          <a:xfrm>
+            <a:off x="9802367" y="2862072"/>
+            <a:ext cx="502920" cy="502920"/>
+          </a:xfrm>
+          <a:prstGeom prst="rect">
+            <a:avLst/>
+          </a:prstGeom>
+          <a:noFill/>
+        </p:spPr>
+        <p:txBody>
+          <a:bodyPr wrap="square" anchor="ctr" lIns="0" rIns="0" tIns="0" bIns="0">
+            <a:noAutofit/>
+          </a:bodyPr>
+          <a:lstStyle/>
+          <a:p>
+            <a:pPr algn="l">
+              <a:lnSpc>
+                <a:spcPct val="115000"/>
+              </a:lnSpc>
+            </a:pPr>
+            <a:r>
+              <a:rPr sz="2600" b="1" i="0">
+                <a:solidFill>
+                  <a:srgbClr val="FDF8F0"/>
+                </a:solidFill>
+                <a:latin typeface="Georgia"/>
+              </a:rPr>
+              <a:t>5</a:t>
+            </a:r>
+          </a:p>
+        </p:txBody>
+      </p:sp>
+      <p:sp>
+        <p:nvSpPr>
+          <p:cNvPr id="49" name="TextBox 48"/>
+          <p:cNvSpPr txBox="1"/>
+          <p:nvPr/>
+        </p:nvSpPr>
+        <p:spPr>
+          <a:xfrm>
+            <a:off x="10351007" y="2862072"/>
+            <a:ext cx="1353312" cy="502920"/>
+          </a:xfrm>
+          <a:prstGeom prst="rect">
+            <a:avLst/>
+          </a:prstGeom>
+          <a:noFill/>
+        </p:spPr>
+        <p:txBody>
+          <a:bodyPr wrap="square" anchor="ctr" lIns="0" rIns="0" tIns="0" bIns="0">
+            <a:noAutofit/>
+          </a:bodyPr>
+          <a:lstStyle/>
+          <a:p>
+            <a:pPr algn="l">
+              <a:lnSpc>
+                <a:spcPct val="105000"/>
+              </a:lnSpc>
+            </a:pPr>
+            <a:r>
+              <a:rPr sz="1150" b="1" i="0">
+                <a:solidFill>
+                  <a:srgbClr val="FDF8F0"/>
+                </a:solidFill>
+                <a:latin typeface="Helvetica Neue"/>
+              </a:rPr>
+              <a:t>Memory</a:t>
+            </a:r>
+          </a:p>
+        </p:txBody>
+      </p:sp>
+      <p:sp>
+        <p:nvSpPr>
+          <p:cNvPr id="50" name="TextBox 49"/>
+          <p:cNvSpPr txBox="1"/>
+          <p:nvPr/>
+        </p:nvSpPr>
+        <p:spPr>
+          <a:xfrm>
+            <a:off x="9820655" y="3566160"/>
+            <a:ext cx="1792224" cy="1417320"/>
+          </a:xfrm>
+          <a:prstGeom prst="rect">
+            <a:avLst/>
+          </a:prstGeom>
+          <a:noFill/>
+        </p:spPr>
+        <p:txBody>
+          <a:bodyPr wrap="square" anchor="t" lIns="0" rIns="0" tIns="0" bIns="0">
+            <a:noAutofit/>
+          </a:bodyPr>
+          <a:lstStyle/>
+          <a:p>
+            <a:pPr algn="l">
+              <a:lnSpc>
+                <a:spcPct val="135000"/>
+              </a:lnSpc>
+            </a:pPr>
+            <a:r>
+              <a:rPr sz="950" b="0" i="0">
+                <a:solidFill>
+                  <a:srgbClr val="3F3F46"/>
+                </a:solidFill>
+                <a:latin typeface="Helvetica Neue"/>
+              </a:rPr>
+              <a:t>Persists her run, then surfaces a cross-user pattern — “moms like you in CA pivoted to X (71% win).”</a:t>
+            </a:r>
+          </a:p>
+        </p:txBody>
+      </p:sp>
+      <p:sp>
+        <p:nvSpPr>
+          <p:cNvPr id="51" name="Rectangle 50"/>
+          <p:cNvSpPr/>
+          <p:nvPr/>
+        </p:nvSpPr>
+        <p:spPr>
+          <a:xfrm>
+            <a:off x="9820655" y="5074920"/>
+            <a:ext cx="1792224" cy="13716"/>
+          </a:xfrm>
+          <a:prstGeom prst="rect">
+            <a:avLst/>
+          </a:prstGeom>
+          <a:solidFill>
+            <a:srgbClr val="E5E5E3"/>
+          </a:solidFill>
+          <a:ln>
+            <a:noFill/>
+          </a:ln>
+          <a:effectLst/>
+        </p:spPr>
+        <p:style>
+          <a:lnRef idx="1">
+            <a:schemeClr val="accent1"/>
+          </a:lnRef>
+          <a:fillRef idx="3">
+            <a:schemeClr val="accent1"/>
+          </a:fillRef>
+          <a:effectRef idx="2">
+            <a:schemeClr val="accent1"/>
+          </a:effectRef>
+          <a:fontRef idx="minor">
+            <a:schemeClr val="lt1"/>
+          </a:fontRef>
+        </p:style>
+        <p:txBody>
+          <a:bodyPr rtlCol="0" anchor="ctr"/>
+          <a:lstStyle/>
+          <a:p>
+            <a:pPr algn="ctr"/>
+          </a:p>
+        </p:txBody>
+      </p:sp>
+      <p:sp>
+        <p:nvSpPr>
+          <p:cNvPr id="52" name="TextBox 51"/>
+          <p:cNvSpPr txBox="1"/>
+          <p:nvPr/>
+        </p:nvSpPr>
+        <p:spPr>
+          <a:xfrm>
+            <a:off x="9820655" y="5166360"/>
+            <a:ext cx="1792224" cy="182880"/>
+          </a:xfrm>
+          <a:prstGeom prst="rect">
+            <a:avLst/>
+          </a:prstGeom>
+          <a:noFill/>
+        </p:spPr>
+        <p:txBody>
+          <a:bodyPr wrap="square" anchor="t" lIns="0" rIns="0" tIns="0" bIns="0">
+            <a:noAutofit/>
+          </a:bodyPr>
+          <a:lstStyle/>
+          <a:p>
+            <a:pPr algn="l">
+              <a:lnSpc>
+                <a:spcPct val="115000"/>
+              </a:lnSpc>
+            </a:pPr>
+            <a:r>
+              <a:rPr sz="750" b="1" i="0" spc="150">
+                <a:solidFill>
+                  <a:srgbClr val="71717A"/>
+                </a:solidFill>
+                <a:latin typeface="Helvetica Neue"/>
+              </a:rPr>
+              <a:t>USES</a:t>
+            </a:r>
+          </a:p>
+        </p:txBody>
+      </p:sp>
+      <p:sp>
+        <p:nvSpPr>
+          <p:cNvPr id="53" name="TextBox 52"/>
+          <p:cNvSpPr txBox="1"/>
+          <p:nvPr/>
+        </p:nvSpPr>
+        <p:spPr>
+          <a:xfrm>
+            <a:off x="9820655" y="5330952"/>
+            <a:ext cx="1792224" cy="274320"/>
+          </a:xfrm>
+          <a:prstGeom prst="rect">
+            <a:avLst/>
+          </a:prstGeom>
+          <a:noFill/>
+        </p:spPr>
+        <p:txBody>
+          <a:bodyPr wrap="square" anchor="t" lIns="0" rIns="0" tIns="0" bIns="0">
+            <a:noAutofit/>
+          </a:bodyPr>
+          <a:lstStyle/>
+          <a:p>
+            <a:pPr algn="l">
+              <a:lnSpc>
+                <a:spcPct val="115000"/>
+              </a:lnSpc>
+            </a:pPr>
+            <a:r>
+              <a:rPr sz="800" b="0" i="0">
+                <a:solidFill>
+                  <a:srgbClr val="18181B"/>
+                </a:solidFill>
+                <a:latin typeface="Courier New"/>
+              </a:rPr>
+              <a:t>Evermind</a:t>
+            </a:r>
+          </a:p>
+        </p:txBody>
+      </p:sp>
+      <p:sp>
+        <p:nvSpPr>
+          <p:cNvPr id="54" name="TextBox 53"/>
+          <p:cNvSpPr txBox="1"/>
+          <p:nvPr/>
+        </p:nvSpPr>
+        <p:spPr>
+          <a:xfrm>
+            <a:off x="9820655" y="5596127"/>
+            <a:ext cx="1792224" cy="182880"/>
+          </a:xfrm>
+          <a:prstGeom prst="rect">
+            <a:avLst/>
+          </a:prstGeom>
+          <a:noFill/>
+        </p:spPr>
+        <p:txBody>
+          <a:bodyPr wrap="square" anchor="t" lIns="0" rIns="0" tIns="0" bIns="0">
+            <a:noAutofit/>
+          </a:bodyPr>
+          <a:lstStyle/>
+          <a:p>
+            <a:pPr algn="l">
+              <a:lnSpc>
+                <a:spcPct val="115000"/>
+              </a:lnSpc>
+            </a:pPr>
+            <a:r>
+              <a:rPr sz="750" b="1" i="0" spc="150">
+                <a:solidFill>
+                  <a:srgbClr val="71717A"/>
+                </a:solidFill>
+                <a:latin typeface="Helvetica Neue"/>
+              </a:rPr>
+              <a:t>OUTPUTS</a:t>
+            </a:r>
+          </a:p>
+        </p:txBody>
+      </p:sp>
+      <p:sp>
+        <p:nvSpPr>
+          <p:cNvPr id="55" name="TextBox 54"/>
+          <p:cNvSpPr txBox="1"/>
+          <p:nvPr/>
+        </p:nvSpPr>
+        <p:spPr>
+          <a:xfrm>
+            <a:off x="9820655" y="5760720"/>
+            <a:ext cx="1792224" cy="201168"/>
+          </a:xfrm>
+          <a:prstGeom prst="rect">
+            <a:avLst/>
+          </a:prstGeom>
+          <a:noFill/>
+        </p:spPr>
+        <p:txBody>
+          <a:bodyPr wrap="square" anchor="t" lIns="0" rIns="0" tIns="0" bIns="0">
+            <a:noAutofit/>
+          </a:bodyPr>
+          <a:lstStyle/>
+          <a:p>
+            <a:pPr algn="l">
+              <a:lnSpc>
+                <a:spcPct val="115000"/>
+              </a:lnSpc>
+            </a:pPr>
+            <a:r>
+              <a:rPr sz="850" b="1" i="0">
+                <a:solidFill>
+                  <a:srgbClr val="B45309"/>
+                </a:solidFill>
+                <a:latin typeface="Helvetica Neue"/>
+              </a:rPr>
+              <a:t>→ Persisted run + pattern</a:t>
+            </a:r>
+          </a:p>
+        </p:txBody>
+      </p:sp>
+      <p:sp>
+        <p:nvSpPr>
+          <p:cNvPr id="56" name="Rounded Rectangle 55"/>
+          <p:cNvSpPr/>
+          <p:nvPr/>
+        </p:nvSpPr>
+        <p:spPr>
+          <a:xfrm>
+            <a:off x="640080" y="6199632"/>
+            <a:ext cx="10927080" cy="292608"/>
+          </a:xfrm>
+          <a:prstGeom prst="roundRect">
+            <a:avLst>
+              <a:gd name="adj" fmla="val 12000"/>
+            </a:avLst>
+          </a:prstGeom>
+          <a:solidFill>
+            <a:srgbClr val="09090B"/>
+          </a:solidFill>
+          <a:ln>
+            <a:noFill/>
+          </a:ln>
+          <a:effectLst/>
+        </p:spPr>
+        <p:style>
+          <a:lnRef idx="1">
+            <a:schemeClr val="accent1"/>
+          </a:lnRef>
+          <a:fillRef idx="3">
+            <a:schemeClr val="accent1"/>
+          </a:fillRef>
+          <a:effectRef idx="2">
+            <a:schemeClr val="accent1"/>
+          </a:effectRef>
+          <a:fontRef idx="minor">
+            <a:schemeClr val="lt1"/>
+          </a:fontRef>
+        </p:style>
+        <p:txBody>
+          <a:bodyPr rtlCol="0" anchor="ctr"/>
+          <a:lstStyle/>
+          <a:p>
+            <a:pPr algn="ctr"/>
+          </a:p>
+        </p:txBody>
+      </p:sp>
+      <p:sp>
+        <p:nvSpPr>
+          <p:cNvPr id="57" name="TextBox 56"/>
+          <p:cNvSpPr txBox="1"/>
+          <p:nvPr/>
+        </p:nvSpPr>
+        <p:spPr>
+          <a:xfrm>
+            <a:off x="640080" y="6208776"/>
+            <a:ext cx="10927080" cy="274320"/>
+          </a:xfrm>
+          <a:prstGeom prst="rect">
+            <a:avLst/>
+          </a:prstGeom>
+          <a:noFill/>
+        </p:spPr>
+        <p:txBody>
+          <a:bodyPr wrap="square" anchor="ctr" lIns="0" rIns="0" tIns="0" bIns="0">
+            <a:noAutofit/>
+          </a:bodyPr>
+          <a:lstStyle/>
+          <a:p>
+            <a:pPr algn="ctr">
+              <a:lnSpc>
+                <a:spcPct val="115000"/>
+              </a:lnSpc>
+            </a:pPr>
+            <a:r>
+              <a:rPr sz="950" b="0" i="0">
+                <a:solidFill>
+                  <a:srgbClr val="FDF8F0"/>
+                </a:solidFill>
+                <a:latin typeface="Courier New"/>
+              </a:rPr>
+              <a:t>Live at  localhost:5173/run/jenny  ·  38 seconds end-to-end  ·  every step streams to the UI via SSE</a:t>
+            </a:r>
+          </a:p>
+        </p:txBody>
+      </p:sp>
+      <p:sp>
+        <p:nvSpPr>
+          <p:cNvPr id="58" name="TextBox 57"/>
+          <p:cNvSpPr txBox="1"/>
+          <p:nvPr/>
+        </p:nvSpPr>
+        <p:spPr>
+          <a:xfrm>
+            <a:off x="548640" y="6537960"/>
+            <a:ext cx="7315200" cy="274320"/>
+          </a:xfrm>
+          <a:prstGeom prst="rect">
+            <a:avLst/>
+          </a:prstGeom>
+          <a:noFill/>
+        </p:spPr>
+        <p:txBody>
+          <a:bodyPr wrap="square" anchor="t" lIns="0" rIns="0" tIns="0" bIns="0">
+            <a:noAutofit/>
+          </a:bodyPr>
+          <a:lstStyle/>
+          <a:p>
+            <a:pPr algn="l">
+              <a:lnSpc>
+                <a:spcPct val="115000"/>
+              </a:lnSpc>
+            </a:pPr>
+            <a:r>
               <a:rPr sz="900" b="0" i="0">
                 <a:solidFill>
                   <a:srgbClr val="71717A"/>
                 </a:solidFill>
                 <a:latin typeface="Helvetica Neue"/>
               </a:rPr>
-              <a:t>🌸  Mom's Saheli  ·  Agent Forge AI Hackathon  ·  May 16 2026</a:t>
-            </a:r>
-          </a:p>
-        </p:txBody>
-      </p:sp>
-      <p:sp>
-        <p:nvSpPr>
-          <p:cNvPr id="32" name="TextBox 31"/>
-          <p:cNvSpPr txBox="1"/>
-          <p:nvPr/>
-        </p:nvSpPr>
-        <p:spPr>
-          <a:xfrm>
-            <a:off x="10972800" y="6492240"/>
+              <a:t>Mom's Saheli  ·  Agent Forge AI Hackathon  ·  San Francisco  ·  May 16 2026</a:t>
+            </a:r>
+          </a:p>
+        </p:txBody>
+      </p:sp>
+      <p:sp>
+        <p:nvSpPr>
+          <p:cNvPr id="59" name="TextBox 58"/>
+          <p:cNvSpPr txBox="1"/>
+          <p:nvPr/>
+        </p:nvSpPr>
+        <p:spPr>
+          <a:xfrm>
+            <a:off x="10972800" y="6537960"/>
             <a:ext cx="914400" cy="274320"/>
           </a:xfrm>
           <a:prstGeom prst="rect">
@@ -6168,7 +7518,7 @@
         </p:spPr>
         <p:txBody>
           <a:bodyPr wrap="square" anchor="t" lIns="0" rIns="0" tIns="0" bIns="0">
-            <a:spAutoFit/>
+            <a:noAutofit/>
           </a:bodyPr>
           <a:lstStyle/>
           <a:p>
@@ -6260,16 +7610,16 @@
         <p:spPr>
           <a:xfrm>
             <a:off x="640080" y="548640"/>
-            <a:ext cx="9144000" cy="274320"/>
-          </a:xfrm>
-          <a:prstGeom prst="rect">
-            <a:avLst/>
-          </a:prstGeom>
-          <a:noFill/>
-        </p:spPr>
-        <p:txBody>
-          <a:bodyPr wrap="square" anchor="t" lIns="0" rIns="0" tIns="0" bIns="0">
-            <a:spAutoFit/>
+            <a:ext cx="10972800" cy="274320"/>
+          </a:xfrm>
+          <a:prstGeom prst="rect">
+            <a:avLst/>
+          </a:prstGeom>
+          <a:noFill/>
+        </p:spPr>
+        <p:txBody>
+          <a:bodyPr wrap="square" anchor="t" lIns="0" rIns="0" tIns="0" bIns="0">
+            <a:noAutofit/>
           </a:bodyPr>
           <a:lstStyle/>
           <a:p>
@@ -6298,7 +7648,7 @@
         </p:nvSpPr>
         <p:spPr>
           <a:xfrm>
-            <a:off x="640080" y="960120"/>
+            <a:off x="640080" y="914400"/>
             <a:ext cx="10972800" cy="1280160"/>
           </a:xfrm>
           <a:prstGeom prst="rect">
@@ -6308,7 +7658,7 @@
         </p:spPr>
         <p:txBody>
           <a:bodyPr wrap="square" anchor="t" lIns="0" rIns="0" tIns="0" bIns="0">
-            <a:spAutoFit/>
+            <a:noAutofit/>
           </a:bodyPr>
           <a:lstStyle/>
           <a:p>
@@ -6340,6 +7690,15 @@
                 </a:solidFill>
                 <a:latin typeface="Georgia"/>
               </a:rPr>
+              <a:t/>
+            </a:r>
+            <a:r>
+              <a:rPr sz="3600" b="1" i="1">
+                <a:solidFill>
+                  <a:srgbClr val="B45309"/>
+                </a:solidFill>
+                <a:latin typeface="Georgia"/>
+              </a:rPr>
               <a:t>Completely different output.</a:t>
             </a:r>
           </a:p>
@@ -6347,14 +7706,53 @@
       </p:sp>
       <p:sp>
         <p:nvSpPr>
-          <p:cNvPr id="5" name="Rounded Rectangle 4"/>
+          <p:cNvPr id="5" name="TextBox 4"/>
+          <p:cNvSpPr txBox="1"/>
+          <p:nvPr/>
+        </p:nvSpPr>
+        <p:spPr>
+          <a:xfrm>
+            <a:off x="640080" y="2606040"/>
+            <a:ext cx="10972800" cy="411480"/>
+          </a:xfrm>
+          <a:prstGeom prst="rect">
+            <a:avLst/>
+          </a:prstGeom>
+          <a:noFill/>
+        </p:spPr>
+        <p:txBody>
+          <a:bodyPr wrap="square" anchor="t" lIns="0" rIns="0" tIns="0" bIns="0">
+            <a:noAutofit/>
+          </a:bodyPr>
+          <a:lstStyle/>
+          <a:p>
+            <a:pPr algn="l">
+              <a:lnSpc>
+                <a:spcPct val="140000"/>
+              </a:lnSpc>
+            </a:pPr>
+            <a:r>
+              <a:rPr sz="1200" b="0" i="1">
+                <a:solidFill>
+                  <a:srgbClr val="71717A"/>
+                </a:solidFill>
+                <a:latin typeface="Helvetica Neue"/>
+              </a:rPr>
+              <a:t>Click Run Jenny or Run Jessica. Same 5 agents. Different state, different skills, different gap. The system produces different launches — because it's actually reasoning, not retrieving canned demos.</a:t>
+            </a:r>
+          </a:p>
+        </p:txBody>
+      </p:sp>
+      <p:sp>
+        <p:nvSpPr>
+          <p:cNvPr id="6" name="Rounded Rectangle 5"/>
           <p:cNvSpPr/>
           <p:nvPr/>
         </p:nvSpPr>
         <p:spPr>
           <a:xfrm>
-            <a:off x="640080" y="2926080"/>
-            <a:ext cx="5623559" cy="3154680"/>
+            <a:off x="640080" y="3291840"/>
+            <a:ext cx="5623559" cy="2880360"/>
           </a:xfrm>
           <a:prstGeom prst="roundRect">
             <a:avLst>
@@ -6395,13 +7793,13 @@
       </p:sp>
       <p:sp>
         <p:nvSpPr>
-          <p:cNvPr id="6" name="Rounded Rectangle 5"/>
+          <p:cNvPr id="7" name="Rounded Rectangle 6"/>
           <p:cNvSpPr/>
           <p:nvPr/>
         </p:nvSpPr>
         <p:spPr>
           <a:xfrm>
-            <a:off x="640080" y="2926080"/>
+            <a:off x="640080" y="3291840"/>
             <a:ext cx="5623559" cy="777240"/>
           </a:xfrm>
           <a:prstGeom prst="roundRect">
@@ -6441,13 +7839,13 @@
       </p:sp>
       <p:sp>
         <p:nvSpPr>
-          <p:cNvPr id="7" name="TextBox 6"/>
-          <p:cNvSpPr txBox="1"/>
-          <p:nvPr/>
-        </p:nvSpPr>
-        <p:spPr>
-          <a:xfrm>
-            <a:off x="868680" y="3090672"/>
+          <p:cNvPr id="8" name="TextBox 7"/>
+          <p:cNvSpPr txBox="1"/>
+          <p:nvPr/>
+        </p:nvSpPr>
+        <p:spPr>
+          <a:xfrm>
+            <a:off x="868680" y="3456432"/>
             <a:ext cx="914400" cy="457200"/>
           </a:xfrm>
           <a:prstGeom prst="rect">
@@ -6457,7 +7855,7 @@
         </p:spPr>
         <p:txBody>
           <a:bodyPr wrap="square" anchor="t" lIns="0" rIns="0" tIns="0" bIns="0">
-            <a:spAutoFit/>
+            <a:noAutofit/>
           </a:bodyPr>
           <a:lstStyle/>
           <a:p>
@@ -6480,13 +7878,13 @@
       </p:sp>
       <p:sp>
         <p:nvSpPr>
-          <p:cNvPr id="8" name="TextBox 7"/>
-          <p:cNvSpPr txBox="1"/>
-          <p:nvPr/>
-        </p:nvSpPr>
-        <p:spPr>
-          <a:xfrm>
-            <a:off x="1645920" y="3090672"/>
+          <p:cNvPr id="9" name="TextBox 8"/>
+          <p:cNvSpPr txBox="1"/>
+          <p:nvPr/>
+        </p:nvSpPr>
+        <p:spPr>
+          <a:xfrm>
+            <a:off x="1645920" y="3456432"/>
             <a:ext cx="4526279" cy="320040"/>
           </a:xfrm>
           <a:prstGeom prst="rect">
@@ -6496,7 +7894,7 @@
         </p:spPr>
         <p:txBody>
           <a:bodyPr wrap="square" anchor="t" lIns="0" rIns="0" tIns="0" bIns="0">
-            <a:spAutoFit/>
+            <a:noAutofit/>
           </a:bodyPr>
           <a:lstStyle/>
           <a:p>
@@ -6519,13 +7917,13 @@
       </p:sp>
       <p:sp>
         <p:nvSpPr>
-          <p:cNvPr id="9" name="TextBox 8"/>
-          <p:cNvSpPr txBox="1"/>
-          <p:nvPr/>
-        </p:nvSpPr>
-        <p:spPr>
-          <a:xfrm>
-            <a:off x="1645920" y="3383280"/>
+          <p:cNvPr id="10" name="TextBox 9"/>
+          <p:cNvSpPr txBox="1"/>
+          <p:nvPr/>
+        </p:nvSpPr>
+        <p:spPr>
+          <a:xfrm>
+            <a:off x="1645920" y="3749039"/>
             <a:ext cx="4526279" cy="274320"/>
           </a:xfrm>
           <a:prstGeom prst="rect">
@@ -6535,7 +7933,7 @@
         </p:spPr>
         <p:txBody>
           <a:bodyPr wrap="square" anchor="t" lIns="0" rIns="0" tIns="0" bIns="0">
-            <a:spAutoFit/>
+            <a:noAutofit/>
           </a:bodyPr>
           <a:lstStyle/>
           <a:p>
@@ -6558,23 +7956,23 @@
       </p:sp>
       <p:sp>
         <p:nvSpPr>
-          <p:cNvPr id="10" name="TextBox 9"/>
-          <p:cNvSpPr txBox="1"/>
-          <p:nvPr/>
-        </p:nvSpPr>
-        <p:spPr>
-          <a:xfrm>
-            <a:off x="914400" y="3886200"/>
-            <a:ext cx="274320" cy="365760"/>
-          </a:xfrm>
-          <a:prstGeom prst="rect">
-            <a:avLst/>
-          </a:prstGeom>
-          <a:noFill/>
-        </p:spPr>
-        <p:txBody>
-          <a:bodyPr wrap="square" anchor="t" lIns="0" rIns="0" tIns="0" bIns="0">
-            <a:spAutoFit/>
+          <p:cNvPr id="11" name="TextBox 10"/>
+          <p:cNvSpPr txBox="1"/>
+          <p:nvPr/>
+        </p:nvSpPr>
+        <p:spPr>
+          <a:xfrm>
+            <a:off x="914400" y="4251960"/>
+            <a:ext cx="274320" cy="320040"/>
+          </a:xfrm>
+          <a:prstGeom prst="rect">
+            <a:avLst/>
+          </a:prstGeom>
+          <a:noFill/>
+        </p:spPr>
+        <p:txBody>
+          <a:bodyPr wrap="square" anchor="t" lIns="0" rIns="0" tIns="0" bIns="0">
+            <a:noAutofit/>
           </a:bodyPr>
           <a:lstStyle/>
           <a:p>
@@ -6584,7 +7982,7 @@
               </a:lnSpc>
             </a:pPr>
             <a:r>
-              <a:rPr sz="1200" b="0" i="0">
+              <a:rPr sz="1100" b="0" i="0">
                 <a:solidFill>
                   <a:srgbClr val="18181B"/>
                 </a:solidFill>
@@ -6597,62 +7995,62 @@
       </p:sp>
       <p:sp>
         <p:nvSpPr>
-          <p:cNvPr id="11" name="TextBox 10"/>
-          <p:cNvSpPr txBox="1"/>
-          <p:nvPr/>
-        </p:nvSpPr>
-        <p:spPr>
-          <a:xfrm>
-            <a:off x="1234440" y="3886200"/>
-            <a:ext cx="4846320" cy="365760"/>
-          </a:xfrm>
-          <a:prstGeom prst="rect">
-            <a:avLst/>
-          </a:prstGeom>
-          <a:noFill/>
-        </p:spPr>
-        <p:txBody>
-          <a:bodyPr wrap="square" anchor="t" lIns="0" rIns="0" tIns="0" bIns="0">
-            <a:spAutoFit/>
-          </a:bodyPr>
-          <a:lstStyle/>
-          <a:p>
-            <a:pPr algn="l">
-              <a:lnSpc>
-                <a:spcPct val="120000"/>
-              </a:lnSpc>
-            </a:pPr>
-            <a:r>
-              <a:rPr sz="1050" b="0" i="0">
+          <p:cNvPr id="12" name="TextBox 11"/>
+          <p:cNvSpPr txBox="1"/>
+          <p:nvPr/>
+        </p:nvSpPr>
+        <p:spPr>
+          <a:xfrm>
+            <a:off x="1234440" y="4251960"/>
+            <a:ext cx="4846320" cy="329184"/>
+          </a:xfrm>
+          <a:prstGeom prst="rect">
+            <a:avLst/>
+          </a:prstGeom>
+          <a:noFill/>
+        </p:spPr>
+        <p:txBody>
+          <a:bodyPr wrap="square" anchor="t" lIns="0" rIns="0" tIns="0" bIns="0">
+            <a:noAutofit/>
+          </a:bodyPr>
+          <a:lstStyle/>
+          <a:p>
+            <a:pPr algn="l">
+              <a:lnSpc>
+                <a:spcPct val="125000"/>
+              </a:lnSpc>
+            </a:pPr>
+            <a:r>
+              <a:rPr sz="1000" b="0" i="0">
                 <a:solidFill>
                   <a:srgbClr val="3F3F46"/>
                 </a:solidFill>
                 <a:latin typeface="Helvetica Neue"/>
               </a:rPr>
-              <a:t>Top opp: weekend tiffin / meal-pack subscription</a:t>
-            </a:r>
-          </a:p>
-        </p:txBody>
-      </p:sp>
-      <p:sp>
-        <p:nvSpPr>
-          <p:cNvPr id="12" name="TextBox 11"/>
-          <p:cNvSpPr txBox="1"/>
-          <p:nvPr/>
-        </p:nvSpPr>
-        <p:spPr>
-          <a:xfrm>
-            <a:off x="914400" y="4297680"/>
-            <a:ext cx="274320" cy="365760"/>
-          </a:xfrm>
-          <a:prstGeom prst="rect">
-            <a:avLst/>
-          </a:prstGeom>
-          <a:noFill/>
-        </p:spPr>
-        <p:txBody>
-          <a:bodyPr wrap="square" anchor="t" lIns="0" rIns="0" tIns="0" bIns="0">
-            <a:spAutoFit/>
+              <a:t>Top opp: weekend tiffin / meal-pack subscription ($720/mo)</a:t>
+            </a:r>
+          </a:p>
+        </p:txBody>
+      </p:sp>
+      <p:sp>
+        <p:nvSpPr>
+          <p:cNvPr id="13" name="TextBox 12"/>
+          <p:cNvSpPr txBox="1"/>
+          <p:nvPr/>
+        </p:nvSpPr>
+        <p:spPr>
+          <a:xfrm>
+            <a:off x="914400" y="4617720"/>
+            <a:ext cx="274320" cy="320040"/>
+          </a:xfrm>
+          <a:prstGeom prst="rect">
+            <a:avLst/>
+          </a:prstGeom>
+          <a:noFill/>
+        </p:spPr>
+        <p:txBody>
+          <a:bodyPr wrap="square" anchor="t" lIns="0" rIns="0" tIns="0" bIns="0">
+            <a:noAutofit/>
           </a:bodyPr>
           <a:lstStyle/>
           <a:p>
@@ -6662,7 +8060,7 @@
               </a:lnSpc>
             </a:pPr>
             <a:r>
-              <a:rPr sz="1200" b="0" i="0">
+              <a:rPr sz="1100" b="0" i="0">
                 <a:solidFill>
                   <a:srgbClr val="18181B"/>
                 </a:solidFill>
@@ -6675,62 +8073,62 @@
       </p:sp>
       <p:sp>
         <p:nvSpPr>
-          <p:cNvPr id="13" name="TextBox 12"/>
-          <p:cNvSpPr txBox="1"/>
-          <p:nvPr/>
-        </p:nvSpPr>
-        <p:spPr>
-          <a:xfrm>
-            <a:off x="1234440" y="4297680"/>
-            <a:ext cx="4846320" cy="365760"/>
-          </a:xfrm>
-          <a:prstGeom prst="rect">
-            <a:avLst/>
-          </a:prstGeom>
-          <a:noFill/>
-        </p:spPr>
-        <p:txBody>
-          <a:bodyPr wrap="square" anchor="t" lIns="0" rIns="0" tIns="0" bIns="0">
-            <a:spAutoFit/>
-          </a:bodyPr>
-          <a:lstStyle/>
-          <a:p>
-            <a:pPr algn="l">
-              <a:lnSpc>
-                <a:spcPct val="120000"/>
-              </a:lnSpc>
-            </a:pPr>
-            <a:r>
-              <a:rPr sz="1050" b="0" i="0">
+          <p:cNvPr id="14" name="TextBox 13"/>
+          <p:cNvSpPr txBox="1"/>
+          <p:nvPr/>
+        </p:nvSpPr>
+        <p:spPr>
+          <a:xfrm>
+            <a:off x="1234440" y="4617720"/>
+            <a:ext cx="4846320" cy="329184"/>
+          </a:xfrm>
+          <a:prstGeom prst="rect">
+            <a:avLst/>
+          </a:prstGeom>
+          <a:noFill/>
+        </p:spPr>
+        <p:txBody>
+          <a:bodyPr wrap="square" anchor="t" lIns="0" rIns="0" tIns="0" bIns="0">
+            <a:noAutofit/>
+          </a:bodyPr>
+          <a:lstStyle/>
+          <a:p>
+            <a:pPr algn="l">
+              <a:lnSpc>
+                <a:spcPct val="125000"/>
+              </a:lnSpc>
+            </a:pPr>
+            <a:r>
+              <a:rPr sz="1000" b="0" i="0">
                 <a:solidFill>
                   <a:srgbClr val="3F3F46"/>
                 </a:solidFill>
                 <a:latin typeface="Helvetica Neue"/>
               </a:rPr>
-              <a:t>BLOCKED: CA Health &amp; Safety §114365 (cottage food)</a:t>
-            </a:r>
-          </a:p>
-        </p:txBody>
-      </p:sp>
-      <p:sp>
-        <p:nvSpPr>
-          <p:cNvPr id="14" name="TextBox 13"/>
-          <p:cNvSpPr txBox="1"/>
-          <p:nvPr/>
-        </p:nvSpPr>
-        <p:spPr>
-          <a:xfrm>
-            <a:off x="914400" y="4709160"/>
-            <a:ext cx="274320" cy="365760"/>
-          </a:xfrm>
-          <a:prstGeom prst="rect">
-            <a:avLst/>
-          </a:prstGeom>
-          <a:noFill/>
-        </p:spPr>
-        <p:txBody>
-          <a:bodyPr wrap="square" anchor="t" lIns="0" rIns="0" tIns="0" bIns="0">
-            <a:spAutoFit/>
+              <a:t>BLOCKED: CA Health &amp; Safety §114365 (no cottage-food)</a:t>
+            </a:r>
+          </a:p>
+        </p:txBody>
+      </p:sp>
+      <p:sp>
+        <p:nvSpPr>
+          <p:cNvPr id="15" name="TextBox 14"/>
+          <p:cNvSpPr txBox="1"/>
+          <p:nvPr/>
+        </p:nvSpPr>
+        <p:spPr>
+          <a:xfrm>
+            <a:off x="914400" y="4983480"/>
+            <a:ext cx="274320" cy="320040"/>
+          </a:xfrm>
+          <a:prstGeom prst="rect">
+            <a:avLst/>
+          </a:prstGeom>
+          <a:noFill/>
+        </p:spPr>
+        <p:txBody>
+          <a:bodyPr wrap="square" anchor="t" lIns="0" rIns="0" tIns="0" bIns="0">
+            <a:noAutofit/>
           </a:bodyPr>
           <a:lstStyle/>
           <a:p>
@@ -6740,7 +8138,7 @@
               </a:lnSpc>
             </a:pPr>
             <a:r>
-              <a:rPr sz="1200" b="0" i="0">
+              <a:rPr sz="1100" b="0" i="0">
                 <a:solidFill>
                   <a:srgbClr val="18181B"/>
                 </a:solidFill>
@@ -6753,62 +8151,62 @@
       </p:sp>
       <p:sp>
         <p:nvSpPr>
-          <p:cNvPr id="15" name="TextBox 14"/>
-          <p:cNvSpPr txBox="1"/>
-          <p:nvPr/>
-        </p:nvSpPr>
-        <p:spPr>
-          <a:xfrm>
-            <a:off x="1234440" y="4709160"/>
-            <a:ext cx="4846320" cy="365760"/>
-          </a:xfrm>
-          <a:prstGeom prst="rect">
-            <a:avLst/>
-          </a:prstGeom>
-          <a:noFill/>
-        </p:spPr>
-        <p:txBody>
-          <a:bodyPr wrap="square" anchor="t" lIns="0" rIns="0" tIns="0" bIns="0">
-            <a:spAutoFit/>
-          </a:bodyPr>
-          <a:lstStyle/>
-          <a:p>
-            <a:pPr algn="l">
-              <a:lnSpc>
-                <a:spcPct val="120000"/>
-              </a:lnSpc>
-            </a:pPr>
-            <a:r>
-              <a:rPr sz="1050" b="0" i="0">
+          <p:cNvPr id="16" name="TextBox 15"/>
+          <p:cNvSpPr txBox="1"/>
+          <p:nvPr/>
+        </p:nvSpPr>
+        <p:spPr>
+          <a:xfrm>
+            <a:off x="1234440" y="4983480"/>
+            <a:ext cx="4846320" cy="329184"/>
+          </a:xfrm>
+          <a:prstGeom prst="rect">
+            <a:avLst/>
+          </a:prstGeom>
+          <a:noFill/>
+        </p:spPr>
+        <p:txBody>
+          <a:bodyPr wrap="square" anchor="t" lIns="0" rIns="0" tIns="0" bIns="0">
+            <a:noAutofit/>
+          </a:bodyPr>
+          <a:lstStyle/>
+          <a:p>
+            <a:pPr algn="l">
+              <a:lnSpc>
+                <a:spcPct val="125000"/>
+              </a:lnSpc>
+            </a:pPr>
+            <a:r>
+              <a:rPr sz="1000" b="0" i="0">
                 <a:solidFill>
                   <a:srgbClr val="3F3F46"/>
                 </a:solidFill>
                 <a:latin typeface="Helvetica Neue"/>
               </a:rPr>
-              <a:t>Pivots to a legal #2: home-cooked freezer kits at the farmers' market</a:t>
-            </a:r>
-          </a:p>
-        </p:txBody>
-      </p:sp>
-      <p:sp>
-        <p:nvSpPr>
-          <p:cNvPr id="16" name="TextBox 15"/>
-          <p:cNvSpPr txBox="1"/>
-          <p:nvPr/>
-        </p:nvSpPr>
-        <p:spPr>
-          <a:xfrm>
-            <a:off x="914400" y="5120640"/>
-            <a:ext cx="274320" cy="365760"/>
-          </a:xfrm>
-          <a:prstGeom prst="rect">
-            <a:avLst/>
-          </a:prstGeom>
-          <a:noFill/>
-        </p:spPr>
-        <p:txBody>
-          <a:bodyPr wrap="square" anchor="t" lIns="0" rIns="0" tIns="0" bIns="0">
-            <a:spAutoFit/>
+              <a:t>Pivots to #2: Sunday freezer-meal drops at farmers' market</a:t>
+            </a:r>
+          </a:p>
+        </p:txBody>
+      </p:sp>
+      <p:sp>
+        <p:nvSpPr>
+          <p:cNvPr id="17" name="TextBox 16"/>
+          <p:cNvSpPr txBox="1"/>
+          <p:nvPr/>
+        </p:nvSpPr>
+        <p:spPr>
+          <a:xfrm>
+            <a:off x="914400" y="5349240"/>
+            <a:ext cx="274320" cy="320040"/>
+          </a:xfrm>
+          <a:prstGeom prst="rect">
+            <a:avLst/>
+          </a:prstGeom>
+          <a:noFill/>
+        </p:spPr>
+        <p:txBody>
+          <a:bodyPr wrap="square" anchor="t" lIns="0" rIns="0" tIns="0" bIns="0">
+            <a:noAutofit/>
           </a:bodyPr>
           <a:lstStyle/>
           <a:p>
@@ -6818,7 +8216,7 @@
               </a:lnSpc>
             </a:pPr>
             <a:r>
-              <a:rPr sz="1200" b="0" i="0">
+              <a:rPr sz="1100" b="0" i="0">
                 <a:solidFill>
                   <a:srgbClr val="18181B"/>
                 </a:solidFill>
@@ -6831,62 +8229,62 @@
       </p:sp>
       <p:sp>
         <p:nvSpPr>
-          <p:cNvPr id="17" name="TextBox 16"/>
-          <p:cNvSpPr txBox="1"/>
-          <p:nvPr/>
-        </p:nvSpPr>
-        <p:spPr>
-          <a:xfrm>
-            <a:off x="1234440" y="5120640"/>
-            <a:ext cx="4846320" cy="365760"/>
-          </a:xfrm>
-          <a:prstGeom prst="rect">
-            <a:avLst/>
-          </a:prstGeom>
-          <a:noFill/>
-        </p:spPr>
-        <p:txBody>
-          <a:bodyPr wrap="square" anchor="t" lIns="0" rIns="0" tIns="0" bIns="0">
-            <a:spAutoFit/>
-          </a:bodyPr>
-          <a:lstStyle/>
-          <a:p>
-            <a:pPr algn="l">
-              <a:lnSpc>
-                <a:spcPct val="120000"/>
-              </a:lnSpc>
-            </a:pPr>
-            <a:r>
-              <a:rPr sz="1050" b="0" i="0">
+          <p:cNvPr id="18" name="TextBox 17"/>
+          <p:cNvSpPr txBox="1"/>
+          <p:nvPr/>
+        </p:nvSpPr>
+        <p:spPr>
+          <a:xfrm>
+            <a:off x="1234440" y="5349240"/>
+            <a:ext cx="4846320" cy="329184"/>
+          </a:xfrm>
+          <a:prstGeom prst="rect">
+            <a:avLst/>
+          </a:prstGeom>
+          <a:noFill/>
+        </p:spPr>
+        <p:txBody>
+          <a:bodyPr wrap="square" anchor="t" lIns="0" rIns="0" tIns="0" bIns="0">
+            <a:noAutofit/>
+          </a:bodyPr>
+          <a:lstStyle/>
+          <a:p>
+            <a:pPr algn="l">
+              <a:lnSpc>
+                <a:spcPct val="125000"/>
+              </a:lnSpc>
+            </a:pPr>
+            <a:r>
+              <a:rPr sz="1000" b="0" i="0">
                 <a:solidFill>
                   <a:srgbClr val="3F3F46"/>
                 </a:solidFill>
                 <a:latin typeface="Helvetica Neue"/>
               </a:rPr>
-              <a:t>Real launch page published at /launch/jenny-…</a:t>
-            </a:r>
-          </a:p>
-        </p:txBody>
-      </p:sp>
-      <p:sp>
-        <p:nvSpPr>
-          <p:cNvPr id="18" name="TextBox 17"/>
-          <p:cNvSpPr txBox="1"/>
-          <p:nvPr/>
-        </p:nvSpPr>
-        <p:spPr>
-          <a:xfrm>
-            <a:off x="914400" y="5532120"/>
-            <a:ext cx="274320" cy="365760"/>
-          </a:xfrm>
-          <a:prstGeom prst="rect">
-            <a:avLst/>
-          </a:prstGeom>
-          <a:noFill/>
-        </p:spPr>
-        <p:txBody>
-          <a:bodyPr wrap="square" anchor="t" lIns="0" rIns="0" tIns="0" bIns="0">
-            <a:spAutoFit/>
+              <a:t>Real launch page published at /launch/jenny-tiffin-fix</a:t>
+            </a:r>
+          </a:p>
+        </p:txBody>
+      </p:sp>
+      <p:sp>
+        <p:nvSpPr>
+          <p:cNvPr id="19" name="TextBox 18"/>
+          <p:cNvSpPr txBox="1"/>
+          <p:nvPr/>
+        </p:nvSpPr>
+        <p:spPr>
+          <a:xfrm>
+            <a:off x="914400" y="5715000"/>
+            <a:ext cx="274320" cy="320040"/>
+          </a:xfrm>
+          <a:prstGeom prst="rect">
+            <a:avLst/>
+          </a:prstGeom>
+          <a:noFill/>
+        </p:spPr>
+        <p:txBody>
+          <a:bodyPr wrap="square" anchor="t" lIns="0" rIns="0" tIns="0" bIns="0">
+            <a:noAutofit/>
           </a:bodyPr>
           <a:lstStyle/>
           <a:p>
@@ -6896,7 +8294,7 @@
               </a:lnSpc>
             </a:pPr>
             <a:r>
-              <a:rPr sz="1200" b="0" i="0">
+              <a:rPr sz="1100" b="0" i="0">
                 <a:solidFill>
                   <a:srgbClr val="18181B"/>
                 </a:solidFill>
@@ -6909,53 +8307,53 @@
       </p:sp>
       <p:sp>
         <p:nvSpPr>
-          <p:cNvPr id="19" name="TextBox 18"/>
-          <p:cNvSpPr txBox="1"/>
-          <p:nvPr/>
-        </p:nvSpPr>
-        <p:spPr>
-          <a:xfrm>
-            <a:off x="1234440" y="5532120"/>
-            <a:ext cx="4846320" cy="365760"/>
-          </a:xfrm>
-          <a:prstGeom prst="rect">
-            <a:avLst/>
-          </a:prstGeom>
-          <a:noFill/>
-        </p:spPr>
-        <p:txBody>
-          <a:bodyPr wrap="square" anchor="t" lIns="0" rIns="0" tIns="0" bIns="0">
-            <a:spAutoFit/>
-          </a:bodyPr>
-          <a:lstStyle/>
-          <a:p>
-            <a:pPr algn="l">
-              <a:lnSpc>
-                <a:spcPct val="120000"/>
-              </a:lnSpc>
-            </a:pPr>
-            <a:r>
-              <a:rPr sz="1050" b="0" i="0">
+          <p:cNvPr id="20" name="TextBox 19"/>
+          <p:cNvSpPr txBox="1"/>
+          <p:nvPr/>
+        </p:nvSpPr>
+        <p:spPr>
+          <a:xfrm>
+            <a:off x="1234440" y="5715000"/>
+            <a:ext cx="4846320" cy="329184"/>
+          </a:xfrm>
+          <a:prstGeom prst="rect">
+            <a:avLst/>
+          </a:prstGeom>
+          <a:noFill/>
+        </p:spPr>
+        <p:txBody>
+          <a:bodyPr wrap="square" anchor="t" lIns="0" rIns="0" tIns="0" bIns="0">
+            <a:noAutofit/>
+          </a:bodyPr>
+          <a:lstStyle/>
+          <a:p>
+            <a:pPr algn="l">
+              <a:lnSpc>
+                <a:spcPct val="125000"/>
+              </a:lnSpc>
+            </a:pPr>
+            <a:r>
+              <a:rPr sz="1000" b="0" i="0">
                 <a:solidFill>
                   <a:srgbClr val="3F3F46"/>
                 </a:solidFill>
                 <a:latin typeface="Helvetica Neue"/>
               </a:rPr>
-              <a:t>Net $/mo projection: $620 — closes the gap</a:t>
-            </a:r>
-          </a:p>
-        </p:txBody>
-      </p:sp>
-      <p:sp>
-        <p:nvSpPr>
-          <p:cNvPr id="20" name="Rounded Rectangle 19"/>
+              <a:t>Projected net: $620/mo  →  closes her gap</a:t>
+            </a:r>
+          </a:p>
+        </p:txBody>
+      </p:sp>
+      <p:sp>
+        <p:nvSpPr>
+          <p:cNvPr id="21" name="Rounded Rectangle 20"/>
           <p:cNvSpPr/>
           <p:nvPr/>
         </p:nvSpPr>
         <p:spPr>
           <a:xfrm>
-            <a:off x="6537959" y="2926080"/>
-            <a:ext cx="5623559" cy="3154680"/>
+            <a:off x="6537959" y="3291840"/>
+            <a:ext cx="5623559" cy="2880360"/>
           </a:xfrm>
           <a:prstGeom prst="roundRect">
             <a:avLst>
@@ -6996,13 +8394,13 @@
       </p:sp>
       <p:sp>
         <p:nvSpPr>
-          <p:cNvPr id="21" name="Rounded Rectangle 20"/>
+          <p:cNvPr id="22" name="Rounded Rectangle 21"/>
           <p:cNvSpPr/>
           <p:nvPr/>
         </p:nvSpPr>
         <p:spPr>
           <a:xfrm>
-            <a:off x="6537959" y="2926080"/>
+            <a:off x="6537959" y="3291840"/>
             <a:ext cx="5623559" cy="777240"/>
           </a:xfrm>
           <a:prstGeom prst="roundRect">
@@ -7042,13 +8440,13 @@
       </p:sp>
       <p:sp>
         <p:nvSpPr>
-          <p:cNvPr id="22" name="TextBox 21"/>
-          <p:cNvSpPr txBox="1"/>
-          <p:nvPr/>
-        </p:nvSpPr>
-        <p:spPr>
-          <a:xfrm>
-            <a:off x="6766559" y="3090672"/>
+          <p:cNvPr id="23" name="TextBox 22"/>
+          <p:cNvSpPr txBox="1"/>
+          <p:nvPr/>
+        </p:nvSpPr>
+        <p:spPr>
+          <a:xfrm>
+            <a:off x="6766559" y="3456432"/>
             <a:ext cx="914400" cy="457200"/>
           </a:xfrm>
           <a:prstGeom prst="rect">
@@ -7058,7 +8456,7 @@
         </p:spPr>
         <p:txBody>
           <a:bodyPr wrap="square" anchor="t" lIns="0" rIns="0" tIns="0" bIns="0">
-            <a:spAutoFit/>
+            <a:noAutofit/>
           </a:bodyPr>
           <a:lstStyle/>
           <a:p>
@@ -7081,13 +8479,13 @@
       </p:sp>
       <p:sp>
         <p:nvSpPr>
-          <p:cNvPr id="23" name="TextBox 22"/>
-          <p:cNvSpPr txBox="1"/>
-          <p:nvPr/>
-        </p:nvSpPr>
-        <p:spPr>
-          <a:xfrm>
-            <a:off x="7543800" y="3090672"/>
+          <p:cNvPr id="24" name="TextBox 23"/>
+          <p:cNvSpPr txBox="1"/>
+          <p:nvPr/>
+        </p:nvSpPr>
+        <p:spPr>
+          <a:xfrm>
+            <a:off x="7543800" y="3456432"/>
             <a:ext cx="4526279" cy="320040"/>
           </a:xfrm>
           <a:prstGeom prst="rect">
@@ -7097,7 +8495,7 @@
         </p:spPr>
         <p:txBody>
           <a:bodyPr wrap="square" anchor="t" lIns="0" rIns="0" tIns="0" bIns="0">
-            <a:spAutoFit/>
+            <a:noAutofit/>
           </a:bodyPr>
           <a:lstStyle/>
           <a:p>
@@ -7120,13 +8518,13 @@
       </p:sp>
       <p:sp>
         <p:nvSpPr>
-          <p:cNvPr id="24" name="TextBox 23"/>
-          <p:cNvSpPr txBox="1"/>
-          <p:nvPr/>
-        </p:nvSpPr>
-        <p:spPr>
-          <a:xfrm>
-            <a:off x="7543800" y="3383280"/>
+          <p:cNvPr id="25" name="TextBox 24"/>
+          <p:cNvSpPr txBox="1"/>
+          <p:nvPr/>
+        </p:nvSpPr>
+        <p:spPr>
+          <a:xfrm>
+            <a:off x="7543800" y="3749039"/>
             <a:ext cx="4526279" cy="274320"/>
           </a:xfrm>
           <a:prstGeom prst="rect">
@@ -7136,7 +8534,7 @@
         </p:spPr>
         <p:txBody>
           <a:bodyPr wrap="square" anchor="t" lIns="0" rIns="0" tIns="0" bIns="0">
-            <a:spAutoFit/>
+            <a:noAutofit/>
           </a:bodyPr>
           <a:lstStyle/>
           <a:p>
@@ -7152,30 +8550,30 @@
                 </a:solidFill>
                 <a:latin typeface="Helvetica Neue"/>
               </a:rPr>
-              <a:t>Customer-service rep (WFH)  ·  Texas  ·  $400/mo gap  ·  3 hr/wk  ·  digital-only</a:t>
-            </a:r>
-          </a:p>
-        </p:txBody>
-      </p:sp>
-      <p:sp>
-        <p:nvSpPr>
-          <p:cNvPr id="25" name="TextBox 24"/>
-          <p:cNvSpPr txBox="1"/>
-          <p:nvPr/>
-        </p:nvSpPr>
-        <p:spPr>
-          <a:xfrm>
-            <a:off x="6812279" y="3886200"/>
-            <a:ext cx="274320" cy="365760"/>
-          </a:xfrm>
-          <a:prstGeom prst="rect">
-            <a:avLst/>
-          </a:prstGeom>
-          <a:noFill/>
-        </p:spPr>
-        <p:txBody>
-          <a:bodyPr wrap="square" anchor="t" lIns="0" rIns="0" tIns="0" bIns="0">
-            <a:spAutoFit/>
+              <a:t>Customer-service rep (WFH)  ·  Texas  ·  $400/mo gap  ·  3 hr/wk</a:t>
+            </a:r>
+          </a:p>
+        </p:txBody>
+      </p:sp>
+      <p:sp>
+        <p:nvSpPr>
+          <p:cNvPr id="26" name="TextBox 25"/>
+          <p:cNvSpPr txBox="1"/>
+          <p:nvPr/>
+        </p:nvSpPr>
+        <p:spPr>
+          <a:xfrm>
+            <a:off x="6812279" y="4251960"/>
+            <a:ext cx="274320" cy="320040"/>
+          </a:xfrm>
+          <a:prstGeom prst="rect">
+            <a:avLst/>
+          </a:prstGeom>
+          <a:noFill/>
+        </p:spPr>
+        <p:txBody>
+          <a:bodyPr wrap="square" anchor="t" lIns="0" rIns="0" tIns="0" bIns="0">
+            <a:noAutofit/>
           </a:bodyPr>
           <a:lstStyle/>
           <a:p>
@@ -7185,7 +8583,7 @@
               </a:lnSpc>
             </a:pPr>
             <a:r>
-              <a:rPr sz="1200" b="0" i="0">
+              <a:rPr sz="1100" b="0" i="0">
                 <a:solidFill>
                   <a:srgbClr val="18181B"/>
                 </a:solidFill>
@@ -7198,33 +8596,33 @@
       </p:sp>
       <p:sp>
         <p:nvSpPr>
-          <p:cNvPr id="26" name="TextBox 25"/>
-          <p:cNvSpPr txBox="1"/>
-          <p:nvPr/>
-        </p:nvSpPr>
-        <p:spPr>
-          <a:xfrm>
-            <a:off x="7132320" y="3886200"/>
-            <a:ext cx="4846320" cy="365760"/>
-          </a:xfrm>
-          <a:prstGeom prst="rect">
-            <a:avLst/>
-          </a:prstGeom>
-          <a:noFill/>
-        </p:spPr>
-        <p:txBody>
-          <a:bodyPr wrap="square" anchor="t" lIns="0" rIns="0" tIns="0" bIns="0">
-            <a:spAutoFit/>
-          </a:bodyPr>
-          <a:lstStyle/>
-          <a:p>
-            <a:pPr algn="l">
-              <a:lnSpc>
-                <a:spcPct val="120000"/>
-              </a:lnSpc>
-            </a:pPr>
-            <a:r>
-              <a:rPr sz="1050" b="0" i="0">
+          <p:cNvPr id="27" name="TextBox 26"/>
+          <p:cNvSpPr txBox="1"/>
+          <p:nvPr/>
+        </p:nvSpPr>
+        <p:spPr>
+          <a:xfrm>
+            <a:off x="7132320" y="4251960"/>
+            <a:ext cx="4846320" cy="329184"/>
+          </a:xfrm>
+          <a:prstGeom prst="rect">
+            <a:avLst/>
+          </a:prstGeom>
+          <a:noFill/>
+        </p:spPr>
+        <p:txBody>
+          <a:bodyPr wrap="square" anchor="t" lIns="0" rIns="0" tIns="0" bIns="0">
+            <a:noAutofit/>
+          </a:bodyPr>
+          <a:lstStyle/>
+          <a:p>
+            <a:pPr algn="l">
+              <a:lnSpc>
+                <a:spcPct val="125000"/>
+              </a:lnSpc>
+            </a:pPr>
+            <a:r>
+              <a:rPr sz="1000" b="0" i="0">
                 <a:solidFill>
                   <a:srgbClr val="3F3F46"/>
                 </a:solidFill>
@@ -7237,23 +8635,23 @@
       </p:sp>
       <p:sp>
         <p:nvSpPr>
-          <p:cNvPr id="27" name="TextBox 26"/>
-          <p:cNvSpPr txBox="1"/>
-          <p:nvPr/>
-        </p:nvSpPr>
-        <p:spPr>
-          <a:xfrm>
-            <a:off x="6812279" y="4297680"/>
-            <a:ext cx="274320" cy="365760"/>
-          </a:xfrm>
-          <a:prstGeom prst="rect">
-            <a:avLst/>
-          </a:prstGeom>
-          <a:noFill/>
-        </p:spPr>
-        <p:txBody>
-          <a:bodyPr wrap="square" anchor="t" lIns="0" rIns="0" tIns="0" bIns="0">
-            <a:spAutoFit/>
+          <p:cNvPr id="28" name="TextBox 27"/>
+          <p:cNvSpPr txBox="1"/>
+          <p:nvPr/>
+        </p:nvSpPr>
+        <p:spPr>
+          <a:xfrm>
+            <a:off x="6812279" y="4617720"/>
+            <a:ext cx="274320" cy="320040"/>
+          </a:xfrm>
+          <a:prstGeom prst="rect">
+            <a:avLst/>
+          </a:prstGeom>
+          <a:noFill/>
+        </p:spPr>
+        <p:txBody>
+          <a:bodyPr wrap="square" anchor="t" lIns="0" rIns="0" tIns="0" bIns="0">
+            <a:noAutofit/>
           </a:bodyPr>
           <a:lstStyle/>
           <a:p>
@@ -7263,7 +8661,7 @@
               </a:lnSpc>
             </a:pPr>
             <a:r>
-              <a:rPr sz="1200" b="0" i="0">
+              <a:rPr sz="1100" b="0" i="0">
                 <a:solidFill>
                   <a:srgbClr val="18181B"/>
                 </a:solidFill>
@@ -7276,33 +8674,33 @@
       </p:sp>
       <p:sp>
         <p:nvSpPr>
-          <p:cNvPr id="28" name="TextBox 27"/>
-          <p:cNvSpPr txBox="1"/>
-          <p:nvPr/>
-        </p:nvSpPr>
-        <p:spPr>
-          <a:xfrm>
-            <a:off x="7132320" y="4297680"/>
-            <a:ext cx="4846320" cy="365760"/>
-          </a:xfrm>
-          <a:prstGeom prst="rect">
-            <a:avLst/>
-          </a:prstGeom>
-          <a:noFill/>
-        </p:spPr>
-        <p:txBody>
-          <a:bodyPr wrap="square" anchor="t" lIns="0" rIns="0" tIns="0" bIns="0">
-            <a:spAutoFit/>
-          </a:bodyPr>
-          <a:lstStyle/>
-          <a:p>
-            <a:pPr algn="l">
-              <a:lnSpc>
-                <a:spcPct val="120000"/>
-              </a:lnSpc>
-            </a:pPr>
-            <a:r>
-              <a:rPr sz="1050" b="0" i="0">
+          <p:cNvPr id="29" name="TextBox 28"/>
+          <p:cNvSpPr txBox="1"/>
+          <p:nvPr/>
+        </p:nvSpPr>
+        <p:spPr>
+          <a:xfrm>
+            <a:off x="7132320" y="4617720"/>
+            <a:ext cx="4846320" cy="329184"/>
+          </a:xfrm>
+          <a:prstGeom prst="rect">
+            <a:avLst/>
+          </a:prstGeom>
+          <a:noFill/>
+        </p:spPr>
+        <p:txBody>
+          <a:bodyPr wrap="square" anchor="t" lIns="0" rIns="0" tIns="0" bIns="0">
+            <a:noAutofit/>
+          </a:bodyPr>
+          <a:lstStyle/>
+          <a:p>
+            <a:pPr algn="l">
+              <a:lnSpc>
+                <a:spcPct val="125000"/>
+              </a:lnSpc>
+            </a:pPr>
+            <a:r>
+              <a:rPr sz="1000" b="0" i="0">
                 <a:solidFill>
                   <a:srgbClr val="3F3F46"/>
                 </a:solidFill>
@@ -7315,23 +8713,23 @@
       </p:sp>
       <p:sp>
         <p:nvSpPr>
-          <p:cNvPr id="29" name="TextBox 28"/>
-          <p:cNvSpPr txBox="1"/>
-          <p:nvPr/>
-        </p:nvSpPr>
-        <p:spPr>
-          <a:xfrm>
-            <a:off x="6812279" y="4709160"/>
-            <a:ext cx="274320" cy="365760"/>
-          </a:xfrm>
-          <a:prstGeom prst="rect">
-            <a:avLst/>
-          </a:prstGeom>
-          <a:noFill/>
-        </p:spPr>
-        <p:txBody>
-          <a:bodyPr wrap="square" anchor="t" lIns="0" rIns="0" tIns="0" bIns="0">
-            <a:spAutoFit/>
+          <p:cNvPr id="30" name="TextBox 29"/>
+          <p:cNvSpPr txBox="1"/>
+          <p:nvPr/>
+        </p:nvSpPr>
+        <p:spPr>
+          <a:xfrm>
+            <a:off x="6812279" y="4983480"/>
+            <a:ext cx="274320" cy="320040"/>
+          </a:xfrm>
+          <a:prstGeom prst="rect">
+            <a:avLst/>
+          </a:prstGeom>
+          <a:noFill/>
+        </p:spPr>
+        <p:txBody>
+          <a:bodyPr wrap="square" anchor="t" lIns="0" rIns="0" tIns="0" bIns="0">
+            <a:noAutofit/>
           </a:bodyPr>
           <a:lstStyle/>
           <a:p>
@@ -7341,7 +8739,7 @@
               </a:lnSpc>
             </a:pPr>
             <a:r>
-              <a:rPr sz="1200" b="0" i="0">
+              <a:rPr sz="1100" b="0" i="0">
                 <a:solidFill>
                   <a:srgbClr val="18181B"/>
                 </a:solidFill>
@@ -7354,62 +8752,62 @@
       </p:sp>
       <p:sp>
         <p:nvSpPr>
-          <p:cNvPr id="30" name="TextBox 29"/>
-          <p:cNvSpPr txBox="1"/>
-          <p:nvPr/>
-        </p:nvSpPr>
-        <p:spPr>
-          <a:xfrm>
-            <a:off x="7132320" y="4709160"/>
-            <a:ext cx="4846320" cy="365760"/>
-          </a:xfrm>
-          <a:prstGeom prst="rect">
-            <a:avLst/>
-          </a:prstGeom>
-          <a:noFill/>
-        </p:spPr>
-        <p:txBody>
-          <a:bodyPr wrap="square" anchor="t" lIns="0" rIns="0" tIns="0" bIns="0">
-            <a:spAutoFit/>
-          </a:bodyPr>
-          <a:lstStyle/>
-          <a:p>
-            <a:pPr algn="l">
-              <a:lnSpc>
-                <a:spcPct val="120000"/>
-              </a:lnSpc>
-            </a:pPr>
-            <a:r>
-              <a:rPr sz="1050" b="0" i="0">
+          <p:cNvPr id="31" name="TextBox 30"/>
+          <p:cNvSpPr txBox="1"/>
+          <p:nvPr/>
+        </p:nvSpPr>
+        <p:spPr>
+          <a:xfrm>
+            <a:off x="7132320" y="4983480"/>
+            <a:ext cx="4846320" cy="329184"/>
+          </a:xfrm>
+          <a:prstGeom prst="rect">
+            <a:avLst/>
+          </a:prstGeom>
+          <a:noFill/>
+        </p:spPr>
+        <p:txBody>
+          <a:bodyPr wrap="square" anchor="t" lIns="0" rIns="0" tIns="0" bIns="0">
+            <a:noAutofit/>
+          </a:bodyPr>
+          <a:lstStyle/>
+          <a:p>
+            <a:pPr algn="l">
+              <a:lnSpc>
+                <a:spcPct val="125000"/>
+              </a:lnSpc>
+            </a:pPr>
+            <a:r>
+              <a:rPr sz="1000" b="0" i="0">
                 <a:solidFill>
                   <a:srgbClr val="3F3F46"/>
                 </a:solidFill>
                 <a:latin typeface="Helvetica Neue"/>
               </a:rPr>
-              <a:t>Constraint math passes (3 hr/wk feasible)</a:t>
-            </a:r>
-          </a:p>
-        </p:txBody>
-      </p:sp>
-      <p:sp>
-        <p:nvSpPr>
-          <p:cNvPr id="31" name="TextBox 30"/>
-          <p:cNvSpPr txBox="1"/>
-          <p:nvPr/>
-        </p:nvSpPr>
-        <p:spPr>
-          <a:xfrm>
-            <a:off x="6812279" y="5120640"/>
-            <a:ext cx="274320" cy="365760"/>
-          </a:xfrm>
-          <a:prstGeom prst="rect">
-            <a:avLst/>
-          </a:prstGeom>
-          <a:noFill/>
-        </p:spPr>
-        <p:txBody>
-          <a:bodyPr wrap="square" anchor="t" lIns="0" rIns="0" tIns="0" bIns="0">
-            <a:spAutoFit/>
+              <a:t>Constraint math passes (3 hr/wk is feasible)</a:t>
+            </a:r>
+          </a:p>
+        </p:txBody>
+      </p:sp>
+      <p:sp>
+        <p:nvSpPr>
+          <p:cNvPr id="32" name="TextBox 31"/>
+          <p:cNvSpPr txBox="1"/>
+          <p:nvPr/>
+        </p:nvSpPr>
+        <p:spPr>
+          <a:xfrm>
+            <a:off x="6812279" y="5349240"/>
+            <a:ext cx="274320" cy="320040"/>
+          </a:xfrm>
+          <a:prstGeom prst="rect">
+            <a:avLst/>
+          </a:prstGeom>
+          <a:noFill/>
+        </p:spPr>
+        <p:txBody>
+          <a:bodyPr wrap="square" anchor="t" lIns="0" rIns="0" tIns="0" bIns="0">
+            <a:noAutofit/>
           </a:bodyPr>
           <a:lstStyle/>
           <a:p>
@@ -7419,7 +8817,7 @@
               </a:lnSpc>
             </a:pPr>
             <a:r>
-              <a:rPr sz="1200" b="0" i="0">
+              <a:rPr sz="1100" b="0" i="0">
                 <a:solidFill>
                   <a:srgbClr val="18181B"/>
                 </a:solidFill>
@@ -7432,62 +8830,62 @@
       </p:sp>
       <p:sp>
         <p:nvSpPr>
-          <p:cNvPr id="32" name="TextBox 31"/>
-          <p:cNvSpPr txBox="1"/>
-          <p:nvPr/>
-        </p:nvSpPr>
-        <p:spPr>
-          <a:xfrm>
-            <a:off x="7132320" y="5120640"/>
-            <a:ext cx="4846320" cy="365760"/>
-          </a:xfrm>
-          <a:prstGeom prst="rect">
-            <a:avLst/>
-          </a:prstGeom>
-          <a:noFill/>
-        </p:spPr>
-        <p:txBody>
-          <a:bodyPr wrap="square" anchor="t" lIns="0" rIns="0" tIns="0" bIns="0">
-            <a:spAutoFit/>
-          </a:bodyPr>
-          <a:lstStyle/>
-          <a:p>
-            <a:pPr algn="l">
-              <a:lnSpc>
-                <a:spcPct val="120000"/>
-              </a:lnSpc>
-            </a:pPr>
-            <a:r>
-              <a:rPr sz="1050" b="0" i="0">
+          <p:cNvPr id="33" name="TextBox 32"/>
+          <p:cNvSpPr txBox="1"/>
+          <p:nvPr/>
+        </p:nvSpPr>
+        <p:spPr>
+          <a:xfrm>
+            <a:off x="7132320" y="5349240"/>
+            <a:ext cx="4846320" cy="329184"/>
+          </a:xfrm>
+          <a:prstGeom prst="rect">
+            <a:avLst/>
+          </a:prstGeom>
+          <a:noFill/>
+        </p:spPr>
+        <p:txBody>
+          <a:bodyPr wrap="square" anchor="t" lIns="0" rIns="0" tIns="0" bIns="0">
+            <a:noAutofit/>
+          </a:bodyPr>
+          <a:lstStyle/>
+          <a:p>
+            <a:pPr algn="l">
+              <a:lnSpc>
+                <a:spcPct val="125000"/>
+              </a:lnSpc>
+            </a:pPr>
+            <a:r>
+              <a:rPr sz="1000" b="0" i="0">
                 <a:solidFill>
                   <a:srgbClr val="3F3F46"/>
                 </a:solidFill>
                 <a:latin typeface="Helvetica Neue"/>
               </a:rPr>
-              <a:t>Real Etsy listing draft + launch page published</a:t>
-            </a:r>
-          </a:p>
-        </p:txBody>
-      </p:sp>
-      <p:sp>
-        <p:nvSpPr>
-          <p:cNvPr id="33" name="TextBox 32"/>
-          <p:cNvSpPr txBox="1"/>
-          <p:nvPr/>
-        </p:nvSpPr>
-        <p:spPr>
-          <a:xfrm>
-            <a:off x="6812279" y="5532120"/>
-            <a:ext cx="274320" cy="365760"/>
-          </a:xfrm>
-          <a:prstGeom prst="rect">
-            <a:avLst/>
-          </a:prstGeom>
-          <a:noFill/>
-        </p:spPr>
-        <p:txBody>
-          <a:bodyPr wrap="square" anchor="t" lIns="0" rIns="0" tIns="0" bIns="0">
-            <a:spAutoFit/>
+              <a:t>Real Etsy listing draft + landing page published</a:t>
+            </a:r>
+          </a:p>
+        </p:txBody>
+      </p:sp>
+      <p:sp>
+        <p:nvSpPr>
+          <p:cNvPr id="34" name="TextBox 33"/>
+          <p:cNvSpPr txBox="1"/>
+          <p:nvPr/>
+        </p:nvSpPr>
+        <p:spPr>
+          <a:xfrm>
+            <a:off x="6812279" y="5715000"/>
+            <a:ext cx="274320" cy="320040"/>
+          </a:xfrm>
+          <a:prstGeom prst="rect">
+            <a:avLst/>
+          </a:prstGeom>
+          <a:noFill/>
+        </p:spPr>
+        <p:txBody>
+          <a:bodyPr wrap="square" anchor="t" lIns="0" rIns="0" tIns="0" bIns="0">
+            <a:noAutofit/>
           </a:bodyPr>
           <a:lstStyle/>
           <a:p>
@@ -7497,7 +8895,7 @@
               </a:lnSpc>
             </a:pPr>
             <a:r>
-              <a:rPr sz="1200" b="0" i="0">
+              <a:rPr sz="1100" b="0" i="0">
                 <a:solidFill>
                   <a:srgbClr val="18181B"/>
                 </a:solidFill>
@@ -7510,117 +8908,78 @@
       </p:sp>
       <p:sp>
         <p:nvSpPr>
-          <p:cNvPr id="34" name="TextBox 33"/>
-          <p:cNvSpPr txBox="1"/>
-          <p:nvPr/>
-        </p:nvSpPr>
-        <p:spPr>
-          <a:xfrm>
-            <a:off x="7132320" y="5532120"/>
-            <a:ext cx="4846320" cy="365760"/>
-          </a:xfrm>
-          <a:prstGeom prst="rect">
-            <a:avLst/>
-          </a:prstGeom>
-          <a:noFill/>
-        </p:spPr>
-        <p:txBody>
-          <a:bodyPr wrap="square" anchor="t" lIns="0" rIns="0" tIns="0" bIns="0">
-            <a:spAutoFit/>
-          </a:bodyPr>
-          <a:lstStyle/>
-          <a:p>
-            <a:pPr algn="l">
-              <a:lnSpc>
-                <a:spcPct val="120000"/>
-              </a:lnSpc>
-            </a:pPr>
-            <a:r>
-              <a:rPr sz="1050" b="0" i="0">
+          <p:cNvPr id="35" name="TextBox 34"/>
+          <p:cNvSpPr txBox="1"/>
+          <p:nvPr/>
+        </p:nvSpPr>
+        <p:spPr>
+          <a:xfrm>
+            <a:off x="7132320" y="5715000"/>
+            <a:ext cx="4846320" cy="329184"/>
+          </a:xfrm>
+          <a:prstGeom prst="rect">
+            <a:avLst/>
+          </a:prstGeom>
+          <a:noFill/>
+        </p:spPr>
+        <p:txBody>
+          <a:bodyPr wrap="square" anchor="t" lIns="0" rIns="0" tIns="0" bIns="0">
+            <a:noAutofit/>
+          </a:bodyPr>
+          <a:lstStyle/>
+          <a:p>
+            <a:pPr algn="l">
+              <a:lnSpc>
+                <a:spcPct val="125000"/>
+              </a:lnSpc>
+            </a:pPr>
+            <a:r>
+              <a:rPr sz="1000" b="0" i="0">
                 <a:solidFill>
                   <a:srgbClr val="3F3F46"/>
                 </a:solidFill>
                 <a:latin typeface="Helvetica Neue"/>
               </a:rPr>
-              <a:t>Net $/mo projection: $430 — closes the gap</a:t>
-            </a:r>
-          </a:p>
-        </p:txBody>
-      </p:sp>
-      <p:sp>
-        <p:nvSpPr>
-          <p:cNvPr id="35" name="TextBox 34"/>
-          <p:cNvSpPr txBox="1"/>
-          <p:nvPr/>
-        </p:nvSpPr>
-        <p:spPr>
-          <a:xfrm>
-            <a:off x="640080" y="6217920"/>
-            <a:ext cx="10972800" cy="274320"/>
-          </a:xfrm>
-          <a:prstGeom prst="rect">
-            <a:avLst/>
-          </a:prstGeom>
-          <a:noFill/>
-        </p:spPr>
-        <p:txBody>
-          <a:bodyPr wrap="square" anchor="t" lIns="0" rIns="0" tIns="0" bIns="0">
-            <a:spAutoFit/>
-          </a:bodyPr>
-          <a:lstStyle/>
-          <a:p>
-            <a:pPr algn="ctr">
+              <a:t>Projected net: $430/mo  →  closes her gap</a:t>
+            </a:r>
+          </a:p>
+        </p:txBody>
+      </p:sp>
+      <p:sp>
+        <p:nvSpPr>
+          <p:cNvPr id="36" name="TextBox 35"/>
+          <p:cNvSpPr txBox="1"/>
+          <p:nvPr/>
+        </p:nvSpPr>
+        <p:spPr>
+          <a:xfrm>
+            <a:off x="548640" y="6537960"/>
+            <a:ext cx="7315200" cy="274320"/>
+          </a:xfrm>
+          <a:prstGeom prst="rect">
+            <a:avLst/>
+          </a:prstGeom>
+          <a:noFill/>
+        </p:spPr>
+        <p:txBody>
+          <a:bodyPr wrap="square" anchor="t" lIns="0" rIns="0" tIns="0" bIns="0">
+            <a:noAutofit/>
+          </a:bodyPr>
+          <a:lstStyle/>
+          <a:p>
+            <a:pPr algn="l">
               <a:lnSpc>
                 <a:spcPct val="115000"/>
               </a:lnSpc>
             </a:pPr>
             <a:r>
-              <a:rPr sz="1100" b="0" i="1">
+              <a:rPr sz="900" b="0" i="0">
                 <a:solidFill>
                   <a:srgbClr val="71717A"/>
                 </a:solidFill>
                 <a:latin typeface="Helvetica Neue"/>
               </a:rPr>
-              <a:t>Same swarm. Different regulation. Different math. Different launch — it's the system doing the work, not a script.</a:t>
-            </a:r>
-          </a:p>
-        </p:txBody>
-      </p:sp>
-      <p:sp>
-        <p:nvSpPr>
-          <p:cNvPr id="36" name="TextBox 35"/>
-          <p:cNvSpPr txBox="1"/>
-          <p:nvPr/>
-        </p:nvSpPr>
-        <p:spPr>
-          <a:xfrm>
-            <a:off x="548640" y="6492240"/>
-            <a:ext cx="5486400" cy="274320"/>
-          </a:xfrm>
-          <a:prstGeom prst="rect">
-            <a:avLst/>
-          </a:prstGeom>
-          <a:noFill/>
-        </p:spPr>
-        <p:txBody>
-          <a:bodyPr wrap="square" anchor="t" lIns="0" rIns="0" tIns="0" bIns="0">
-            <a:spAutoFit/>
-          </a:bodyPr>
-          <a:lstStyle/>
-          <a:p>
-            <a:pPr algn="l">
-              <a:lnSpc>
-                <a:spcPct val="115000"/>
-              </a:lnSpc>
-            </a:pPr>
-            <a:r>
-              <a:rPr sz="900" b="0" i="0">
-                <a:solidFill>
-                  <a:srgbClr val="71717A"/>
-                </a:solidFill>
-                <a:latin typeface="Helvetica Neue"/>
-              </a:rPr>
-              <a:t>🌸  Mom's Saheli  ·  Agent Forge AI Hackathon  ·  May 16 2026</a:t>
+              <a:t>Mom's Saheli  ·  Agent Forge AI Hackathon  ·  San Francisco  ·  May 16 2026</a:t>
             </a:r>
           </a:p>
         </p:txBody>
@@ -7633,7 +8992,7 @@
         </p:nvSpPr>
         <p:spPr>
           <a:xfrm>
-            <a:off x="10972800" y="6492240"/>
+            <a:off x="10972800" y="6537960"/>
             <a:ext cx="914400" cy="274320"/>
           </a:xfrm>
           <a:prstGeom prst="rect">
@@ -7643,7 +9002,7 @@
         </p:spPr>
         <p:txBody>
           <a:bodyPr wrap="square" anchor="t" lIns="0" rIns="0" tIns="0" bIns="0">
-            <a:spAutoFit/>
+            <a:noAutofit/>
           </a:bodyPr>
           <a:lstStyle/>
           <a:p>
@@ -7735,7 +9094,7 @@
         <p:spPr>
           <a:xfrm>
             <a:off x="7772400" y="0"/>
-            <a:ext cx="4389120" cy="6858000"/>
+            <a:ext cx="4416552" cy="6858000"/>
           </a:xfrm>
           <a:prstGeom prst="rect">
             <a:avLst/>
@@ -7823,16 +9182,16 @@
         <p:spPr>
           <a:xfrm>
             <a:off x="640080" y="640080"/>
-            <a:ext cx="9144000" cy="274320"/>
-          </a:xfrm>
-          <a:prstGeom prst="rect">
-            <a:avLst/>
-          </a:prstGeom>
-          <a:noFill/>
-        </p:spPr>
-        <p:txBody>
-          <a:bodyPr wrap="square" anchor="t" lIns="0" rIns="0" tIns="0" bIns="0">
-            <a:spAutoFit/>
+            <a:ext cx="10972800" cy="274320"/>
+          </a:xfrm>
+          <a:prstGeom prst="rect">
+            <a:avLst/>
+          </a:prstGeom>
+          <a:noFill/>
+        </p:spPr>
+        <p:txBody>
+          <a:bodyPr wrap="square" anchor="t" lIns="0" rIns="0" tIns="0" bIns="0">
+            <a:noAutofit/>
           </a:bodyPr>
           <a:lstStyle/>
           <a:p>
@@ -7871,7 +9230,7 @@
         </p:spPr>
         <p:txBody>
           <a:bodyPr wrap="square" anchor="t" lIns="0" rIns="0" tIns="0" bIns="0">
-            <a:spAutoFit/>
+            <a:noAutofit/>
           </a:bodyPr>
           <a:lstStyle/>
           <a:p>
@@ -7900,17 +9259,90 @@
         </p:nvSpPr>
         <p:spPr>
           <a:xfrm>
-            <a:off x="640080" y="2743200"/>
-            <a:ext cx="10515600" cy="1097280"/>
-          </a:xfrm>
-          <a:prstGeom prst="rect">
-            <a:avLst/>
-          </a:prstGeom>
-          <a:noFill/>
-        </p:spPr>
-        <p:txBody>
-          <a:bodyPr wrap="square" anchor="t" lIns="0" rIns="0" tIns="0" bIns="0">
-            <a:spAutoFit/>
+            <a:off x="640080" y="2697480"/>
+            <a:ext cx="10515600" cy="1280160"/>
+          </a:xfrm>
+          <a:prstGeom prst="rect">
+            <a:avLst/>
+          </a:prstGeom>
+          <a:noFill/>
+        </p:spPr>
+        <p:txBody>
+          <a:bodyPr wrap="square" anchor="t" lIns="0" rIns="0" tIns="0" bIns="0">
+            <a:noAutofit/>
+          </a:bodyPr>
+          <a:lstStyle/>
+          <a:p>
+            <a:pPr algn="l">
+              <a:lnSpc>
+                <a:spcPct val="120000"/>
+              </a:lnSpc>
+            </a:pPr>
+            <a:r>
+              <a:rPr sz="2800" b="0" i="0">
+                <a:solidFill>
+                  <a:srgbClr val="FDF8F0"/>
+                </a:solidFill>
+                <a:latin typeface="Georgia"/>
+              </a:rPr>
+              <a:t>We're not shipping AI features.</a:t>
+            </a:r>
+          </a:p>
+          <a:p>
+            <a:pPr algn="l">
+              <a:lnSpc>
+                <a:spcPct val="120000"/>
+              </a:lnSpc>
+            </a:pPr>
+            <a:r>
+              <a:rPr sz="2800" b="0" i="0">
+                <a:solidFill>
+                  <a:srgbClr val="FDF8F0"/>
+                </a:solidFill>
+                <a:latin typeface="Georgia"/>
+              </a:rPr>
+              <a:t>We're closing the </a:t>
+            </a:r>
+            <a:r>
+              <a:rPr sz="2800" b="0" i="1">
+                <a:solidFill>
+                  <a:srgbClr val="F59E0B"/>
+                </a:solidFill>
+                <a:latin typeface="Georgia"/>
+              </a:rPr>
+              <a:t>margin gap</a:t>
+            </a:r>
+            <a:r>
+              <a:rPr sz="2800" b="0" i="0">
+                <a:solidFill>
+                  <a:srgbClr val="FDF8F0"/>
+                </a:solidFill>
+                <a:latin typeface="Georgia"/>
+              </a:rPr>
+              <a:t>.</a:t>
+            </a:r>
+          </a:p>
+        </p:txBody>
+      </p:sp>
+      <p:sp>
+        <p:nvSpPr>
+          <p:cNvPr id="8" name="TextBox 7"/>
+          <p:cNvSpPr txBox="1"/>
+          <p:nvPr/>
+        </p:nvSpPr>
+        <p:spPr>
+          <a:xfrm>
+            <a:off x="640080" y="4069080"/>
+            <a:ext cx="10972800" cy="274320"/>
+          </a:xfrm>
+          <a:prstGeom prst="rect">
+            <a:avLst/>
+          </a:prstGeom>
+          <a:noFill/>
+        </p:spPr>
+        <p:txBody>
+          <a:bodyPr wrap="square" anchor="t" lIns="0" rIns="0" tIns="0" bIns="0">
+            <a:noAutofit/>
           </a:bodyPr>
           <a:lstStyle/>
           <a:p>
@@ -7920,15 +9352,131 @@
               </a:lnSpc>
             </a:pPr>
             <a:r>
-              <a:rPr sz="2800" b="0" i="1">
+              <a:rPr sz="1000" b="1" i="0" spc="200">
                 <a:solidFill>
                   <a:srgbClr val="F59E0B"/>
                 </a:solidFill>
-                <a:latin typeface="Georgia"/>
-              </a:rPr>
-              <a:t>We're not shipping AI features.</a:t>
-            </a:r>
-          </a:p>
+                <a:latin typeface="Helvetica Neue"/>
+              </a:rPr>
+              <a:t>WHAT SHIPPED IN 24 HOURS</a:t>
+            </a:r>
+          </a:p>
+        </p:txBody>
+      </p:sp>
+      <p:sp>
+        <p:nvSpPr>
+          <p:cNvPr id="9" name="TextBox 8"/>
+          <p:cNvSpPr txBox="1"/>
+          <p:nvPr/>
+        </p:nvSpPr>
+        <p:spPr>
+          <a:xfrm>
+            <a:off x="640080" y="4370832"/>
+            <a:ext cx="7315200" cy="457200"/>
+          </a:xfrm>
+          <a:prstGeom prst="rect">
+            <a:avLst/>
+          </a:prstGeom>
+          <a:noFill/>
+        </p:spPr>
+        <p:txBody>
+          <a:bodyPr wrap="square" anchor="t" lIns="0" rIns="0" tIns="0" bIns="0">
+            <a:noAutofit/>
+          </a:bodyPr>
+          <a:lstStyle/>
+          <a:p>
+            <a:pPr algn="l">
+              <a:lnSpc>
+                <a:spcPct val="140000"/>
+              </a:lnSpc>
+            </a:pPr>
+            <a:r>
+              <a:rPr sz="1200" b="0" i="0">
+                <a:solidFill>
+                  <a:srgbClr val="FDF8F0"/>
+                </a:solidFill>
+                <a:latin typeface="Helvetica Neue"/>
+              </a:rPr>
+              <a:t>5-agent swarm  ·  </a:t>
+            </a:r>
+            <a:r>
+              <a:rPr sz="1200" b="1" i="0">
+                <a:solidFill>
+                  <a:srgbClr val="F59E0B"/>
+                </a:solidFill>
+                <a:latin typeface="Helvetica Neue"/>
+              </a:rPr>
+              <a:t>real Gemini calls</a:t>
+            </a:r>
+            <a:r>
+              <a:rPr sz="1200" b="0" i="0">
+                <a:solidFill>
+                  <a:srgbClr val="FDF8F0"/>
+                </a:solidFill>
+                <a:latin typeface="Helvetica Neue"/>
+              </a:rPr>
+              <a:t>  ·  </a:t>
+            </a:r>
+            <a:r>
+              <a:rPr sz="1200" b="1" i="0">
+                <a:solidFill>
+                  <a:srgbClr val="F59E0B"/>
+                </a:solidFill>
+                <a:latin typeface="Helvetica Neue"/>
+              </a:rPr>
+              <a:t>real cited .gov law</a:t>
+            </a:r>
+            <a:r>
+              <a:rPr sz="1200" b="0" i="0">
+                <a:solidFill>
+                  <a:srgbClr val="FDF8F0"/>
+                </a:solidFill>
+                <a:latin typeface="Helvetica Neue"/>
+              </a:rPr>
+              <a:t>  ·  real published landing pages  ·  </a:t>
+            </a:r>
+            <a:r>
+              <a:rPr sz="1200" b="1" i="0">
+                <a:solidFill>
+                  <a:srgbClr val="F59E0B"/>
+                </a:solidFill>
+                <a:latin typeface="Helvetica Neue"/>
+              </a:rPr>
+              <a:t>AgentField nested waterfall</a:t>
+            </a:r>
+            <a:r>
+              <a:rPr sz="1200" b="0" i="0">
+                <a:solidFill>
+                  <a:srgbClr val="FDF8F0"/>
+                </a:solidFill>
+                <a:latin typeface="Helvetica Neue"/>
+              </a:rPr>
+              <a:t>  ·  SSE-streamed UI</a:t>
+            </a:r>
+          </a:p>
+        </p:txBody>
+      </p:sp>
+      <p:sp>
+        <p:nvSpPr>
+          <p:cNvPr id="10" name="TextBox 9"/>
+          <p:cNvSpPr txBox="1"/>
+          <p:nvPr/>
+        </p:nvSpPr>
+        <p:spPr>
+          <a:xfrm>
+            <a:off x="640080" y="5029200"/>
+            <a:ext cx="10515600" cy="274320"/>
+          </a:xfrm>
+          <a:prstGeom prst="rect">
+            <a:avLst/>
+          </a:prstGeom>
+          <a:noFill/>
+        </p:spPr>
+        <p:txBody>
+          <a:bodyPr wrap="square" anchor="t" lIns="0" rIns="0" tIns="0" bIns="0">
+            <a:noAutofit/>
+          </a:bodyPr>
+          <a:lstStyle/>
           <a:p>
             <a:pPr algn="l">
               <a:lnSpc>
@@ -7936,45 +9484,6 @@
               </a:lnSpc>
             </a:pPr>
             <a:r>
-              <a:rPr sz="2800" b="0" i="1">
-                <a:solidFill>
-                  <a:srgbClr val="F59E0B"/>
-                </a:solidFill>
-                <a:latin typeface="Georgia"/>
-              </a:rPr>
-              <a:t>We're closing the margin gap.</a:t>
-            </a:r>
-          </a:p>
-        </p:txBody>
-      </p:sp>
-      <p:sp>
-        <p:nvSpPr>
-          <p:cNvPr id="8" name="TextBox 7"/>
-          <p:cNvSpPr txBox="1"/>
-          <p:nvPr/>
-        </p:nvSpPr>
-        <p:spPr>
-          <a:xfrm>
-            <a:off x="640080" y="4206240"/>
-            <a:ext cx="10515600" cy="274320"/>
-          </a:xfrm>
-          <a:prstGeom prst="rect">
-            <a:avLst/>
-          </a:prstGeom>
-          <a:noFill/>
-        </p:spPr>
-        <p:txBody>
-          <a:bodyPr wrap="square" anchor="t" lIns="0" rIns="0" tIns="0" bIns="0">
-            <a:spAutoFit/>
-          </a:bodyPr>
-          <a:lstStyle/>
-          <a:p>
-            <a:pPr algn="l">
-              <a:lnSpc>
-                <a:spcPct val="115000"/>
-              </a:lnSpc>
-            </a:pPr>
-            <a:r>
               <a:rPr sz="1000" b="1" i="0" spc="200">
                 <a:solidFill>
                   <a:srgbClr val="71717A"/>
@@ -7988,14 +9497,14 @@
       </p:sp>
       <p:sp>
         <p:nvSpPr>
-          <p:cNvPr id="9" name="Rounded Rectangle 8"/>
+          <p:cNvPr id="11" name="Rounded Rectangle 10"/>
           <p:cNvSpPr/>
           <p:nvPr/>
         </p:nvSpPr>
         <p:spPr>
           <a:xfrm>
-            <a:off x="640080" y="4526280"/>
-            <a:ext cx="10927080" cy="548640"/>
+            <a:off x="640080" y="5349240"/>
+            <a:ext cx="10927080" cy="502920"/>
           </a:xfrm>
           <a:prstGeom prst="roundRect">
             <a:avLst>
@@ -8036,13 +9545,13 @@
       </p:sp>
       <p:sp>
         <p:nvSpPr>
-          <p:cNvPr id="10" name="TextBox 9"/>
-          <p:cNvSpPr txBox="1"/>
-          <p:nvPr/>
-        </p:nvSpPr>
-        <p:spPr>
-          <a:xfrm>
-            <a:off x="640080" y="4617720"/>
+          <p:cNvPr id="12" name="TextBox 11"/>
+          <p:cNvSpPr txBox="1"/>
+          <p:nvPr/>
+        </p:nvSpPr>
+        <p:spPr>
+          <a:xfrm>
+            <a:off x="640080" y="5413248"/>
             <a:ext cx="10927080" cy="411480"/>
           </a:xfrm>
           <a:prstGeom prst="rect">
@@ -8052,7 +9561,7 @@
         </p:spPr>
         <p:txBody>
           <a:bodyPr wrap="square" anchor="ctr" lIns="0" rIns="0" tIns="0" bIns="0">
-            <a:spAutoFit/>
+            <a:noAutofit/>
           </a:bodyPr>
           <a:lstStyle/>
           <a:p>
@@ -8075,14 +9584,14 @@
       </p:sp>
       <p:sp>
         <p:nvSpPr>
-          <p:cNvPr id="11" name="Rounded Rectangle 10"/>
+          <p:cNvPr id="13" name="Rounded Rectangle 12"/>
           <p:cNvSpPr/>
           <p:nvPr/>
         </p:nvSpPr>
         <p:spPr>
           <a:xfrm>
-            <a:off x="640080" y="5486400"/>
-            <a:ext cx="5486400" cy="868680"/>
+            <a:off x="640080" y="6035040"/>
+            <a:ext cx="6858000" cy="502920"/>
           </a:xfrm>
           <a:prstGeom prst="roundRect">
             <a:avLst>
@@ -8121,23 +9630,23 @@
       </p:sp>
       <p:sp>
         <p:nvSpPr>
-          <p:cNvPr id="12" name="TextBox 11"/>
-          <p:cNvSpPr txBox="1"/>
-          <p:nvPr/>
-        </p:nvSpPr>
-        <p:spPr>
-          <a:xfrm>
-            <a:off x="822960" y="5577840"/>
-            <a:ext cx="5212080" cy="320040"/>
-          </a:xfrm>
-          <a:prstGeom prst="rect">
-            <a:avLst/>
-          </a:prstGeom>
-          <a:noFill/>
-        </p:spPr>
-        <p:txBody>
-          <a:bodyPr wrap="square" anchor="t" lIns="0" rIns="0" tIns="0" bIns="0">
-            <a:spAutoFit/>
+          <p:cNvPr id="14" name="TextBox 13"/>
+          <p:cNvSpPr txBox="1"/>
+          <p:nvPr/>
+        </p:nvSpPr>
+        <p:spPr>
+          <a:xfrm>
+            <a:off x="822960" y="6089904"/>
+            <a:ext cx="6492240" cy="411480"/>
+          </a:xfrm>
+          <a:prstGeom prst="rect">
+            <a:avLst/>
+          </a:prstGeom>
+          <a:noFill/>
+        </p:spPr>
+        <p:txBody>
+          <a:bodyPr wrap="square" anchor="ctr" lIns="0" rIns="0" tIns="0" bIns="0">
+            <a:noAutofit/>
           </a:bodyPr>
           <a:lstStyle/>
           <a:p>
@@ -8153,117 +9662,87 @@
                 </a:solidFill>
                 <a:latin typeface="Helvetica Neue"/>
               </a:rPr>
-              <a:t>TRY IT NOW</a:t>
-            </a:r>
-          </a:p>
-        </p:txBody>
-      </p:sp>
-      <p:sp>
-        <p:nvSpPr>
-          <p:cNvPr id="13" name="TextBox 12"/>
-          <p:cNvSpPr txBox="1"/>
-          <p:nvPr/>
-        </p:nvSpPr>
-        <p:spPr>
-          <a:xfrm>
-            <a:off x="822960" y="5870448"/>
-            <a:ext cx="5212080" cy="411480"/>
-          </a:xfrm>
-          <a:prstGeom prst="rect">
-            <a:avLst/>
-          </a:prstGeom>
-          <a:noFill/>
-        </p:spPr>
-        <p:txBody>
-          <a:bodyPr wrap="square" anchor="t" lIns="0" rIns="0" tIns="0" bIns="0">
-            <a:spAutoFit/>
-          </a:bodyPr>
-          <a:lstStyle/>
-          <a:p>
-            <a:pPr algn="l">
+              <a:t>TRY IT NOW  </a:t>
+            </a:r>
+            <a:r>
+              <a:rPr sz="1300" b="1" i="0">
+                <a:solidFill>
+                  <a:srgbClr val="09090B"/>
+                </a:solidFill>
+                <a:latin typeface="Courier New"/>
+              </a:rPr>
+              <a:t>→  github.com/Avinash07-git/momsaheli</a:t>
+            </a:r>
+          </a:p>
+        </p:txBody>
+      </p:sp>
+      <p:sp>
+        <p:nvSpPr>
+          <p:cNvPr id="15" name="TextBox 14"/>
+          <p:cNvSpPr txBox="1"/>
+          <p:nvPr/>
+        </p:nvSpPr>
+        <p:spPr>
+          <a:xfrm>
+            <a:off x="10424160" y="5852160"/>
+            <a:ext cx="1371600" cy="914400"/>
+          </a:xfrm>
+          <a:prstGeom prst="rect">
+            <a:avLst/>
+          </a:prstGeom>
+          <a:noFill/>
+        </p:spPr>
+        <p:txBody>
+          <a:bodyPr wrap="square" anchor="t" lIns="0" rIns="0" tIns="0" bIns="0">
+            <a:noAutofit/>
+          </a:bodyPr>
+          <a:lstStyle/>
+          <a:p>
+            <a:pPr algn="ctr">
               <a:lnSpc>
                 <a:spcPct val="115000"/>
               </a:lnSpc>
             </a:pPr>
             <a:r>
-              <a:rPr sz="1400" b="1" i="0">
-                <a:solidFill>
-                  <a:srgbClr val="09090B"/>
-                </a:solidFill>
-                <a:latin typeface="Courier New"/>
-              </a:rPr>
-              <a:t>github.com/Avinash07-git/momsaheli</a:t>
-            </a:r>
-          </a:p>
-        </p:txBody>
-      </p:sp>
-      <p:sp>
-        <p:nvSpPr>
-          <p:cNvPr id="14" name="TextBox 13"/>
-          <p:cNvSpPr txBox="1"/>
-          <p:nvPr/>
-        </p:nvSpPr>
-        <p:spPr>
-          <a:xfrm>
-            <a:off x="10424160" y="5486400"/>
-            <a:ext cx="1371600" cy="914400"/>
-          </a:xfrm>
-          <a:prstGeom prst="rect">
-            <a:avLst/>
-          </a:prstGeom>
-          <a:noFill/>
-        </p:spPr>
-        <p:txBody>
-          <a:bodyPr wrap="square" anchor="t" lIns="0" rIns="0" tIns="0" bIns="0">
-            <a:spAutoFit/>
-          </a:bodyPr>
-          <a:lstStyle/>
-          <a:p>
-            <a:pPr algn="ctr">
+              <a:rPr sz="5400" b="0" i="0">
+                <a:solidFill>
+                  <a:srgbClr val="FDF8F0"/>
+                </a:solidFill>
+                <a:latin typeface="Georgia"/>
+              </a:rPr>
+              <a:t>🌸</a:t>
+            </a:r>
+          </a:p>
+        </p:txBody>
+      </p:sp>
+      <p:sp>
+        <p:nvSpPr>
+          <p:cNvPr id="16" name="TextBox 15"/>
+          <p:cNvSpPr txBox="1"/>
+          <p:nvPr/>
+        </p:nvSpPr>
+        <p:spPr>
+          <a:xfrm>
+            <a:off x="548640" y="6537960"/>
+            <a:ext cx="10972800" cy="274320"/>
+          </a:xfrm>
+          <a:prstGeom prst="rect">
+            <a:avLst/>
+          </a:prstGeom>
+          <a:noFill/>
+        </p:spPr>
+        <p:txBody>
+          <a:bodyPr wrap="square" anchor="t" lIns="0" rIns="0" tIns="0" bIns="0">
+            <a:noAutofit/>
+          </a:bodyPr>
+          <a:lstStyle/>
+          <a:p>
+            <a:pPr algn="l">
               <a:lnSpc>
                 <a:spcPct val="115000"/>
               </a:lnSpc>
             </a:pPr>
             <a:r>
-              <a:rPr sz="6000" b="0" i="0">
-                <a:solidFill>
-                  <a:srgbClr val="F59E0B"/>
-                </a:solidFill>
-                <a:latin typeface="Georgia"/>
-              </a:rPr>
-              <a:t>🌸</a:t>
-            </a:r>
-          </a:p>
-        </p:txBody>
-      </p:sp>
-      <p:sp>
-        <p:nvSpPr>
-          <p:cNvPr id="15" name="TextBox 14"/>
-          <p:cNvSpPr txBox="1"/>
-          <p:nvPr/>
-        </p:nvSpPr>
-        <p:spPr>
-          <a:xfrm>
-            <a:off x="548640" y="6492240"/>
-            <a:ext cx="10972800" cy="274320"/>
-          </a:xfrm>
-          <a:prstGeom prst="rect">
-            <a:avLst/>
-          </a:prstGeom>
-          <a:noFill/>
-        </p:spPr>
-        <p:txBody>
-          <a:bodyPr wrap="square" anchor="t" lIns="0" rIns="0" tIns="0" bIns="0">
-            <a:spAutoFit/>
-          </a:bodyPr>
-          <a:lstStyle/>
-          <a:p>
-            <a:pPr algn="l">
-              <a:lnSpc>
-                <a:spcPct val="115000"/>
-              </a:lnSpc>
-            </a:pPr>
-            <a:r>
               <a:rPr sz="1000" b="0" i="1">
                 <a:solidFill>
                   <a:srgbClr val="71717A"/>
@@ -8277,13 +9756,13 @@
       </p:sp>
       <p:sp>
         <p:nvSpPr>
-          <p:cNvPr id="16" name="TextBox 15"/>
-          <p:cNvSpPr txBox="1"/>
-          <p:nvPr/>
-        </p:nvSpPr>
-        <p:spPr>
-          <a:xfrm>
-            <a:off x="10972800" y="6492240"/>
+          <p:cNvPr id="17" name="TextBox 16"/>
+          <p:cNvSpPr txBox="1"/>
+          <p:nvPr/>
+        </p:nvSpPr>
+        <p:spPr>
+          <a:xfrm>
+            <a:off x="10972800" y="6537960"/>
             <a:ext cx="914400" cy="274320"/>
           </a:xfrm>
           <a:prstGeom prst="rect">
@@ -8293,7 +9772,7 @@
         </p:spPr>
         <p:txBody>
           <a:bodyPr wrap="square" anchor="t" lIns="0" rIns="0" tIns="0" bIns="0">
-            <a:spAutoFit/>
+            <a:noAutofit/>
           </a:bodyPr>
           <a:lstStyle/>
           <a:p>
